--- a/become-a-metadata-driven-dba/become-a-metadata-driven-dba.pptx
+++ b/become-a-metadata-driven-dba/become-a-metadata-driven-dba.pptx
@@ -5,12 +5,15 @@
     <p:sldMasterId id="2147483648" r:id="rId1"/>
     <p:sldMasterId id="2147483660" r:id="rId2"/>
   </p:sldMasterIdLst>
+  <p:notesMasterIdLst>
+    <p:notesMasterId r:id="rId20"/>
+  </p:notesMasterIdLst>
   <p:sldIdLst>
     <p:sldId id="256" r:id="rId3"/>
-    <p:sldId id="257" r:id="rId4"/>
-    <p:sldId id="258" r:id="rId5"/>
-    <p:sldId id="271" r:id="rId6"/>
-    <p:sldId id="272" r:id="rId7"/>
+    <p:sldId id="286" r:id="rId4"/>
+    <p:sldId id="257" r:id="rId5"/>
+    <p:sldId id="258" r:id="rId6"/>
+    <p:sldId id="271" r:id="rId7"/>
     <p:sldId id="259" r:id="rId8"/>
     <p:sldId id="270" r:id="rId9"/>
     <p:sldId id="267" r:id="rId10"/>
@@ -22,8 +25,7 @@
     <p:sldId id="265" r:id="rId16"/>
     <p:sldId id="266" r:id="rId17"/>
     <p:sldId id="269" r:id="rId18"/>
-    <p:sldId id="273" r:id="rId19"/>
-    <p:sldId id="274" r:id="rId20"/>
+    <p:sldId id="272" r:id="rId19"/>
   </p:sldIdLst>
   <p:sldSz cx="12192000" cy="6858000"/>
   <p:notesSz cx="6858000" cy="9144000"/>
@@ -14383,6 +14385,500 @@
 </dgm:styleDef>
 </file>
 
+<file path=ppt/notesMasters/notesMaster1.xml><?xml version="1.0" encoding="utf-8"?>
+<p:notesMaster xmlns:a="http://schemas.openxmlformats.org/drawingml/2006/main" xmlns:r="http://schemas.openxmlformats.org/officeDocument/2006/relationships" xmlns:p="http://schemas.openxmlformats.org/presentationml/2006/main">
+  <p:cSld>
+    <p:bg>
+      <p:bgRef idx="1001">
+        <a:schemeClr val="bg1"/>
+      </p:bgRef>
+    </p:bg>
+    <p:spTree>
+      <p:nvGrpSpPr>
+        <p:cNvPr id="1" name=""/>
+        <p:cNvGrpSpPr/>
+        <p:nvPr/>
+      </p:nvGrpSpPr>
+      <p:grpSpPr>
+        <a:xfrm>
+          <a:off x="0" y="0"/>
+          <a:ext cx="0" cy="0"/>
+          <a:chOff x="0" y="0"/>
+          <a:chExt cx="0" cy="0"/>
+        </a:xfrm>
+      </p:grpSpPr>
+      <p:sp>
+        <p:nvSpPr>
+          <p:cNvPr id="2" name="Header Placeholder 1"/>
+          <p:cNvSpPr>
+            <a:spLocks noGrp="1"/>
+          </p:cNvSpPr>
+          <p:nvPr>
+            <p:ph type="hdr" sz="quarter"/>
+          </p:nvPr>
+        </p:nvSpPr>
+        <p:spPr>
+          <a:xfrm>
+            <a:off x="0" y="0"/>
+            <a:ext cx="2971800" cy="458788"/>
+          </a:xfrm>
+          <a:prstGeom prst="rect">
+            <a:avLst/>
+          </a:prstGeom>
+        </p:spPr>
+        <p:txBody>
+          <a:bodyPr vert="horz" lIns="91440" tIns="45720" rIns="91440" bIns="45720" rtlCol="0"/>
+          <a:lstStyle>
+            <a:lvl1pPr algn="l">
+              <a:defRPr sz="1200"/>
+            </a:lvl1pPr>
+          </a:lstStyle>
+          <a:p>
+            <a:endParaRPr lang="LID4096"/>
+          </a:p>
+        </p:txBody>
+      </p:sp>
+      <p:sp>
+        <p:nvSpPr>
+          <p:cNvPr id="3" name="Date Placeholder 2"/>
+          <p:cNvSpPr>
+            <a:spLocks noGrp="1"/>
+          </p:cNvSpPr>
+          <p:nvPr>
+            <p:ph type="dt" idx="1"/>
+          </p:nvPr>
+        </p:nvSpPr>
+        <p:spPr>
+          <a:xfrm>
+            <a:off x="3884613" y="0"/>
+            <a:ext cx="2971800" cy="458788"/>
+          </a:xfrm>
+          <a:prstGeom prst="rect">
+            <a:avLst/>
+          </a:prstGeom>
+        </p:spPr>
+        <p:txBody>
+          <a:bodyPr vert="horz" lIns="91440" tIns="45720" rIns="91440" bIns="45720" rtlCol="0"/>
+          <a:lstStyle>
+            <a:lvl1pPr algn="r">
+              <a:defRPr sz="1200"/>
+            </a:lvl1pPr>
+          </a:lstStyle>
+          <a:p>
+            <a:fld id="{A9242A11-50F3-46FC-83B1-639E4E871CB9}" type="datetimeFigureOut">
+              <a:rPr lang="LID4096" smtClean="0"/>
+              <a:t>10/08/2024</a:t>
+            </a:fld>
+            <a:endParaRPr lang="LID4096"/>
+          </a:p>
+        </p:txBody>
+      </p:sp>
+      <p:sp>
+        <p:nvSpPr>
+          <p:cNvPr id="4" name="Slide Image Placeholder 3"/>
+          <p:cNvSpPr>
+            <a:spLocks noGrp="1" noRot="1" noChangeAspect="1"/>
+          </p:cNvSpPr>
+          <p:nvPr>
+            <p:ph type="sldImg" idx="2"/>
+          </p:nvPr>
+        </p:nvSpPr>
+        <p:spPr>
+          <a:xfrm>
+            <a:off x="685800" y="1143000"/>
+            <a:ext cx="5486400" cy="3086100"/>
+          </a:xfrm>
+          <a:prstGeom prst="rect">
+            <a:avLst/>
+          </a:prstGeom>
+          <a:noFill/>
+          <a:ln w="12700">
+            <a:solidFill>
+              <a:prstClr val="black"/>
+            </a:solidFill>
+          </a:ln>
+        </p:spPr>
+        <p:txBody>
+          <a:bodyPr vert="horz" lIns="91440" tIns="45720" rIns="91440" bIns="45720" rtlCol="0" anchor="ctr"/>
+          <a:lstStyle/>
+          <a:p>
+            <a:endParaRPr lang="LID4096"/>
+          </a:p>
+        </p:txBody>
+      </p:sp>
+      <p:sp>
+        <p:nvSpPr>
+          <p:cNvPr id="5" name="Notes Placeholder 4"/>
+          <p:cNvSpPr>
+            <a:spLocks noGrp="1"/>
+          </p:cNvSpPr>
+          <p:nvPr>
+            <p:ph type="body" sz="quarter" idx="3"/>
+          </p:nvPr>
+        </p:nvSpPr>
+        <p:spPr>
+          <a:xfrm>
+            <a:off x="685800" y="4400550"/>
+            <a:ext cx="5486400" cy="3600450"/>
+          </a:xfrm>
+          <a:prstGeom prst="rect">
+            <a:avLst/>
+          </a:prstGeom>
+        </p:spPr>
+        <p:txBody>
+          <a:bodyPr vert="horz" lIns="91440" tIns="45720" rIns="91440" bIns="45720" rtlCol="0"/>
+          <a:lstStyle/>
+          <a:p>
+            <a:pPr lvl="0"/>
+            <a:r>
+              <a:rPr lang="en-US"/>
+              <a:t>Click to edit Master text styles</a:t>
+            </a:r>
+          </a:p>
+          <a:p>
+            <a:pPr lvl="1"/>
+            <a:r>
+              <a:rPr lang="en-US"/>
+              <a:t>Second level</a:t>
+            </a:r>
+          </a:p>
+          <a:p>
+            <a:pPr lvl="2"/>
+            <a:r>
+              <a:rPr lang="en-US"/>
+              <a:t>Third level</a:t>
+            </a:r>
+          </a:p>
+          <a:p>
+            <a:pPr lvl="3"/>
+            <a:r>
+              <a:rPr lang="en-US"/>
+              <a:t>Fourth level</a:t>
+            </a:r>
+          </a:p>
+          <a:p>
+            <a:pPr lvl="4"/>
+            <a:r>
+              <a:rPr lang="en-US"/>
+              <a:t>Fifth level</a:t>
+            </a:r>
+            <a:endParaRPr lang="LID4096"/>
+          </a:p>
+        </p:txBody>
+      </p:sp>
+      <p:sp>
+        <p:nvSpPr>
+          <p:cNvPr id="6" name="Footer Placeholder 5"/>
+          <p:cNvSpPr>
+            <a:spLocks noGrp="1"/>
+          </p:cNvSpPr>
+          <p:nvPr>
+            <p:ph type="ftr" sz="quarter" idx="4"/>
+          </p:nvPr>
+        </p:nvSpPr>
+        <p:spPr>
+          <a:xfrm>
+            <a:off x="0" y="8685213"/>
+            <a:ext cx="2971800" cy="458787"/>
+          </a:xfrm>
+          <a:prstGeom prst="rect">
+            <a:avLst/>
+          </a:prstGeom>
+        </p:spPr>
+        <p:txBody>
+          <a:bodyPr vert="horz" lIns="91440" tIns="45720" rIns="91440" bIns="45720" rtlCol="0" anchor="b"/>
+          <a:lstStyle>
+            <a:lvl1pPr algn="l">
+              <a:defRPr sz="1200"/>
+            </a:lvl1pPr>
+          </a:lstStyle>
+          <a:p>
+            <a:endParaRPr lang="LID4096"/>
+          </a:p>
+        </p:txBody>
+      </p:sp>
+      <p:sp>
+        <p:nvSpPr>
+          <p:cNvPr id="7" name="Slide Number Placeholder 6"/>
+          <p:cNvSpPr>
+            <a:spLocks noGrp="1"/>
+          </p:cNvSpPr>
+          <p:nvPr>
+            <p:ph type="sldNum" sz="quarter" idx="5"/>
+          </p:nvPr>
+        </p:nvSpPr>
+        <p:spPr>
+          <a:xfrm>
+            <a:off x="3884613" y="8685213"/>
+            <a:ext cx="2971800" cy="458787"/>
+          </a:xfrm>
+          <a:prstGeom prst="rect">
+            <a:avLst/>
+          </a:prstGeom>
+        </p:spPr>
+        <p:txBody>
+          <a:bodyPr vert="horz" lIns="91440" tIns="45720" rIns="91440" bIns="45720" rtlCol="0" anchor="b"/>
+          <a:lstStyle>
+            <a:lvl1pPr algn="r">
+              <a:defRPr sz="1200"/>
+            </a:lvl1pPr>
+          </a:lstStyle>
+          <a:p>
+            <a:fld id="{3C01AB6C-690F-4405-9803-5741F8B136D4}" type="slidenum">
+              <a:rPr lang="LID4096" smtClean="0"/>
+              <a:t>‹#›</a:t>
+            </a:fld>
+            <a:endParaRPr lang="LID4096"/>
+          </a:p>
+        </p:txBody>
+      </p:sp>
+    </p:spTree>
+    <p:extLst>
+      <p:ext uri="{BB962C8B-B14F-4D97-AF65-F5344CB8AC3E}">
+        <p14:creationId xmlns:p14="http://schemas.microsoft.com/office/powerpoint/2010/main" val="3052645995"/>
+      </p:ext>
+    </p:extLst>
+  </p:cSld>
+  <p:clrMap bg1="lt1" tx1="dk1" bg2="lt2" tx2="dk2" accent1="accent1" accent2="accent2" accent3="accent3" accent4="accent4" accent5="accent5" accent6="accent6" hlink="hlink" folHlink="folHlink"/>
+  <p:notesStyle>
+    <a:lvl1pPr marL="0" algn="l" defTabSz="914400" rtl="0" eaLnBrk="1" latinLnBrk="0" hangingPunct="1">
+      <a:defRPr sz="1200" kern="1200">
+        <a:solidFill>
+          <a:schemeClr val="tx1"/>
+        </a:solidFill>
+        <a:latin typeface="+mn-lt"/>
+        <a:ea typeface="+mn-ea"/>
+        <a:cs typeface="+mn-cs"/>
+      </a:defRPr>
+    </a:lvl1pPr>
+    <a:lvl2pPr marL="457200" algn="l" defTabSz="914400" rtl="0" eaLnBrk="1" latinLnBrk="0" hangingPunct="1">
+      <a:defRPr sz="1200" kern="1200">
+        <a:solidFill>
+          <a:schemeClr val="tx1"/>
+        </a:solidFill>
+        <a:latin typeface="+mn-lt"/>
+        <a:ea typeface="+mn-ea"/>
+        <a:cs typeface="+mn-cs"/>
+      </a:defRPr>
+    </a:lvl2pPr>
+    <a:lvl3pPr marL="914400" algn="l" defTabSz="914400" rtl="0" eaLnBrk="1" latinLnBrk="0" hangingPunct="1">
+      <a:defRPr sz="1200" kern="1200">
+        <a:solidFill>
+          <a:schemeClr val="tx1"/>
+        </a:solidFill>
+        <a:latin typeface="+mn-lt"/>
+        <a:ea typeface="+mn-ea"/>
+        <a:cs typeface="+mn-cs"/>
+      </a:defRPr>
+    </a:lvl3pPr>
+    <a:lvl4pPr marL="1371600" algn="l" defTabSz="914400" rtl="0" eaLnBrk="1" latinLnBrk="0" hangingPunct="1">
+      <a:defRPr sz="1200" kern="1200">
+        <a:solidFill>
+          <a:schemeClr val="tx1"/>
+        </a:solidFill>
+        <a:latin typeface="+mn-lt"/>
+        <a:ea typeface="+mn-ea"/>
+        <a:cs typeface="+mn-cs"/>
+      </a:defRPr>
+    </a:lvl4pPr>
+    <a:lvl5pPr marL="1828800" algn="l" defTabSz="914400" rtl="0" eaLnBrk="1" latinLnBrk="0" hangingPunct="1">
+      <a:defRPr sz="1200" kern="1200">
+        <a:solidFill>
+          <a:schemeClr val="tx1"/>
+        </a:solidFill>
+        <a:latin typeface="+mn-lt"/>
+        <a:ea typeface="+mn-ea"/>
+        <a:cs typeface="+mn-cs"/>
+      </a:defRPr>
+    </a:lvl5pPr>
+    <a:lvl6pPr marL="2286000" algn="l" defTabSz="914400" rtl="0" eaLnBrk="1" latinLnBrk="0" hangingPunct="1">
+      <a:defRPr sz="1200" kern="1200">
+        <a:solidFill>
+          <a:schemeClr val="tx1"/>
+        </a:solidFill>
+        <a:latin typeface="+mn-lt"/>
+        <a:ea typeface="+mn-ea"/>
+        <a:cs typeface="+mn-cs"/>
+      </a:defRPr>
+    </a:lvl6pPr>
+    <a:lvl7pPr marL="2743200" algn="l" defTabSz="914400" rtl="0" eaLnBrk="1" latinLnBrk="0" hangingPunct="1">
+      <a:defRPr sz="1200" kern="1200">
+        <a:solidFill>
+          <a:schemeClr val="tx1"/>
+        </a:solidFill>
+        <a:latin typeface="+mn-lt"/>
+        <a:ea typeface="+mn-ea"/>
+        <a:cs typeface="+mn-cs"/>
+      </a:defRPr>
+    </a:lvl7pPr>
+    <a:lvl8pPr marL="3200400" algn="l" defTabSz="914400" rtl="0" eaLnBrk="1" latinLnBrk="0" hangingPunct="1">
+      <a:defRPr sz="1200" kern="1200">
+        <a:solidFill>
+          <a:schemeClr val="tx1"/>
+        </a:solidFill>
+        <a:latin typeface="+mn-lt"/>
+        <a:ea typeface="+mn-ea"/>
+        <a:cs typeface="+mn-cs"/>
+      </a:defRPr>
+    </a:lvl8pPr>
+    <a:lvl9pPr marL="3657600" algn="l" defTabSz="914400" rtl="0" eaLnBrk="1" latinLnBrk="0" hangingPunct="1">
+      <a:defRPr sz="1200" kern="1200">
+        <a:solidFill>
+          <a:schemeClr val="tx1"/>
+        </a:solidFill>
+        <a:latin typeface="+mn-lt"/>
+        <a:ea typeface="+mn-ea"/>
+        <a:cs typeface="+mn-cs"/>
+      </a:defRPr>
+    </a:lvl9pPr>
+  </p:notesStyle>
+</p:notesMaster>
+</file>
+
+<file path=ppt/notesSlides/notesSlide1.xml><?xml version="1.0" encoding="utf-8"?>
+<p:notes xmlns:a="http://schemas.openxmlformats.org/drawingml/2006/main" xmlns:r="http://schemas.openxmlformats.org/officeDocument/2006/relationships" xmlns:p="http://schemas.openxmlformats.org/presentationml/2006/main">
+  <p:cSld>
+    <p:spTree>
+      <p:nvGrpSpPr>
+        <p:cNvPr id="1" name=""/>
+        <p:cNvGrpSpPr/>
+        <p:nvPr/>
+      </p:nvGrpSpPr>
+      <p:grpSpPr>
+        <a:xfrm>
+          <a:off x="0" y="0"/>
+          <a:ext cx="0" cy="0"/>
+          <a:chOff x="0" y="0"/>
+          <a:chExt cx="0" cy="0"/>
+        </a:xfrm>
+      </p:grpSpPr>
+      <p:sp>
+        <p:nvSpPr>
+          <p:cNvPr id="2" name="Slide Image Placeholder 1"/>
+          <p:cNvSpPr>
+            <a:spLocks noGrp="1" noRot="1" noChangeAspect="1"/>
+          </p:cNvSpPr>
+          <p:nvPr>
+            <p:ph type="sldImg"/>
+          </p:nvPr>
+        </p:nvSpPr>
+        <p:spPr/>
+      </p:sp>
+      <p:sp>
+        <p:nvSpPr>
+          <p:cNvPr id="3" name="Notes Placeholder 2"/>
+          <p:cNvSpPr>
+            <a:spLocks noGrp="1"/>
+          </p:cNvSpPr>
+          <p:nvPr>
+            <p:ph type="body" idx="1"/>
+          </p:nvPr>
+        </p:nvSpPr>
+        <p:spPr/>
+        <p:txBody>
+          <a:bodyPr/>
+          <a:lstStyle/>
+          <a:p>
+            <a:endParaRPr lang="LID4096" dirty="0"/>
+          </a:p>
+        </p:txBody>
+      </p:sp>
+      <p:sp>
+        <p:nvSpPr>
+          <p:cNvPr id="4" name="Slide Number Placeholder 3"/>
+          <p:cNvSpPr>
+            <a:spLocks noGrp="1"/>
+          </p:cNvSpPr>
+          <p:nvPr>
+            <p:ph type="sldNum" sz="quarter" idx="5"/>
+          </p:nvPr>
+        </p:nvSpPr>
+        <p:spPr/>
+        <p:txBody>
+          <a:bodyPr/>
+          <a:lstStyle/>
+          <a:p>
+            <a:pPr marL="0" marR="0" lvl="0" indent="0" algn="r" defTabSz="914400" rtl="0" eaLnBrk="1" fontAlgn="auto" latinLnBrk="0" hangingPunct="1">
+              <a:lnSpc>
+                <a:spcPct val="100000"/>
+              </a:lnSpc>
+              <a:spcBef>
+                <a:spcPts val="0"/>
+              </a:spcBef>
+              <a:spcAft>
+                <a:spcPts val="0"/>
+              </a:spcAft>
+              <a:buClrTx/>
+              <a:buSzTx/>
+              <a:buFontTx/>
+              <a:buNone/>
+              <a:tabLst/>
+              <a:defRPr/>
+            </a:pPr>
+            <a:fld id="{B4FD2E09-072C-B746-994E-E046AF286656}" type="slidenum">
+              <a:rPr kumimoji="0" lang="en-US" sz="1200" b="0" i="0" u="none" strike="noStrike" kern="1200" cap="none" spc="0" normalizeH="0" baseline="0" noProof="0" smtClean="0">
+                <a:ln>
+                  <a:noFill/>
+                </a:ln>
+                <a:solidFill>
+                  <a:prstClr val="black"/>
+                </a:solidFill>
+                <a:effectLst/>
+                <a:uLnTx/>
+                <a:uFillTx/>
+                <a:latin typeface="Calibri" panose="020F0502020204030204"/>
+                <a:ea typeface="+mn-ea"/>
+                <a:cs typeface="+mn-cs"/>
+              </a:rPr>
+              <a:pPr marL="0" marR="0" lvl="0" indent="0" algn="r" defTabSz="914400" rtl="0" eaLnBrk="1" fontAlgn="auto" latinLnBrk="0" hangingPunct="1">
+                <a:lnSpc>
+                  <a:spcPct val="100000"/>
+                </a:lnSpc>
+                <a:spcBef>
+                  <a:spcPts val="0"/>
+                </a:spcBef>
+                <a:spcAft>
+                  <a:spcPts val="0"/>
+                </a:spcAft>
+                <a:buClrTx/>
+                <a:buSzTx/>
+                <a:buFontTx/>
+                <a:buNone/>
+                <a:tabLst/>
+                <a:defRPr/>
+              </a:pPr>
+              <a:t>2</a:t>
+            </a:fld>
+            <a:endParaRPr kumimoji="0" lang="en-US" sz="1200" b="0" i="0" u="none" strike="noStrike" kern="1200" cap="none" spc="0" normalizeH="0" baseline="0" noProof="0">
+              <a:ln>
+                <a:noFill/>
+              </a:ln>
+              <a:solidFill>
+                <a:prstClr val="black"/>
+              </a:solidFill>
+              <a:effectLst/>
+              <a:uLnTx/>
+              <a:uFillTx/>
+              <a:latin typeface="Calibri" panose="020F0502020204030204"/>
+              <a:ea typeface="+mn-ea"/>
+              <a:cs typeface="+mn-cs"/>
+            </a:endParaRPr>
+          </a:p>
+        </p:txBody>
+      </p:sp>
+    </p:spTree>
+    <p:extLst>
+      <p:ext uri="{BB962C8B-B14F-4D97-AF65-F5344CB8AC3E}">
+        <p14:creationId xmlns:p14="http://schemas.microsoft.com/office/powerpoint/2010/main" val="3696054872"/>
+      </p:ext>
+    </p:extLst>
+  </p:cSld>
+  <p:clrMapOvr>
+    <a:masterClrMapping/>
+  </p:clrMapOvr>
+</p:notes>
+</file>
+
 <file path=ppt/slideLayouts/slideLayout1.xml><?xml version="1.0" encoding="utf-8"?>
 <p:sldLayout xmlns:a="http://schemas.openxmlformats.org/drawingml/2006/main" xmlns:r="http://schemas.openxmlformats.org/officeDocument/2006/relationships" xmlns:p="http://schemas.openxmlformats.org/presentationml/2006/main" type="title" preserve="1">
   <p:cSld name="Title Slide">
@@ -14538,7 +15034,7 @@
           <a:p>
             <a:fld id="{96FF6413-3139-4955-9DFE-23DDB370AD4E}" type="datetimeFigureOut">
               <a:rPr lang="LID4096" smtClean="0"/>
-              <a:t>09/07/2024</a:t>
+              <a:t>10/08/2024</a:t>
             </a:fld>
             <a:endParaRPr lang="LID4096" dirty="0"/>
           </a:p>
@@ -14776,7 +15272,7 @@
           <a:p>
             <a:fld id="{96FF6413-3139-4955-9DFE-23DDB370AD4E}" type="datetimeFigureOut">
               <a:rPr lang="LID4096" smtClean="0"/>
-              <a:t>09/07/2024</a:t>
+              <a:t>10/08/2024</a:t>
             </a:fld>
             <a:endParaRPr lang="LID4096"/>
           </a:p>
@@ -15024,7 +15520,7 @@
           <a:p>
             <a:fld id="{96FF6413-3139-4955-9DFE-23DDB370AD4E}" type="datetimeFigureOut">
               <a:rPr lang="LID4096" smtClean="0"/>
-              <a:t>09/07/2024</a:t>
+              <a:t>10/08/2024</a:t>
             </a:fld>
             <a:endParaRPr lang="LID4096"/>
           </a:p>
@@ -15099,7 +15595,7 @@
 
 <file path=ppt/slideLayouts/slideLayout12.xml><?xml version="1.0" encoding="utf-8"?>
 <p:sldLayout xmlns:a="http://schemas.openxmlformats.org/drawingml/2006/main" xmlns:r="http://schemas.openxmlformats.org/officeDocument/2006/relationships" xmlns:p="http://schemas.openxmlformats.org/presentationml/2006/main" type="title" preserve="1">
-  <p:cSld name="Rubrikbild">
+  <p:cSld name="Title Slide">
     <p:spTree>
       <p:nvGrpSpPr>
         <p:cNvPr id="1" name=""/>
@@ -15116,10 +15612,10 @@
       </p:grpSpPr>
       <p:sp>
         <p:nvSpPr>
-          <p:cNvPr id="2" name="Rubrik 1">
+          <p:cNvPr id="2" name="Title 1">
             <a:extLst>
               <a:ext uri="{FF2B5EF4-FFF2-40B4-BE49-F238E27FC236}">
-                <a16:creationId xmlns:a16="http://schemas.microsoft.com/office/drawing/2014/main" id="{70F57A4A-2A27-8BB2-4968-5831827389EC}"/>
+                <a16:creationId xmlns:a16="http://schemas.microsoft.com/office/drawing/2014/main" id="{59142A5C-783E-5BA9-3109-C64CED2BD085}"/>
               </a:ext>
             </a:extLst>
           </p:cNvPr>
@@ -15145,18 +15641,19 @@
           </a:lstStyle>
           <a:p>
             <a:r>
-              <a:rPr lang="sv-SE"/>
-              <a:t>Klicka här för att ändra mall för rubrikformat</a:t>
+              <a:rPr lang="en-US"/>
+              <a:t>Click to edit Master title style</a:t>
             </a:r>
+            <a:endParaRPr lang="LID4096"/>
           </a:p>
         </p:txBody>
       </p:sp>
       <p:sp>
         <p:nvSpPr>
-          <p:cNvPr id="3" name="Underrubrik 2">
+          <p:cNvPr id="3" name="Subtitle 2">
             <a:extLst>
               <a:ext uri="{FF2B5EF4-FFF2-40B4-BE49-F238E27FC236}">
-                <a16:creationId xmlns:a16="http://schemas.microsoft.com/office/drawing/2014/main" id="{F1EDA261-0E9A-6736-8D3D-B061B35EB5EB}"/>
+                <a16:creationId xmlns:a16="http://schemas.microsoft.com/office/drawing/2014/main" id="{12B33CFD-A946-6B59-6637-07BE5A9402CC}"/>
               </a:ext>
             </a:extLst>
           </p:cNvPr>
@@ -15215,18 +15712,19 @@
           </a:lstStyle>
           <a:p>
             <a:r>
-              <a:rPr lang="sv-SE"/>
-              <a:t>Klicka här för att ändra mall för underrubrikformat</a:t>
+              <a:rPr lang="en-US"/>
+              <a:t>Click to edit Master subtitle style</a:t>
             </a:r>
+            <a:endParaRPr lang="LID4096"/>
           </a:p>
         </p:txBody>
       </p:sp>
       <p:sp>
         <p:nvSpPr>
-          <p:cNvPr id="4" name="Platshållare för datum 3">
+          <p:cNvPr id="4" name="Date Placeholder 3">
             <a:extLst>
               <a:ext uri="{FF2B5EF4-FFF2-40B4-BE49-F238E27FC236}">
-                <a16:creationId xmlns:a16="http://schemas.microsoft.com/office/drawing/2014/main" id="{780902CB-ECCB-AD3F-705E-39FB05B3B31D}"/>
+                <a16:creationId xmlns:a16="http://schemas.microsoft.com/office/drawing/2014/main" id="{105DE59D-9E34-8B0B-7133-E2667BAA107B}"/>
               </a:ext>
             </a:extLst>
           </p:cNvPr>
@@ -15242,20 +15740,20 @@
           <a:bodyPr/>
           <a:lstStyle/>
           <a:p>
-            <a:fld id="{4617FB60-BF3C-4081-9AB7-A4E16EDB9E9D}" type="datetimeFigureOut">
-              <a:rPr lang="sv-SE" smtClean="0"/>
-              <a:t>2024-09-07</a:t>
+            <a:fld id="{AF45165C-61D5-42B7-9D8B-D94D579A4112}" type="datetimeFigureOut">
+              <a:rPr lang="LID4096" smtClean="0"/>
+              <a:t>10/08/2024</a:t>
             </a:fld>
-            <a:endParaRPr lang="sv-SE"/>
+            <a:endParaRPr lang="LID4096"/>
           </a:p>
         </p:txBody>
       </p:sp>
       <p:sp>
         <p:nvSpPr>
-          <p:cNvPr id="5" name="Platshållare för sidfot 4">
+          <p:cNvPr id="5" name="Footer Placeholder 4">
             <a:extLst>
               <a:ext uri="{FF2B5EF4-FFF2-40B4-BE49-F238E27FC236}">
-                <a16:creationId xmlns:a16="http://schemas.microsoft.com/office/drawing/2014/main" id="{969BC4B8-57BC-E27C-7230-C79EFD98777D}"/>
+                <a16:creationId xmlns:a16="http://schemas.microsoft.com/office/drawing/2014/main" id="{D0FE38BE-C4FA-E7EE-5F81-087480165BD7}"/>
               </a:ext>
             </a:extLst>
           </p:cNvPr>
@@ -15271,16 +15769,16 @@
           <a:bodyPr/>
           <a:lstStyle/>
           <a:p>
-            <a:endParaRPr lang="sv-SE"/>
+            <a:endParaRPr lang="LID4096"/>
           </a:p>
         </p:txBody>
       </p:sp>
       <p:sp>
         <p:nvSpPr>
-          <p:cNvPr id="6" name="Platshållare för bildnummer 5">
+          <p:cNvPr id="6" name="Slide Number Placeholder 5">
             <a:extLst>
               <a:ext uri="{FF2B5EF4-FFF2-40B4-BE49-F238E27FC236}">
-                <a16:creationId xmlns:a16="http://schemas.microsoft.com/office/drawing/2014/main" id="{9262F283-B0A9-EEBF-BA8C-D2421E6F0B93}"/>
+                <a16:creationId xmlns:a16="http://schemas.microsoft.com/office/drawing/2014/main" id="{B91A8298-BF49-FF15-2E61-9A4524E2076D}"/>
               </a:ext>
             </a:extLst>
           </p:cNvPr>
@@ -15296,18 +15794,18 @@
           <a:bodyPr/>
           <a:lstStyle/>
           <a:p>
-            <a:fld id="{35855755-DE42-431D-889F-A55AD89DA05D}" type="slidenum">
-              <a:rPr lang="sv-SE" smtClean="0"/>
+            <a:fld id="{D56D06D4-6DF8-4247-80D0-AFCDC6A01DC2}" type="slidenum">
+              <a:rPr lang="LID4096" smtClean="0"/>
               <a:t>‹#›</a:t>
             </a:fld>
-            <a:endParaRPr lang="sv-SE"/>
+            <a:endParaRPr lang="LID4096"/>
           </a:p>
         </p:txBody>
       </p:sp>
     </p:spTree>
     <p:extLst>
       <p:ext uri="{BB962C8B-B14F-4D97-AF65-F5344CB8AC3E}">
-        <p14:creationId xmlns:p14="http://schemas.microsoft.com/office/powerpoint/2010/main" val="2375788688"/>
+        <p14:creationId xmlns:p14="http://schemas.microsoft.com/office/powerpoint/2010/main" val="3538035464"/>
       </p:ext>
     </p:extLst>
   </p:cSld>
@@ -15319,7 +15817,7 @@
 
 <file path=ppt/slideLayouts/slideLayout13.xml><?xml version="1.0" encoding="utf-8"?>
 <p:sldLayout xmlns:a="http://schemas.openxmlformats.org/drawingml/2006/main" xmlns:r="http://schemas.openxmlformats.org/officeDocument/2006/relationships" xmlns:p="http://schemas.openxmlformats.org/presentationml/2006/main" type="obj" preserve="1">
-  <p:cSld name="Rubrik och innehåll">
+  <p:cSld name="Title and Content">
     <p:spTree>
       <p:nvGrpSpPr>
         <p:cNvPr id="1" name=""/>
@@ -15336,10 +15834,10 @@
       </p:grpSpPr>
       <p:sp>
         <p:nvSpPr>
-          <p:cNvPr id="2" name="Rubrik 1">
+          <p:cNvPr id="2" name="Title 1">
             <a:extLst>
               <a:ext uri="{FF2B5EF4-FFF2-40B4-BE49-F238E27FC236}">
-                <a16:creationId xmlns:a16="http://schemas.microsoft.com/office/drawing/2014/main" id="{777340CB-E5B4-E328-16B5-399CD0E1D743}"/>
+                <a16:creationId xmlns:a16="http://schemas.microsoft.com/office/drawing/2014/main" id="{7BAE19A2-FAAB-EC35-BB91-98136F171CA6}"/>
               </a:ext>
             </a:extLst>
           </p:cNvPr>
@@ -15356,18 +15854,19 @@
           <a:lstStyle/>
           <a:p>
             <a:r>
-              <a:rPr lang="sv-SE"/>
-              <a:t>Klicka här för att ändra mall för rubrikformat</a:t>
+              <a:rPr lang="en-US"/>
+              <a:t>Click to edit Master title style</a:t>
             </a:r>
+            <a:endParaRPr lang="LID4096"/>
           </a:p>
         </p:txBody>
       </p:sp>
       <p:sp>
         <p:nvSpPr>
-          <p:cNvPr id="3" name="Platshållare för innehåll 2">
+          <p:cNvPr id="3" name="Content Placeholder 2">
             <a:extLst>
               <a:ext uri="{FF2B5EF4-FFF2-40B4-BE49-F238E27FC236}">
-                <a16:creationId xmlns:a16="http://schemas.microsoft.com/office/drawing/2014/main" id="{BD11EF37-ECC1-14DB-FDF8-438962DF972B}"/>
+                <a16:creationId xmlns:a16="http://schemas.microsoft.com/office/drawing/2014/main" id="{ED85DE23-5F6A-A26C-77B7-02FEB26266BF}"/>
               </a:ext>
             </a:extLst>
           </p:cNvPr>
@@ -15385,46 +15884,47 @@
           <a:p>
             <a:pPr lvl="0"/>
             <a:r>
-              <a:rPr lang="sv-SE"/>
-              <a:t>Klicka här för att ändra format på bakgrundstexten</a:t>
+              <a:rPr lang="en-US"/>
+              <a:t>Click to edit Master text styles</a:t>
             </a:r>
           </a:p>
           <a:p>
             <a:pPr lvl="1"/>
             <a:r>
-              <a:rPr lang="sv-SE"/>
-              <a:t>Nivå två</a:t>
+              <a:rPr lang="en-US"/>
+              <a:t>Second level</a:t>
             </a:r>
           </a:p>
           <a:p>
             <a:pPr lvl="2"/>
             <a:r>
-              <a:rPr lang="sv-SE"/>
-              <a:t>Nivå tre</a:t>
+              <a:rPr lang="en-US"/>
+              <a:t>Third level</a:t>
             </a:r>
           </a:p>
           <a:p>
             <a:pPr lvl="3"/>
             <a:r>
-              <a:rPr lang="sv-SE"/>
-              <a:t>Nivå fyra</a:t>
+              <a:rPr lang="en-US"/>
+              <a:t>Fourth level</a:t>
             </a:r>
           </a:p>
           <a:p>
             <a:pPr lvl="4"/>
             <a:r>
-              <a:rPr lang="sv-SE"/>
-              <a:t>Nivå fem</a:t>
+              <a:rPr lang="en-US"/>
+              <a:t>Fifth level</a:t>
             </a:r>
+            <a:endParaRPr lang="LID4096"/>
           </a:p>
         </p:txBody>
       </p:sp>
       <p:sp>
         <p:nvSpPr>
-          <p:cNvPr id="4" name="Platshållare för datum 3">
+          <p:cNvPr id="4" name="Date Placeholder 3">
             <a:extLst>
               <a:ext uri="{FF2B5EF4-FFF2-40B4-BE49-F238E27FC236}">
-                <a16:creationId xmlns:a16="http://schemas.microsoft.com/office/drawing/2014/main" id="{33A45318-C0E0-28BD-FF04-071EF7A562C2}"/>
+                <a16:creationId xmlns:a16="http://schemas.microsoft.com/office/drawing/2014/main" id="{E466BA52-673F-EAEF-0B65-91340AB70F43}"/>
               </a:ext>
             </a:extLst>
           </p:cNvPr>
@@ -15440,20 +15940,20 @@
           <a:bodyPr/>
           <a:lstStyle/>
           <a:p>
-            <a:fld id="{4617FB60-BF3C-4081-9AB7-A4E16EDB9E9D}" type="datetimeFigureOut">
-              <a:rPr lang="sv-SE" smtClean="0"/>
-              <a:t>2024-09-07</a:t>
+            <a:fld id="{AF45165C-61D5-42B7-9D8B-D94D579A4112}" type="datetimeFigureOut">
+              <a:rPr lang="LID4096" smtClean="0"/>
+              <a:t>10/08/2024</a:t>
             </a:fld>
-            <a:endParaRPr lang="sv-SE"/>
+            <a:endParaRPr lang="LID4096"/>
           </a:p>
         </p:txBody>
       </p:sp>
       <p:sp>
         <p:nvSpPr>
-          <p:cNvPr id="5" name="Platshållare för sidfot 4">
+          <p:cNvPr id="5" name="Footer Placeholder 4">
             <a:extLst>
               <a:ext uri="{FF2B5EF4-FFF2-40B4-BE49-F238E27FC236}">
-                <a16:creationId xmlns:a16="http://schemas.microsoft.com/office/drawing/2014/main" id="{E82F8C4E-BAF1-689A-F752-0905D2ABA95D}"/>
+                <a16:creationId xmlns:a16="http://schemas.microsoft.com/office/drawing/2014/main" id="{E719A0AB-2D39-1CEC-81CA-AFE1E4AE50E0}"/>
               </a:ext>
             </a:extLst>
           </p:cNvPr>
@@ -15469,16 +15969,16 @@
           <a:bodyPr/>
           <a:lstStyle/>
           <a:p>
-            <a:endParaRPr lang="sv-SE"/>
+            <a:endParaRPr lang="LID4096"/>
           </a:p>
         </p:txBody>
       </p:sp>
       <p:sp>
         <p:nvSpPr>
-          <p:cNvPr id="6" name="Platshållare för bildnummer 5">
+          <p:cNvPr id="6" name="Slide Number Placeholder 5">
             <a:extLst>
               <a:ext uri="{FF2B5EF4-FFF2-40B4-BE49-F238E27FC236}">
-                <a16:creationId xmlns:a16="http://schemas.microsoft.com/office/drawing/2014/main" id="{CFE13C01-0573-8874-37F0-084AE1CBA10D}"/>
+                <a16:creationId xmlns:a16="http://schemas.microsoft.com/office/drawing/2014/main" id="{48982C90-F87C-EB7B-0357-1F575A7DEAA0}"/>
               </a:ext>
             </a:extLst>
           </p:cNvPr>
@@ -15494,18 +15994,18 @@
           <a:bodyPr/>
           <a:lstStyle/>
           <a:p>
-            <a:fld id="{35855755-DE42-431D-889F-A55AD89DA05D}" type="slidenum">
-              <a:rPr lang="sv-SE" smtClean="0"/>
+            <a:fld id="{D56D06D4-6DF8-4247-80D0-AFCDC6A01DC2}" type="slidenum">
+              <a:rPr lang="LID4096" smtClean="0"/>
               <a:t>‹#›</a:t>
             </a:fld>
-            <a:endParaRPr lang="sv-SE"/>
+            <a:endParaRPr lang="LID4096"/>
           </a:p>
         </p:txBody>
       </p:sp>
     </p:spTree>
     <p:extLst>
       <p:ext uri="{BB962C8B-B14F-4D97-AF65-F5344CB8AC3E}">
-        <p14:creationId xmlns:p14="http://schemas.microsoft.com/office/powerpoint/2010/main" val="343384584"/>
+        <p14:creationId xmlns:p14="http://schemas.microsoft.com/office/powerpoint/2010/main" val="2840717197"/>
       </p:ext>
     </p:extLst>
   </p:cSld>
@@ -15517,7 +16017,7 @@
 
 <file path=ppt/slideLayouts/slideLayout14.xml><?xml version="1.0" encoding="utf-8"?>
 <p:sldLayout xmlns:a="http://schemas.openxmlformats.org/drawingml/2006/main" xmlns:r="http://schemas.openxmlformats.org/officeDocument/2006/relationships" xmlns:p="http://schemas.openxmlformats.org/presentationml/2006/main" type="secHead" preserve="1">
-  <p:cSld name="Avsnittsrubrik">
+  <p:cSld name="Section Header">
     <p:spTree>
       <p:nvGrpSpPr>
         <p:cNvPr id="1" name=""/>
@@ -15534,10 +16034,10 @@
       </p:grpSpPr>
       <p:sp>
         <p:nvSpPr>
-          <p:cNvPr id="2" name="Rubrik 1">
+          <p:cNvPr id="2" name="Title 1">
             <a:extLst>
               <a:ext uri="{FF2B5EF4-FFF2-40B4-BE49-F238E27FC236}">
-                <a16:creationId xmlns:a16="http://schemas.microsoft.com/office/drawing/2014/main" id="{7991EB17-7972-3FE1-2EE1-6476E1317E3E}"/>
+                <a16:creationId xmlns:a16="http://schemas.microsoft.com/office/drawing/2014/main" id="{77150F33-03F3-8659-6BAE-18769398760E}"/>
               </a:ext>
             </a:extLst>
           </p:cNvPr>
@@ -15563,18 +16063,19 @@
           </a:lstStyle>
           <a:p>
             <a:r>
-              <a:rPr lang="sv-SE"/>
-              <a:t>Klicka här för att ändra mall för rubrikformat</a:t>
+              <a:rPr lang="en-US"/>
+              <a:t>Click to edit Master title style</a:t>
             </a:r>
+            <a:endParaRPr lang="LID4096"/>
           </a:p>
         </p:txBody>
       </p:sp>
       <p:sp>
         <p:nvSpPr>
-          <p:cNvPr id="3" name="Platshållare för text 2">
+          <p:cNvPr id="3" name="Text Placeholder 2">
             <a:extLst>
               <a:ext uri="{FF2B5EF4-FFF2-40B4-BE49-F238E27FC236}">
-                <a16:creationId xmlns:a16="http://schemas.microsoft.com/office/drawing/2014/main" id="{DCA7D8AF-572F-6164-371F-78340D637546}"/>
+                <a16:creationId xmlns:a16="http://schemas.microsoft.com/office/drawing/2014/main" id="{530C8AE0-AAD2-56CF-6DD8-69F63CA8311A}"/>
               </a:ext>
             </a:extLst>
           </p:cNvPr>
@@ -15688,18 +16189,18 @@
           <a:p>
             <a:pPr lvl="0"/>
             <a:r>
-              <a:rPr lang="sv-SE"/>
-              <a:t>Klicka här för att ändra format på bakgrundstexten</a:t>
+              <a:rPr lang="en-US"/>
+              <a:t>Click to edit Master text styles</a:t>
             </a:r>
           </a:p>
         </p:txBody>
       </p:sp>
       <p:sp>
         <p:nvSpPr>
-          <p:cNvPr id="4" name="Platshållare för datum 3">
+          <p:cNvPr id="4" name="Date Placeholder 3">
             <a:extLst>
               <a:ext uri="{FF2B5EF4-FFF2-40B4-BE49-F238E27FC236}">
-                <a16:creationId xmlns:a16="http://schemas.microsoft.com/office/drawing/2014/main" id="{071B93D9-E653-E244-1802-D7F855E6622D}"/>
+                <a16:creationId xmlns:a16="http://schemas.microsoft.com/office/drawing/2014/main" id="{C271D271-09E6-FC5A-A392-8474C4969FAE}"/>
               </a:ext>
             </a:extLst>
           </p:cNvPr>
@@ -15715,20 +16216,20 @@
           <a:bodyPr/>
           <a:lstStyle/>
           <a:p>
-            <a:fld id="{4617FB60-BF3C-4081-9AB7-A4E16EDB9E9D}" type="datetimeFigureOut">
-              <a:rPr lang="sv-SE" smtClean="0"/>
-              <a:t>2024-09-07</a:t>
+            <a:fld id="{AF45165C-61D5-42B7-9D8B-D94D579A4112}" type="datetimeFigureOut">
+              <a:rPr lang="LID4096" smtClean="0"/>
+              <a:t>10/08/2024</a:t>
             </a:fld>
-            <a:endParaRPr lang="sv-SE"/>
+            <a:endParaRPr lang="LID4096"/>
           </a:p>
         </p:txBody>
       </p:sp>
       <p:sp>
         <p:nvSpPr>
-          <p:cNvPr id="5" name="Platshållare för sidfot 4">
+          <p:cNvPr id="5" name="Footer Placeholder 4">
             <a:extLst>
               <a:ext uri="{FF2B5EF4-FFF2-40B4-BE49-F238E27FC236}">
-                <a16:creationId xmlns:a16="http://schemas.microsoft.com/office/drawing/2014/main" id="{CBB48C1C-DB1D-E3C8-69E5-8A8B55B7F6CC}"/>
+                <a16:creationId xmlns:a16="http://schemas.microsoft.com/office/drawing/2014/main" id="{DBCF9F4E-F8CD-81EF-DD84-216A8F04A23E}"/>
               </a:ext>
             </a:extLst>
           </p:cNvPr>
@@ -15744,16 +16245,16 @@
           <a:bodyPr/>
           <a:lstStyle/>
           <a:p>
-            <a:endParaRPr lang="sv-SE"/>
+            <a:endParaRPr lang="LID4096"/>
           </a:p>
         </p:txBody>
       </p:sp>
       <p:sp>
         <p:nvSpPr>
-          <p:cNvPr id="6" name="Platshållare för bildnummer 5">
+          <p:cNvPr id="6" name="Slide Number Placeholder 5">
             <a:extLst>
               <a:ext uri="{FF2B5EF4-FFF2-40B4-BE49-F238E27FC236}">
-                <a16:creationId xmlns:a16="http://schemas.microsoft.com/office/drawing/2014/main" id="{8BCF13BA-77D0-9041-2E4D-60046AAEF103}"/>
+                <a16:creationId xmlns:a16="http://schemas.microsoft.com/office/drawing/2014/main" id="{B12E70E9-D2EC-1CF0-BA7D-B95159CC3DC8}"/>
               </a:ext>
             </a:extLst>
           </p:cNvPr>
@@ -15769,18 +16270,18 @@
           <a:bodyPr/>
           <a:lstStyle/>
           <a:p>
-            <a:fld id="{35855755-DE42-431D-889F-A55AD89DA05D}" type="slidenum">
-              <a:rPr lang="sv-SE" smtClean="0"/>
+            <a:fld id="{D56D06D4-6DF8-4247-80D0-AFCDC6A01DC2}" type="slidenum">
+              <a:rPr lang="LID4096" smtClean="0"/>
               <a:t>‹#›</a:t>
             </a:fld>
-            <a:endParaRPr lang="sv-SE"/>
+            <a:endParaRPr lang="LID4096"/>
           </a:p>
         </p:txBody>
       </p:sp>
     </p:spTree>
     <p:extLst>
       <p:ext uri="{BB962C8B-B14F-4D97-AF65-F5344CB8AC3E}">
-        <p14:creationId xmlns:p14="http://schemas.microsoft.com/office/powerpoint/2010/main" val="2702265904"/>
+        <p14:creationId xmlns:p14="http://schemas.microsoft.com/office/powerpoint/2010/main" val="4015741045"/>
       </p:ext>
     </p:extLst>
   </p:cSld>
@@ -15792,7 +16293,7 @@
 
 <file path=ppt/slideLayouts/slideLayout15.xml><?xml version="1.0" encoding="utf-8"?>
 <p:sldLayout xmlns:a="http://schemas.openxmlformats.org/drawingml/2006/main" xmlns:r="http://schemas.openxmlformats.org/officeDocument/2006/relationships" xmlns:p="http://schemas.openxmlformats.org/presentationml/2006/main" type="twoObj" preserve="1">
-  <p:cSld name="Två delar">
+  <p:cSld name="Two Content">
     <p:spTree>
       <p:nvGrpSpPr>
         <p:cNvPr id="1" name=""/>
@@ -15809,10 +16310,10 @@
       </p:grpSpPr>
       <p:sp>
         <p:nvSpPr>
-          <p:cNvPr id="2" name="Rubrik 1">
+          <p:cNvPr id="2" name="Title 1">
             <a:extLst>
               <a:ext uri="{FF2B5EF4-FFF2-40B4-BE49-F238E27FC236}">
-                <a16:creationId xmlns:a16="http://schemas.microsoft.com/office/drawing/2014/main" id="{F89A8ECF-F381-AA25-13C6-87AFDA153542}"/>
+                <a16:creationId xmlns:a16="http://schemas.microsoft.com/office/drawing/2014/main" id="{AADBC470-1A5C-3312-D68A-B89855F3CB62}"/>
               </a:ext>
             </a:extLst>
           </p:cNvPr>
@@ -15829,18 +16330,19 @@
           <a:lstStyle/>
           <a:p>
             <a:r>
-              <a:rPr lang="sv-SE"/>
-              <a:t>Klicka här för att ändra mall för rubrikformat</a:t>
+              <a:rPr lang="en-US"/>
+              <a:t>Click to edit Master title style</a:t>
             </a:r>
+            <a:endParaRPr lang="LID4096"/>
           </a:p>
         </p:txBody>
       </p:sp>
       <p:sp>
         <p:nvSpPr>
-          <p:cNvPr id="3" name="Platshållare för innehåll 2">
+          <p:cNvPr id="3" name="Content Placeholder 2">
             <a:extLst>
               <a:ext uri="{FF2B5EF4-FFF2-40B4-BE49-F238E27FC236}">
-                <a16:creationId xmlns:a16="http://schemas.microsoft.com/office/drawing/2014/main" id="{0FFFD47C-DBBA-C696-EDC3-903E173F0239}"/>
+                <a16:creationId xmlns:a16="http://schemas.microsoft.com/office/drawing/2014/main" id="{9F958976-5A16-E83F-7401-2B3EA171B6A1}"/>
               </a:ext>
             </a:extLst>
           </p:cNvPr>
@@ -15863,46 +16365,47 @@
           <a:p>
             <a:pPr lvl="0"/>
             <a:r>
-              <a:rPr lang="sv-SE"/>
-              <a:t>Klicka här för att ändra format på bakgrundstexten</a:t>
+              <a:rPr lang="en-US"/>
+              <a:t>Click to edit Master text styles</a:t>
             </a:r>
           </a:p>
           <a:p>
             <a:pPr lvl="1"/>
             <a:r>
-              <a:rPr lang="sv-SE"/>
-              <a:t>Nivå två</a:t>
+              <a:rPr lang="en-US"/>
+              <a:t>Second level</a:t>
             </a:r>
           </a:p>
           <a:p>
             <a:pPr lvl="2"/>
             <a:r>
-              <a:rPr lang="sv-SE"/>
-              <a:t>Nivå tre</a:t>
+              <a:rPr lang="en-US"/>
+              <a:t>Third level</a:t>
             </a:r>
           </a:p>
           <a:p>
             <a:pPr lvl="3"/>
             <a:r>
-              <a:rPr lang="sv-SE"/>
-              <a:t>Nivå fyra</a:t>
+              <a:rPr lang="en-US"/>
+              <a:t>Fourth level</a:t>
             </a:r>
           </a:p>
           <a:p>
             <a:pPr lvl="4"/>
             <a:r>
-              <a:rPr lang="sv-SE"/>
-              <a:t>Nivå fem</a:t>
+              <a:rPr lang="en-US"/>
+              <a:t>Fifth level</a:t>
             </a:r>
+            <a:endParaRPr lang="LID4096"/>
           </a:p>
         </p:txBody>
       </p:sp>
       <p:sp>
         <p:nvSpPr>
-          <p:cNvPr id="4" name="Platshållare för innehåll 3">
+          <p:cNvPr id="4" name="Content Placeholder 3">
             <a:extLst>
               <a:ext uri="{FF2B5EF4-FFF2-40B4-BE49-F238E27FC236}">
-                <a16:creationId xmlns:a16="http://schemas.microsoft.com/office/drawing/2014/main" id="{ABB67142-6563-6166-1A86-07C5F7ED4187}"/>
+                <a16:creationId xmlns:a16="http://schemas.microsoft.com/office/drawing/2014/main" id="{76DBDF4F-95A2-CD00-1373-09563A2D7F7C}"/>
               </a:ext>
             </a:extLst>
           </p:cNvPr>
@@ -15925,46 +16428,47 @@
           <a:p>
             <a:pPr lvl="0"/>
             <a:r>
-              <a:rPr lang="sv-SE"/>
-              <a:t>Klicka här för att ändra format på bakgrundstexten</a:t>
+              <a:rPr lang="en-US"/>
+              <a:t>Click to edit Master text styles</a:t>
             </a:r>
           </a:p>
           <a:p>
             <a:pPr lvl="1"/>
             <a:r>
-              <a:rPr lang="sv-SE"/>
-              <a:t>Nivå två</a:t>
+              <a:rPr lang="en-US"/>
+              <a:t>Second level</a:t>
             </a:r>
           </a:p>
           <a:p>
             <a:pPr lvl="2"/>
             <a:r>
-              <a:rPr lang="sv-SE"/>
-              <a:t>Nivå tre</a:t>
+              <a:rPr lang="en-US"/>
+              <a:t>Third level</a:t>
             </a:r>
           </a:p>
           <a:p>
             <a:pPr lvl="3"/>
             <a:r>
-              <a:rPr lang="sv-SE"/>
-              <a:t>Nivå fyra</a:t>
+              <a:rPr lang="en-US"/>
+              <a:t>Fourth level</a:t>
             </a:r>
           </a:p>
           <a:p>
             <a:pPr lvl="4"/>
             <a:r>
-              <a:rPr lang="sv-SE"/>
-              <a:t>Nivå fem</a:t>
+              <a:rPr lang="en-US"/>
+              <a:t>Fifth level</a:t>
             </a:r>
+            <a:endParaRPr lang="LID4096"/>
           </a:p>
         </p:txBody>
       </p:sp>
       <p:sp>
         <p:nvSpPr>
-          <p:cNvPr id="5" name="Platshållare för datum 4">
+          <p:cNvPr id="5" name="Date Placeholder 4">
             <a:extLst>
               <a:ext uri="{FF2B5EF4-FFF2-40B4-BE49-F238E27FC236}">
-                <a16:creationId xmlns:a16="http://schemas.microsoft.com/office/drawing/2014/main" id="{5C6E62CC-77E1-1AAF-961C-E299820DC5FE}"/>
+                <a16:creationId xmlns:a16="http://schemas.microsoft.com/office/drawing/2014/main" id="{19E27A92-A702-8A2C-2D6C-AE1044C52500}"/>
               </a:ext>
             </a:extLst>
           </p:cNvPr>
@@ -15980,20 +16484,20 @@
           <a:bodyPr/>
           <a:lstStyle/>
           <a:p>
-            <a:fld id="{4617FB60-BF3C-4081-9AB7-A4E16EDB9E9D}" type="datetimeFigureOut">
-              <a:rPr lang="sv-SE" smtClean="0"/>
-              <a:t>2024-09-07</a:t>
+            <a:fld id="{AF45165C-61D5-42B7-9D8B-D94D579A4112}" type="datetimeFigureOut">
+              <a:rPr lang="LID4096" smtClean="0"/>
+              <a:t>10/08/2024</a:t>
             </a:fld>
-            <a:endParaRPr lang="sv-SE"/>
+            <a:endParaRPr lang="LID4096"/>
           </a:p>
         </p:txBody>
       </p:sp>
       <p:sp>
         <p:nvSpPr>
-          <p:cNvPr id="6" name="Platshållare för sidfot 5">
+          <p:cNvPr id="6" name="Footer Placeholder 5">
             <a:extLst>
               <a:ext uri="{FF2B5EF4-FFF2-40B4-BE49-F238E27FC236}">
-                <a16:creationId xmlns:a16="http://schemas.microsoft.com/office/drawing/2014/main" id="{54BB5857-01B6-0C30-D064-A1BE5C4B5ACE}"/>
+                <a16:creationId xmlns:a16="http://schemas.microsoft.com/office/drawing/2014/main" id="{09F29C48-BD7A-93E4-2EB0-65FD0B785E39}"/>
               </a:ext>
             </a:extLst>
           </p:cNvPr>
@@ -16009,16 +16513,16 @@
           <a:bodyPr/>
           <a:lstStyle/>
           <a:p>
-            <a:endParaRPr lang="sv-SE"/>
+            <a:endParaRPr lang="LID4096"/>
           </a:p>
         </p:txBody>
       </p:sp>
       <p:sp>
         <p:nvSpPr>
-          <p:cNvPr id="7" name="Platshållare för bildnummer 6">
+          <p:cNvPr id="7" name="Slide Number Placeholder 6">
             <a:extLst>
               <a:ext uri="{FF2B5EF4-FFF2-40B4-BE49-F238E27FC236}">
-                <a16:creationId xmlns:a16="http://schemas.microsoft.com/office/drawing/2014/main" id="{B6C1C410-DB3E-D9E6-2D23-4E225596F30F}"/>
+                <a16:creationId xmlns:a16="http://schemas.microsoft.com/office/drawing/2014/main" id="{84282295-8494-4ABD-F593-715C0607653C}"/>
               </a:ext>
             </a:extLst>
           </p:cNvPr>
@@ -16034,18 +16538,18 @@
           <a:bodyPr/>
           <a:lstStyle/>
           <a:p>
-            <a:fld id="{35855755-DE42-431D-889F-A55AD89DA05D}" type="slidenum">
-              <a:rPr lang="sv-SE" smtClean="0"/>
+            <a:fld id="{D56D06D4-6DF8-4247-80D0-AFCDC6A01DC2}" type="slidenum">
+              <a:rPr lang="LID4096" smtClean="0"/>
               <a:t>‹#›</a:t>
             </a:fld>
-            <a:endParaRPr lang="sv-SE"/>
+            <a:endParaRPr lang="LID4096"/>
           </a:p>
         </p:txBody>
       </p:sp>
     </p:spTree>
     <p:extLst>
       <p:ext uri="{BB962C8B-B14F-4D97-AF65-F5344CB8AC3E}">
-        <p14:creationId xmlns:p14="http://schemas.microsoft.com/office/powerpoint/2010/main" val="973371386"/>
+        <p14:creationId xmlns:p14="http://schemas.microsoft.com/office/powerpoint/2010/main" val="1989030282"/>
       </p:ext>
     </p:extLst>
   </p:cSld>
@@ -16057,7 +16561,7 @@
 
 <file path=ppt/slideLayouts/slideLayout16.xml><?xml version="1.0" encoding="utf-8"?>
 <p:sldLayout xmlns:a="http://schemas.openxmlformats.org/drawingml/2006/main" xmlns:r="http://schemas.openxmlformats.org/officeDocument/2006/relationships" xmlns:p="http://schemas.openxmlformats.org/presentationml/2006/main" type="twoTxTwoObj" preserve="1">
-  <p:cSld name="Jämförelse">
+  <p:cSld name="Comparison">
     <p:spTree>
       <p:nvGrpSpPr>
         <p:cNvPr id="1" name=""/>
@@ -16074,10 +16578,10 @@
       </p:grpSpPr>
       <p:sp>
         <p:nvSpPr>
-          <p:cNvPr id="2" name="Rubrik 1">
+          <p:cNvPr id="2" name="Title 1">
             <a:extLst>
               <a:ext uri="{FF2B5EF4-FFF2-40B4-BE49-F238E27FC236}">
-                <a16:creationId xmlns:a16="http://schemas.microsoft.com/office/drawing/2014/main" id="{DB717EE5-DCF7-E6F8-717A-75786E247CBA}"/>
+                <a16:creationId xmlns:a16="http://schemas.microsoft.com/office/drawing/2014/main" id="{5F5D0AAB-C25D-EE36-8460-77F0CF11428A}"/>
               </a:ext>
             </a:extLst>
           </p:cNvPr>
@@ -16099,18 +16603,19 @@
           <a:lstStyle/>
           <a:p>
             <a:r>
-              <a:rPr lang="sv-SE"/>
-              <a:t>Klicka här för att ändra mall för rubrikformat</a:t>
+              <a:rPr lang="en-US"/>
+              <a:t>Click to edit Master title style</a:t>
             </a:r>
+            <a:endParaRPr lang="LID4096"/>
           </a:p>
         </p:txBody>
       </p:sp>
       <p:sp>
         <p:nvSpPr>
-          <p:cNvPr id="3" name="Platshållare för text 2">
+          <p:cNvPr id="3" name="Text Placeholder 2">
             <a:extLst>
               <a:ext uri="{FF2B5EF4-FFF2-40B4-BE49-F238E27FC236}">
-                <a16:creationId xmlns:a16="http://schemas.microsoft.com/office/drawing/2014/main" id="{6BDA7E72-0A20-E116-3084-7FF472483C84}"/>
+                <a16:creationId xmlns:a16="http://schemas.microsoft.com/office/drawing/2014/main" id="{3A5E888F-1B06-8910-EE49-4808CF1EC79B}"/>
               </a:ext>
             </a:extLst>
           </p:cNvPr>
@@ -16170,18 +16675,18 @@
           <a:p>
             <a:pPr lvl="0"/>
             <a:r>
-              <a:rPr lang="sv-SE"/>
-              <a:t>Klicka här för att ändra format på bakgrundstexten</a:t>
+              <a:rPr lang="en-US"/>
+              <a:t>Click to edit Master text styles</a:t>
             </a:r>
           </a:p>
         </p:txBody>
       </p:sp>
       <p:sp>
         <p:nvSpPr>
-          <p:cNvPr id="4" name="Platshållare för innehåll 3">
+          <p:cNvPr id="4" name="Content Placeholder 3">
             <a:extLst>
               <a:ext uri="{FF2B5EF4-FFF2-40B4-BE49-F238E27FC236}">
-                <a16:creationId xmlns:a16="http://schemas.microsoft.com/office/drawing/2014/main" id="{6B12EBD6-6362-DD1C-7308-4F1EC1075764}"/>
+                <a16:creationId xmlns:a16="http://schemas.microsoft.com/office/drawing/2014/main" id="{D62726C0-A638-EC12-65A6-C0E82CD52AC1}"/>
               </a:ext>
             </a:extLst>
           </p:cNvPr>
@@ -16204,46 +16709,47 @@
           <a:p>
             <a:pPr lvl="0"/>
             <a:r>
-              <a:rPr lang="sv-SE"/>
-              <a:t>Klicka här för att ändra format på bakgrundstexten</a:t>
+              <a:rPr lang="en-US"/>
+              <a:t>Click to edit Master text styles</a:t>
             </a:r>
           </a:p>
           <a:p>
             <a:pPr lvl="1"/>
             <a:r>
-              <a:rPr lang="sv-SE"/>
-              <a:t>Nivå två</a:t>
+              <a:rPr lang="en-US"/>
+              <a:t>Second level</a:t>
             </a:r>
           </a:p>
           <a:p>
             <a:pPr lvl="2"/>
             <a:r>
-              <a:rPr lang="sv-SE"/>
-              <a:t>Nivå tre</a:t>
+              <a:rPr lang="en-US"/>
+              <a:t>Third level</a:t>
             </a:r>
           </a:p>
           <a:p>
             <a:pPr lvl="3"/>
             <a:r>
-              <a:rPr lang="sv-SE"/>
-              <a:t>Nivå fyra</a:t>
+              <a:rPr lang="en-US"/>
+              <a:t>Fourth level</a:t>
             </a:r>
           </a:p>
           <a:p>
             <a:pPr lvl="4"/>
             <a:r>
-              <a:rPr lang="sv-SE"/>
-              <a:t>Nivå fem</a:t>
+              <a:rPr lang="en-US"/>
+              <a:t>Fifth level</a:t>
             </a:r>
+            <a:endParaRPr lang="LID4096"/>
           </a:p>
         </p:txBody>
       </p:sp>
       <p:sp>
         <p:nvSpPr>
-          <p:cNvPr id="5" name="Platshållare för text 4">
+          <p:cNvPr id="5" name="Text Placeholder 4">
             <a:extLst>
               <a:ext uri="{FF2B5EF4-FFF2-40B4-BE49-F238E27FC236}">
-                <a16:creationId xmlns:a16="http://schemas.microsoft.com/office/drawing/2014/main" id="{E4B8DE60-1CA3-ACFD-A5AE-10C7AF46D21B}"/>
+                <a16:creationId xmlns:a16="http://schemas.microsoft.com/office/drawing/2014/main" id="{D88C92FD-8444-D979-11CC-74E8A26D754F}"/>
               </a:ext>
             </a:extLst>
           </p:cNvPr>
@@ -16303,18 +16809,18 @@
           <a:p>
             <a:pPr lvl="0"/>
             <a:r>
-              <a:rPr lang="sv-SE"/>
-              <a:t>Klicka här för att ändra format på bakgrundstexten</a:t>
+              <a:rPr lang="en-US"/>
+              <a:t>Click to edit Master text styles</a:t>
             </a:r>
           </a:p>
         </p:txBody>
       </p:sp>
       <p:sp>
         <p:nvSpPr>
-          <p:cNvPr id="6" name="Platshållare för innehåll 5">
+          <p:cNvPr id="6" name="Content Placeholder 5">
             <a:extLst>
               <a:ext uri="{FF2B5EF4-FFF2-40B4-BE49-F238E27FC236}">
-                <a16:creationId xmlns:a16="http://schemas.microsoft.com/office/drawing/2014/main" id="{697CDA45-0419-5273-3B74-E7C105C21E9D}"/>
+                <a16:creationId xmlns:a16="http://schemas.microsoft.com/office/drawing/2014/main" id="{FA0E308D-E6B5-7CE2-71C8-8E8F7B3C63FB}"/>
               </a:ext>
             </a:extLst>
           </p:cNvPr>
@@ -16337,46 +16843,47 @@
           <a:p>
             <a:pPr lvl="0"/>
             <a:r>
-              <a:rPr lang="sv-SE"/>
-              <a:t>Klicka här för att ändra format på bakgrundstexten</a:t>
+              <a:rPr lang="en-US"/>
+              <a:t>Click to edit Master text styles</a:t>
             </a:r>
           </a:p>
           <a:p>
             <a:pPr lvl="1"/>
             <a:r>
-              <a:rPr lang="sv-SE"/>
-              <a:t>Nivå två</a:t>
+              <a:rPr lang="en-US"/>
+              <a:t>Second level</a:t>
             </a:r>
           </a:p>
           <a:p>
             <a:pPr lvl="2"/>
             <a:r>
-              <a:rPr lang="sv-SE"/>
-              <a:t>Nivå tre</a:t>
+              <a:rPr lang="en-US"/>
+              <a:t>Third level</a:t>
             </a:r>
           </a:p>
           <a:p>
             <a:pPr lvl="3"/>
             <a:r>
-              <a:rPr lang="sv-SE"/>
-              <a:t>Nivå fyra</a:t>
+              <a:rPr lang="en-US"/>
+              <a:t>Fourth level</a:t>
             </a:r>
           </a:p>
           <a:p>
             <a:pPr lvl="4"/>
             <a:r>
-              <a:rPr lang="sv-SE"/>
-              <a:t>Nivå fem</a:t>
+              <a:rPr lang="en-US"/>
+              <a:t>Fifth level</a:t>
             </a:r>
+            <a:endParaRPr lang="LID4096"/>
           </a:p>
         </p:txBody>
       </p:sp>
       <p:sp>
         <p:nvSpPr>
-          <p:cNvPr id="7" name="Platshållare för datum 6">
+          <p:cNvPr id="7" name="Date Placeholder 6">
             <a:extLst>
               <a:ext uri="{FF2B5EF4-FFF2-40B4-BE49-F238E27FC236}">
-                <a16:creationId xmlns:a16="http://schemas.microsoft.com/office/drawing/2014/main" id="{F9602FBE-A3DE-91A3-9244-F5ACD8BB5C7D}"/>
+                <a16:creationId xmlns:a16="http://schemas.microsoft.com/office/drawing/2014/main" id="{CD931FEB-3EC8-6290-C094-B183FFB88936}"/>
               </a:ext>
             </a:extLst>
           </p:cNvPr>
@@ -16392,20 +16899,20 @@
           <a:bodyPr/>
           <a:lstStyle/>
           <a:p>
-            <a:fld id="{4617FB60-BF3C-4081-9AB7-A4E16EDB9E9D}" type="datetimeFigureOut">
-              <a:rPr lang="sv-SE" smtClean="0"/>
-              <a:t>2024-09-07</a:t>
+            <a:fld id="{AF45165C-61D5-42B7-9D8B-D94D579A4112}" type="datetimeFigureOut">
+              <a:rPr lang="LID4096" smtClean="0"/>
+              <a:t>10/08/2024</a:t>
             </a:fld>
-            <a:endParaRPr lang="sv-SE"/>
+            <a:endParaRPr lang="LID4096"/>
           </a:p>
         </p:txBody>
       </p:sp>
       <p:sp>
         <p:nvSpPr>
-          <p:cNvPr id="8" name="Platshållare för sidfot 7">
+          <p:cNvPr id="8" name="Footer Placeholder 7">
             <a:extLst>
               <a:ext uri="{FF2B5EF4-FFF2-40B4-BE49-F238E27FC236}">
-                <a16:creationId xmlns:a16="http://schemas.microsoft.com/office/drawing/2014/main" id="{3FEB56B8-F1EA-1F7D-5380-5B4BED688308}"/>
+                <a16:creationId xmlns:a16="http://schemas.microsoft.com/office/drawing/2014/main" id="{785C18F3-9D9A-8D88-D68D-D8807AEF8489}"/>
               </a:ext>
             </a:extLst>
           </p:cNvPr>
@@ -16421,16 +16928,16 @@
           <a:bodyPr/>
           <a:lstStyle/>
           <a:p>
-            <a:endParaRPr lang="sv-SE"/>
+            <a:endParaRPr lang="LID4096"/>
           </a:p>
         </p:txBody>
       </p:sp>
       <p:sp>
         <p:nvSpPr>
-          <p:cNvPr id="9" name="Platshållare för bildnummer 8">
+          <p:cNvPr id="9" name="Slide Number Placeholder 8">
             <a:extLst>
               <a:ext uri="{FF2B5EF4-FFF2-40B4-BE49-F238E27FC236}">
-                <a16:creationId xmlns:a16="http://schemas.microsoft.com/office/drawing/2014/main" id="{2AD709DC-8201-1FD9-AB2A-64EAA68FB84A}"/>
+                <a16:creationId xmlns:a16="http://schemas.microsoft.com/office/drawing/2014/main" id="{A5631F58-C154-6ACA-D193-DBF193803DF6}"/>
               </a:ext>
             </a:extLst>
           </p:cNvPr>
@@ -16446,18 +16953,18 @@
           <a:bodyPr/>
           <a:lstStyle/>
           <a:p>
-            <a:fld id="{35855755-DE42-431D-889F-A55AD89DA05D}" type="slidenum">
-              <a:rPr lang="sv-SE" smtClean="0"/>
+            <a:fld id="{D56D06D4-6DF8-4247-80D0-AFCDC6A01DC2}" type="slidenum">
+              <a:rPr lang="LID4096" smtClean="0"/>
               <a:t>‹#›</a:t>
             </a:fld>
-            <a:endParaRPr lang="sv-SE"/>
+            <a:endParaRPr lang="LID4096"/>
           </a:p>
         </p:txBody>
       </p:sp>
     </p:spTree>
     <p:extLst>
       <p:ext uri="{BB962C8B-B14F-4D97-AF65-F5344CB8AC3E}">
-        <p14:creationId xmlns:p14="http://schemas.microsoft.com/office/powerpoint/2010/main" val="2019069302"/>
+        <p14:creationId xmlns:p14="http://schemas.microsoft.com/office/powerpoint/2010/main" val="4026081589"/>
       </p:ext>
     </p:extLst>
   </p:cSld>
@@ -16469,7 +16976,7 @@
 
 <file path=ppt/slideLayouts/slideLayout17.xml><?xml version="1.0" encoding="utf-8"?>
 <p:sldLayout xmlns:a="http://schemas.openxmlformats.org/drawingml/2006/main" xmlns:r="http://schemas.openxmlformats.org/officeDocument/2006/relationships" xmlns:p="http://schemas.openxmlformats.org/presentationml/2006/main" type="titleOnly" preserve="1">
-  <p:cSld name="Endast rubrik">
+  <p:cSld name="Title Only">
     <p:spTree>
       <p:nvGrpSpPr>
         <p:cNvPr id="1" name=""/>
@@ -16486,10 +16993,10 @@
       </p:grpSpPr>
       <p:sp>
         <p:nvSpPr>
-          <p:cNvPr id="2" name="Rubrik 1">
+          <p:cNvPr id="2" name="Title 1">
             <a:extLst>
               <a:ext uri="{FF2B5EF4-FFF2-40B4-BE49-F238E27FC236}">
-                <a16:creationId xmlns:a16="http://schemas.microsoft.com/office/drawing/2014/main" id="{E990354C-0BFA-E43E-F4F1-3D999BD92698}"/>
+                <a16:creationId xmlns:a16="http://schemas.microsoft.com/office/drawing/2014/main" id="{F12D44FC-47AD-F44C-5EAD-7C61744A0CAB}"/>
               </a:ext>
             </a:extLst>
           </p:cNvPr>
@@ -16506,18 +17013,19 @@
           <a:lstStyle/>
           <a:p>
             <a:r>
-              <a:rPr lang="sv-SE"/>
-              <a:t>Klicka här för att ändra mall för rubrikformat</a:t>
+              <a:rPr lang="en-US"/>
+              <a:t>Click to edit Master title style</a:t>
             </a:r>
+            <a:endParaRPr lang="LID4096"/>
           </a:p>
         </p:txBody>
       </p:sp>
       <p:sp>
         <p:nvSpPr>
-          <p:cNvPr id="3" name="Platshållare för datum 2">
+          <p:cNvPr id="3" name="Date Placeholder 2">
             <a:extLst>
               <a:ext uri="{FF2B5EF4-FFF2-40B4-BE49-F238E27FC236}">
-                <a16:creationId xmlns:a16="http://schemas.microsoft.com/office/drawing/2014/main" id="{F8F25C5D-D569-F9D6-729B-0F438F0A2E47}"/>
+                <a16:creationId xmlns:a16="http://schemas.microsoft.com/office/drawing/2014/main" id="{A01983B3-7E82-EEED-FF15-2BC4444F766D}"/>
               </a:ext>
             </a:extLst>
           </p:cNvPr>
@@ -16533,20 +17041,20 @@
           <a:bodyPr/>
           <a:lstStyle/>
           <a:p>
-            <a:fld id="{4617FB60-BF3C-4081-9AB7-A4E16EDB9E9D}" type="datetimeFigureOut">
-              <a:rPr lang="sv-SE" smtClean="0"/>
-              <a:t>2024-09-07</a:t>
+            <a:fld id="{AF45165C-61D5-42B7-9D8B-D94D579A4112}" type="datetimeFigureOut">
+              <a:rPr lang="LID4096" smtClean="0"/>
+              <a:t>10/08/2024</a:t>
             </a:fld>
-            <a:endParaRPr lang="sv-SE"/>
+            <a:endParaRPr lang="LID4096"/>
           </a:p>
         </p:txBody>
       </p:sp>
       <p:sp>
         <p:nvSpPr>
-          <p:cNvPr id="4" name="Platshållare för sidfot 3">
+          <p:cNvPr id="4" name="Footer Placeholder 3">
             <a:extLst>
               <a:ext uri="{FF2B5EF4-FFF2-40B4-BE49-F238E27FC236}">
-                <a16:creationId xmlns:a16="http://schemas.microsoft.com/office/drawing/2014/main" id="{5D66E877-9743-6BF1-B941-CC8FC019CA65}"/>
+                <a16:creationId xmlns:a16="http://schemas.microsoft.com/office/drawing/2014/main" id="{B32025D4-C956-483C-1F70-E0553E18E76F}"/>
               </a:ext>
             </a:extLst>
           </p:cNvPr>
@@ -16562,16 +17070,16 @@
           <a:bodyPr/>
           <a:lstStyle/>
           <a:p>
-            <a:endParaRPr lang="sv-SE"/>
+            <a:endParaRPr lang="LID4096"/>
           </a:p>
         </p:txBody>
       </p:sp>
       <p:sp>
         <p:nvSpPr>
-          <p:cNvPr id="5" name="Platshållare för bildnummer 4">
+          <p:cNvPr id="5" name="Slide Number Placeholder 4">
             <a:extLst>
               <a:ext uri="{FF2B5EF4-FFF2-40B4-BE49-F238E27FC236}">
-                <a16:creationId xmlns:a16="http://schemas.microsoft.com/office/drawing/2014/main" id="{528F4523-2B5F-F6C6-944B-B6E44518745B}"/>
+                <a16:creationId xmlns:a16="http://schemas.microsoft.com/office/drawing/2014/main" id="{6146384E-7634-5E27-1690-1DC7A4B6D2D2}"/>
               </a:ext>
             </a:extLst>
           </p:cNvPr>
@@ -16587,18 +17095,18 @@
           <a:bodyPr/>
           <a:lstStyle/>
           <a:p>
-            <a:fld id="{35855755-DE42-431D-889F-A55AD89DA05D}" type="slidenum">
-              <a:rPr lang="sv-SE" smtClean="0"/>
+            <a:fld id="{D56D06D4-6DF8-4247-80D0-AFCDC6A01DC2}" type="slidenum">
+              <a:rPr lang="LID4096" smtClean="0"/>
               <a:t>‹#›</a:t>
             </a:fld>
-            <a:endParaRPr lang="sv-SE"/>
+            <a:endParaRPr lang="LID4096"/>
           </a:p>
         </p:txBody>
       </p:sp>
     </p:spTree>
     <p:extLst>
       <p:ext uri="{BB962C8B-B14F-4D97-AF65-F5344CB8AC3E}">
-        <p14:creationId xmlns:p14="http://schemas.microsoft.com/office/powerpoint/2010/main" val="1382161068"/>
+        <p14:creationId xmlns:p14="http://schemas.microsoft.com/office/powerpoint/2010/main" val="4153976006"/>
       </p:ext>
     </p:extLst>
   </p:cSld>
@@ -16610,7 +17118,7 @@
 
 <file path=ppt/slideLayouts/slideLayout18.xml><?xml version="1.0" encoding="utf-8"?>
 <p:sldLayout xmlns:a="http://schemas.openxmlformats.org/drawingml/2006/main" xmlns:r="http://schemas.openxmlformats.org/officeDocument/2006/relationships" xmlns:p="http://schemas.openxmlformats.org/presentationml/2006/main" type="blank" preserve="1">
-  <p:cSld name="Tom">
+  <p:cSld name="Blank">
     <p:spTree>
       <p:nvGrpSpPr>
         <p:cNvPr id="1" name=""/>
@@ -16627,10 +17135,10 @@
       </p:grpSpPr>
       <p:sp>
         <p:nvSpPr>
-          <p:cNvPr id="2" name="Platshållare för datum 1">
+          <p:cNvPr id="2" name="Date Placeholder 1">
             <a:extLst>
               <a:ext uri="{FF2B5EF4-FFF2-40B4-BE49-F238E27FC236}">
-                <a16:creationId xmlns:a16="http://schemas.microsoft.com/office/drawing/2014/main" id="{47E44435-7B9D-92AF-540B-DFC25DB7C1E7}"/>
+                <a16:creationId xmlns:a16="http://schemas.microsoft.com/office/drawing/2014/main" id="{EAFCF92A-BC75-5220-C577-31801AFDD55C}"/>
               </a:ext>
             </a:extLst>
           </p:cNvPr>
@@ -16646,20 +17154,20 @@
           <a:bodyPr/>
           <a:lstStyle/>
           <a:p>
-            <a:fld id="{4617FB60-BF3C-4081-9AB7-A4E16EDB9E9D}" type="datetimeFigureOut">
-              <a:rPr lang="sv-SE" smtClean="0"/>
-              <a:t>2024-09-07</a:t>
+            <a:fld id="{AF45165C-61D5-42B7-9D8B-D94D579A4112}" type="datetimeFigureOut">
+              <a:rPr lang="LID4096" smtClean="0"/>
+              <a:t>10/08/2024</a:t>
             </a:fld>
-            <a:endParaRPr lang="sv-SE"/>
+            <a:endParaRPr lang="LID4096"/>
           </a:p>
         </p:txBody>
       </p:sp>
       <p:sp>
         <p:nvSpPr>
-          <p:cNvPr id="3" name="Platshållare för sidfot 2">
+          <p:cNvPr id="3" name="Footer Placeholder 2">
             <a:extLst>
               <a:ext uri="{FF2B5EF4-FFF2-40B4-BE49-F238E27FC236}">
-                <a16:creationId xmlns:a16="http://schemas.microsoft.com/office/drawing/2014/main" id="{C2D619BC-80F6-0B93-AE02-521AC667DF43}"/>
+                <a16:creationId xmlns:a16="http://schemas.microsoft.com/office/drawing/2014/main" id="{29681FA0-A72D-F568-4C08-7F1F07985B97}"/>
               </a:ext>
             </a:extLst>
           </p:cNvPr>
@@ -16675,16 +17183,16 @@
           <a:bodyPr/>
           <a:lstStyle/>
           <a:p>
-            <a:endParaRPr lang="sv-SE"/>
+            <a:endParaRPr lang="LID4096"/>
           </a:p>
         </p:txBody>
       </p:sp>
       <p:sp>
         <p:nvSpPr>
-          <p:cNvPr id="4" name="Platshållare för bildnummer 3">
+          <p:cNvPr id="4" name="Slide Number Placeholder 3">
             <a:extLst>
               <a:ext uri="{FF2B5EF4-FFF2-40B4-BE49-F238E27FC236}">
-                <a16:creationId xmlns:a16="http://schemas.microsoft.com/office/drawing/2014/main" id="{17A19141-7B28-A91F-E0F2-721C2B0B2D78}"/>
+                <a16:creationId xmlns:a16="http://schemas.microsoft.com/office/drawing/2014/main" id="{08106EEB-DB2B-8635-08CB-FFD558404E74}"/>
               </a:ext>
             </a:extLst>
           </p:cNvPr>
@@ -16700,18 +17208,18 @@
           <a:bodyPr/>
           <a:lstStyle/>
           <a:p>
-            <a:fld id="{35855755-DE42-431D-889F-A55AD89DA05D}" type="slidenum">
-              <a:rPr lang="sv-SE" smtClean="0"/>
+            <a:fld id="{D56D06D4-6DF8-4247-80D0-AFCDC6A01DC2}" type="slidenum">
+              <a:rPr lang="LID4096" smtClean="0"/>
               <a:t>‹#›</a:t>
             </a:fld>
-            <a:endParaRPr lang="sv-SE"/>
+            <a:endParaRPr lang="LID4096"/>
           </a:p>
         </p:txBody>
       </p:sp>
     </p:spTree>
     <p:extLst>
       <p:ext uri="{BB962C8B-B14F-4D97-AF65-F5344CB8AC3E}">
-        <p14:creationId xmlns:p14="http://schemas.microsoft.com/office/powerpoint/2010/main" val="1043028949"/>
+        <p14:creationId xmlns:p14="http://schemas.microsoft.com/office/powerpoint/2010/main" val="582538981"/>
       </p:ext>
     </p:extLst>
   </p:cSld>
@@ -16723,7 +17231,7 @@
 
 <file path=ppt/slideLayouts/slideLayout19.xml><?xml version="1.0" encoding="utf-8"?>
 <p:sldLayout xmlns:a="http://schemas.openxmlformats.org/drawingml/2006/main" xmlns:r="http://schemas.openxmlformats.org/officeDocument/2006/relationships" xmlns:p="http://schemas.openxmlformats.org/presentationml/2006/main" type="objTx" preserve="1">
-  <p:cSld name="Text med bildtext">
+  <p:cSld name="Content with Caption">
     <p:spTree>
       <p:nvGrpSpPr>
         <p:cNvPr id="1" name=""/>
@@ -16740,10 +17248,10 @@
       </p:grpSpPr>
       <p:sp>
         <p:nvSpPr>
-          <p:cNvPr id="2" name="Rubrik 1">
+          <p:cNvPr id="2" name="Title 1">
             <a:extLst>
               <a:ext uri="{FF2B5EF4-FFF2-40B4-BE49-F238E27FC236}">
-                <a16:creationId xmlns:a16="http://schemas.microsoft.com/office/drawing/2014/main" id="{BD0A5C3D-F3DE-D632-FE6E-AA2C97F5D798}"/>
+                <a16:creationId xmlns:a16="http://schemas.microsoft.com/office/drawing/2014/main" id="{A8E6D36E-9191-FE03-71E8-7DF7E6DED8DE}"/>
               </a:ext>
             </a:extLst>
           </p:cNvPr>
@@ -16769,18 +17277,19 @@
           </a:lstStyle>
           <a:p>
             <a:r>
-              <a:rPr lang="sv-SE"/>
-              <a:t>Klicka här för att ändra mall för rubrikformat</a:t>
+              <a:rPr lang="en-US"/>
+              <a:t>Click to edit Master title style</a:t>
             </a:r>
+            <a:endParaRPr lang="LID4096"/>
           </a:p>
         </p:txBody>
       </p:sp>
       <p:sp>
         <p:nvSpPr>
-          <p:cNvPr id="3" name="Platshållare för innehåll 2">
+          <p:cNvPr id="3" name="Content Placeholder 2">
             <a:extLst>
               <a:ext uri="{FF2B5EF4-FFF2-40B4-BE49-F238E27FC236}">
-                <a16:creationId xmlns:a16="http://schemas.microsoft.com/office/drawing/2014/main" id="{80D88D97-3BAF-CCEF-20DA-09623CB119A8}"/>
+                <a16:creationId xmlns:a16="http://schemas.microsoft.com/office/drawing/2014/main" id="{CDF764BD-CF26-A62E-B791-C44437685705}"/>
               </a:ext>
             </a:extLst>
           </p:cNvPr>
@@ -16831,46 +17340,47 @@
           <a:p>
             <a:pPr lvl="0"/>
             <a:r>
-              <a:rPr lang="sv-SE"/>
-              <a:t>Klicka här för att ändra format på bakgrundstexten</a:t>
+              <a:rPr lang="en-US"/>
+              <a:t>Click to edit Master text styles</a:t>
             </a:r>
           </a:p>
           <a:p>
             <a:pPr lvl="1"/>
             <a:r>
-              <a:rPr lang="sv-SE"/>
-              <a:t>Nivå två</a:t>
+              <a:rPr lang="en-US"/>
+              <a:t>Second level</a:t>
             </a:r>
           </a:p>
           <a:p>
             <a:pPr lvl="2"/>
             <a:r>
-              <a:rPr lang="sv-SE"/>
-              <a:t>Nivå tre</a:t>
+              <a:rPr lang="en-US"/>
+              <a:t>Third level</a:t>
             </a:r>
           </a:p>
           <a:p>
             <a:pPr lvl="3"/>
             <a:r>
-              <a:rPr lang="sv-SE"/>
-              <a:t>Nivå fyra</a:t>
+              <a:rPr lang="en-US"/>
+              <a:t>Fourth level</a:t>
             </a:r>
           </a:p>
           <a:p>
             <a:pPr lvl="4"/>
             <a:r>
-              <a:rPr lang="sv-SE"/>
-              <a:t>Nivå fem</a:t>
+              <a:rPr lang="en-US"/>
+              <a:t>Fifth level</a:t>
             </a:r>
+            <a:endParaRPr lang="LID4096"/>
           </a:p>
         </p:txBody>
       </p:sp>
       <p:sp>
         <p:nvSpPr>
-          <p:cNvPr id="4" name="Platshållare för text 3">
+          <p:cNvPr id="4" name="Text Placeholder 3">
             <a:extLst>
               <a:ext uri="{FF2B5EF4-FFF2-40B4-BE49-F238E27FC236}">
-                <a16:creationId xmlns:a16="http://schemas.microsoft.com/office/drawing/2014/main" id="{9D540503-2F21-9662-0F03-8C85B4DAB3AF}"/>
+                <a16:creationId xmlns:a16="http://schemas.microsoft.com/office/drawing/2014/main" id="{F6A8B3F9-EEBB-5691-3B77-D989B9AD26F6}"/>
               </a:ext>
             </a:extLst>
           </p:cNvPr>
@@ -16930,18 +17440,18 @@
           <a:p>
             <a:pPr lvl="0"/>
             <a:r>
-              <a:rPr lang="sv-SE"/>
-              <a:t>Klicka här för att ändra format på bakgrundstexten</a:t>
+              <a:rPr lang="en-US"/>
+              <a:t>Click to edit Master text styles</a:t>
             </a:r>
           </a:p>
         </p:txBody>
       </p:sp>
       <p:sp>
         <p:nvSpPr>
-          <p:cNvPr id="5" name="Platshållare för datum 4">
+          <p:cNvPr id="5" name="Date Placeholder 4">
             <a:extLst>
               <a:ext uri="{FF2B5EF4-FFF2-40B4-BE49-F238E27FC236}">
-                <a16:creationId xmlns:a16="http://schemas.microsoft.com/office/drawing/2014/main" id="{AB659DB2-0CF8-7E7D-61BB-8F6697BD1C11}"/>
+                <a16:creationId xmlns:a16="http://schemas.microsoft.com/office/drawing/2014/main" id="{74772549-D572-5E82-3125-4E27CA8A48E0}"/>
               </a:ext>
             </a:extLst>
           </p:cNvPr>
@@ -16957,20 +17467,20 @@
           <a:bodyPr/>
           <a:lstStyle/>
           <a:p>
-            <a:fld id="{4617FB60-BF3C-4081-9AB7-A4E16EDB9E9D}" type="datetimeFigureOut">
-              <a:rPr lang="sv-SE" smtClean="0"/>
-              <a:t>2024-09-07</a:t>
+            <a:fld id="{AF45165C-61D5-42B7-9D8B-D94D579A4112}" type="datetimeFigureOut">
+              <a:rPr lang="LID4096" smtClean="0"/>
+              <a:t>10/08/2024</a:t>
             </a:fld>
-            <a:endParaRPr lang="sv-SE"/>
+            <a:endParaRPr lang="LID4096"/>
           </a:p>
         </p:txBody>
       </p:sp>
       <p:sp>
         <p:nvSpPr>
-          <p:cNvPr id="6" name="Platshållare för sidfot 5">
+          <p:cNvPr id="6" name="Footer Placeholder 5">
             <a:extLst>
               <a:ext uri="{FF2B5EF4-FFF2-40B4-BE49-F238E27FC236}">
-                <a16:creationId xmlns:a16="http://schemas.microsoft.com/office/drawing/2014/main" id="{6480EB28-7284-89B9-05F4-2A0F49ADF07B}"/>
+                <a16:creationId xmlns:a16="http://schemas.microsoft.com/office/drawing/2014/main" id="{8F4A8552-0386-ACFF-3D85-033857A55F58}"/>
               </a:ext>
             </a:extLst>
           </p:cNvPr>
@@ -16986,16 +17496,16 @@
           <a:bodyPr/>
           <a:lstStyle/>
           <a:p>
-            <a:endParaRPr lang="sv-SE"/>
+            <a:endParaRPr lang="LID4096"/>
           </a:p>
         </p:txBody>
       </p:sp>
       <p:sp>
         <p:nvSpPr>
-          <p:cNvPr id="7" name="Platshållare för bildnummer 6">
+          <p:cNvPr id="7" name="Slide Number Placeholder 6">
             <a:extLst>
               <a:ext uri="{FF2B5EF4-FFF2-40B4-BE49-F238E27FC236}">
-                <a16:creationId xmlns:a16="http://schemas.microsoft.com/office/drawing/2014/main" id="{A55CC8C1-23D1-5DEA-E42F-364BD20CA71C}"/>
+                <a16:creationId xmlns:a16="http://schemas.microsoft.com/office/drawing/2014/main" id="{C4DEEEC9-211F-3B2E-8021-6615F0635020}"/>
               </a:ext>
             </a:extLst>
           </p:cNvPr>
@@ -17011,18 +17521,18 @@
           <a:bodyPr/>
           <a:lstStyle/>
           <a:p>
-            <a:fld id="{35855755-DE42-431D-889F-A55AD89DA05D}" type="slidenum">
-              <a:rPr lang="sv-SE" smtClean="0"/>
+            <a:fld id="{D56D06D4-6DF8-4247-80D0-AFCDC6A01DC2}" type="slidenum">
+              <a:rPr lang="LID4096" smtClean="0"/>
               <a:t>‹#›</a:t>
             </a:fld>
-            <a:endParaRPr lang="sv-SE"/>
+            <a:endParaRPr lang="LID4096"/>
           </a:p>
         </p:txBody>
       </p:sp>
     </p:spTree>
     <p:extLst>
       <p:ext uri="{BB962C8B-B14F-4D97-AF65-F5344CB8AC3E}">
-        <p14:creationId xmlns:p14="http://schemas.microsoft.com/office/powerpoint/2010/main" val="4035036325"/>
+        <p14:creationId xmlns:p14="http://schemas.microsoft.com/office/powerpoint/2010/main" val="430025874"/>
       </p:ext>
     </p:extLst>
   </p:cSld>
@@ -17197,7 +17707,7 @@
           <a:p>
             <a:fld id="{96FF6413-3139-4955-9DFE-23DDB370AD4E}" type="datetimeFigureOut">
               <a:rPr lang="LID4096" smtClean="0"/>
-              <a:t>09/07/2024</a:t>
+              <a:t>10/08/2024</a:t>
             </a:fld>
             <a:endParaRPr lang="LID4096"/>
           </a:p>
@@ -17272,7 +17782,7 @@
 
 <file path=ppt/slideLayouts/slideLayout20.xml><?xml version="1.0" encoding="utf-8"?>
 <p:sldLayout xmlns:a="http://schemas.openxmlformats.org/drawingml/2006/main" xmlns:r="http://schemas.openxmlformats.org/officeDocument/2006/relationships" xmlns:p="http://schemas.openxmlformats.org/presentationml/2006/main" type="picTx" preserve="1">
-  <p:cSld name="Bild med bildtext">
+  <p:cSld name="Picture with Caption">
     <p:spTree>
       <p:nvGrpSpPr>
         <p:cNvPr id="1" name=""/>
@@ -17289,10 +17799,10 @@
       </p:grpSpPr>
       <p:sp>
         <p:nvSpPr>
-          <p:cNvPr id="2" name="Rubrik 1">
+          <p:cNvPr id="2" name="Title 1">
             <a:extLst>
               <a:ext uri="{FF2B5EF4-FFF2-40B4-BE49-F238E27FC236}">
-                <a16:creationId xmlns:a16="http://schemas.microsoft.com/office/drawing/2014/main" id="{B539B344-57E8-3046-171C-F66FD05F86F6}"/>
+                <a16:creationId xmlns:a16="http://schemas.microsoft.com/office/drawing/2014/main" id="{F0C026EB-2FFD-F150-F929-6F8849D2FB55}"/>
               </a:ext>
             </a:extLst>
           </p:cNvPr>
@@ -17318,18 +17828,19 @@
           </a:lstStyle>
           <a:p>
             <a:r>
-              <a:rPr lang="sv-SE"/>
-              <a:t>Klicka här för att ändra mall för rubrikformat</a:t>
+              <a:rPr lang="en-US"/>
+              <a:t>Click to edit Master title style</a:t>
             </a:r>
+            <a:endParaRPr lang="LID4096"/>
           </a:p>
         </p:txBody>
       </p:sp>
       <p:sp>
         <p:nvSpPr>
-          <p:cNvPr id="3" name="Platshållare för bild 2">
+          <p:cNvPr id="3" name="Picture Placeholder 2">
             <a:extLst>
               <a:ext uri="{FF2B5EF4-FFF2-40B4-BE49-F238E27FC236}">
-                <a16:creationId xmlns:a16="http://schemas.microsoft.com/office/drawing/2014/main" id="{F06E8EDE-2B1A-BDBE-42A8-F55101F9E604}"/>
+                <a16:creationId xmlns:a16="http://schemas.microsoft.com/office/drawing/2014/main" id="{11B6CB41-7A27-E561-1BEE-D94E959808AF}"/>
               </a:ext>
             </a:extLst>
           </p:cNvPr>
@@ -17387,16 +17898,16 @@
             </a:lvl9pPr>
           </a:lstStyle>
           <a:p>
-            <a:endParaRPr lang="sv-SE"/>
+            <a:endParaRPr lang="LID4096"/>
           </a:p>
         </p:txBody>
       </p:sp>
       <p:sp>
         <p:nvSpPr>
-          <p:cNvPr id="4" name="Platshållare för text 3">
+          <p:cNvPr id="4" name="Text Placeholder 3">
             <a:extLst>
               <a:ext uri="{FF2B5EF4-FFF2-40B4-BE49-F238E27FC236}">
-                <a16:creationId xmlns:a16="http://schemas.microsoft.com/office/drawing/2014/main" id="{DCE2C55D-13A4-3B25-7509-33725EE95293}"/>
+                <a16:creationId xmlns:a16="http://schemas.microsoft.com/office/drawing/2014/main" id="{5D3789D8-10B9-097C-2AED-18A96F1530C6}"/>
               </a:ext>
             </a:extLst>
           </p:cNvPr>
@@ -17456,18 +17967,18 @@
           <a:p>
             <a:pPr lvl="0"/>
             <a:r>
-              <a:rPr lang="sv-SE"/>
-              <a:t>Klicka här för att ändra format på bakgrundstexten</a:t>
+              <a:rPr lang="en-US"/>
+              <a:t>Click to edit Master text styles</a:t>
             </a:r>
           </a:p>
         </p:txBody>
       </p:sp>
       <p:sp>
         <p:nvSpPr>
-          <p:cNvPr id="5" name="Platshållare för datum 4">
+          <p:cNvPr id="5" name="Date Placeholder 4">
             <a:extLst>
               <a:ext uri="{FF2B5EF4-FFF2-40B4-BE49-F238E27FC236}">
-                <a16:creationId xmlns:a16="http://schemas.microsoft.com/office/drawing/2014/main" id="{77EF3AE5-6248-DC88-0A95-7F712A51C645}"/>
+                <a16:creationId xmlns:a16="http://schemas.microsoft.com/office/drawing/2014/main" id="{347D7DB2-6B4A-A48C-94B3-EF52148E3B0F}"/>
               </a:ext>
             </a:extLst>
           </p:cNvPr>
@@ -17483,20 +17994,20 @@
           <a:bodyPr/>
           <a:lstStyle/>
           <a:p>
-            <a:fld id="{4617FB60-BF3C-4081-9AB7-A4E16EDB9E9D}" type="datetimeFigureOut">
-              <a:rPr lang="sv-SE" smtClean="0"/>
-              <a:t>2024-09-07</a:t>
+            <a:fld id="{AF45165C-61D5-42B7-9D8B-D94D579A4112}" type="datetimeFigureOut">
+              <a:rPr lang="LID4096" smtClean="0"/>
+              <a:t>10/08/2024</a:t>
             </a:fld>
-            <a:endParaRPr lang="sv-SE"/>
+            <a:endParaRPr lang="LID4096"/>
           </a:p>
         </p:txBody>
       </p:sp>
       <p:sp>
         <p:nvSpPr>
-          <p:cNvPr id="6" name="Platshållare för sidfot 5">
+          <p:cNvPr id="6" name="Footer Placeholder 5">
             <a:extLst>
               <a:ext uri="{FF2B5EF4-FFF2-40B4-BE49-F238E27FC236}">
-                <a16:creationId xmlns:a16="http://schemas.microsoft.com/office/drawing/2014/main" id="{4E80E32F-5C4A-3B9B-50E0-D346B190741A}"/>
+                <a16:creationId xmlns:a16="http://schemas.microsoft.com/office/drawing/2014/main" id="{4685BCEA-0692-8438-02E6-827CBE885358}"/>
               </a:ext>
             </a:extLst>
           </p:cNvPr>
@@ -17512,16 +18023,16 @@
           <a:bodyPr/>
           <a:lstStyle/>
           <a:p>
-            <a:endParaRPr lang="sv-SE"/>
+            <a:endParaRPr lang="LID4096"/>
           </a:p>
         </p:txBody>
       </p:sp>
       <p:sp>
         <p:nvSpPr>
-          <p:cNvPr id="7" name="Platshållare för bildnummer 6">
+          <p:cNvPr id="7" name="Slide Number Placeholder 6">
             <a:extLst>
               <a:ext uri="{FF2B5EF4-FFF2-40B4-BE49-F238E27FC236}">
-                <a16:creationId xmlns:a16="http://schemas.microsoft.com/office/drawing/2014/main" id="{2C568CDA-6612-12B1-068D-3E883809CF3D}"/>
+                <a16:creationId xmlns:a16="http://schemas.microsoft.com/office/drawing/2014/main" id="{BC7D44E5-9BD2-C773-9D35-4F02D935BA4E}"/>
               </a:ext>
             </a:extLst>
           </p:cNvPr>
@@ -17537,18 +18048,18 @@
           <a:bodyPr/>
           <a:lstStyle/>
           <a:p>
-            <a:fld id="{35855755-DE42-431D-889F-A55AD89DA05D}" type="slidenum">
-              <a:rPr lang="sv-SE" smtClean="0"/>
+            <a:fld id="{D56D06D4-6DF8-4247-80D0-AFCDC6A01DC2}" type="slidenum">
+              <a:rPr lang="LID4096" smtClean="0"/>
               <a:t>‹#›</a:t>
             </a:fld>
-            <a:endParaRPr lang="sv-SE"/>
+            <a:endParaRPr lang="LID4096"/>
           </a:p>
         </p:txBody>
       </p:sp>
     </p:spTree>
     <p:extLst>
       <p:ext uri="{BB962C8B-B14F-4D97-AF65-F5344CB8AC3E}">
-        <p14:creationId xmlns:p14="http://schemas.microsoft.com/office/powerpoint/2010/main" val="2436091719"/>
+        <p14:creationId xmlns:p14="http://schemas.microsoft.com/office/powerpoint/2010/main" val="806887983"/>
       </p:ext>
     </p:extLst>
   </p:cSld>
@@ -17560,7 +18071,7 @@
 
 <file path=ppt/slideLayouts/slideLayout21.xml><?xml version="1.0" encoding="utf-8"?>
 <p:sldLayout xmlns:a="http://schemas.openxmlformats.org/drawingml/2006/main" xmlns:r="http://schemas.openxmlformats.org/officeDocument/2006/relationships" xmlns:p="http://schemas.openxmlformats.org/presentationml/2006/main" type="vertTx" preserve="1">
-  <p:cSld name="Rubrik och lodrät text">
+  <p:cSld name="Title and Vertical Text">
     <p:spTree>
       <p:nvGrpSpPr>
         <p:cNvPr id="1" name=""/>
@@ -17577,10 +18088,10 @@
       </p:grpSpPr>
       <p:sp>
         <p:nvSpPr>
-          <p:cNvPr id="2" name="Rubrik 1">
+          <p:cNvPr id="2" name="Title 1">
             <a:extLst>
               <a:ext uri="{FF2B5EF4-FFF2-40B4-BE49-F238E27FC236}">
-                <a16:creationId xmlns:a16="http://schemas.microsoft.com/office/drawing/2014/main" id="{15AE3191-222D-83E2-E1F5-3C641E7E6B50}"/>
+                <a16:creationId xmlns:a16="http://schemas.microsoft.com/office/drawing/2014/main" id="{61B8F6F7-8CFC-C236-45AC-4812624FD277}"/>
               </a:ext>
             </a:extLst>
           </p:cNvPr>
@@ -17597,18 +18108,19 @@
           <a:lstStyle/>
           <a:p>
             <a:r>
-              <a:rPr lang="sv-SE"/>
-              <a:t>Klicka här för att ändra mall för rubrikformat</a:t>
+              <a:rPr lang="en-US"/>
+              <a:t>Click to edit Master title style</a:t>
             </a:r>
+            <a:endParaRPr lang="LID4096"/>
           </a:p>
         </p:txBody>
       </p:sp>
       <p:sp>
         <p:nvSpPr>
-          <p:cNvPr id="3" name="Platshållare för lodrät text 2">
+          <p:cNvPr id="3" name="Vertical Text Placeholder 2">
             <a:extLst>
               <a:ext uri="{FF2B5EF4-FFF2-40B4-BE49-F238E27FC236}">
-                <a16:creationId xmlns:a16="http://schemas.microsoft.com/office/drawing/2014/main" id="{9E746675-E2E4-C15D-0DA3-95514BEE5916}"/>
+                <a16:creationId xmlns:a16="http://schemas.microsoft.com/office/drawing/2014/main" id="{91F057F1-2134-7529-C405-79B10EADF171}"/>
               </a:ext>
             </a:extLst>
           </p:cNvPr>
@@ -17626,46 +18138,47 @@
           <a:p>
             <a:pPr lvl="0"/>
             <a:r>
-              <a:rPr lang="sv-SE"/>
-              <a:t>Klicka här för att ändra format på bakgrundstexten</a:t>
+              <a:rPr lang="en-US"/>
+              <a:t>Click to edit Master text styles</a:t>
             </a:r>
           </a:p>
           <a:p>
             <a:pPr lvl="1"/>
             <a:r>
-              <a:rPr lang="sv-SE"/>
-              <a:t>Nivå två</a:t>
+              <a:rPr lang="en-US"/>
+              <a:t>Second level</a:t>
             </a:r>
           </a:p>
           <a:p>
             <a:pPr lvl="2"/>
             <a:r>
-              <a:rPr lang="sv-SE"/>
-              <a:t>Nivå tre</a:t>
+              <a:rPr lang="en-US"/>
+              <a:t>Third level</a:t>
             </a:r>
           </a:p>
           <a:p>
             <a:pPr lvl="3"/>
             <a:r>
-              <a:rPr lang="sv-SE"/>
-              <a:t>Nivå fyra</a:t>
+              <a:rPr lang="en-US"/>
+              <a:t>Fourth level</a:t>
             </a:r>
           </a:p>
           <a:p>
             <a:pPr lvl="4"/>
             <a:r>
-              <a:rPr lang="sv-SE"/>
-              <a:t>Nivå fem</a:t>
+              <a:rPr lang="en-US"/>
+              <a:t>Fifth level</a:t>
             </a:r>
+            <a:endParaRPr lang="LID4096"/>
           </a:p>
         </p:txBody>
       </p:sp>
       <p:sp>
         <p:nvSpPr>
-          <p:cNvPr id="4" name="Platshållare för datum 3">
+          <p:cNvPr id="4" name="Date Placeholder 3">
             <a:extLst>
               <a:ext uri="{FF2B5EF4-FFF2-40B4-BE49-F238E27FC236}">
-                <a16:creationId xmlns:a16="http://schemas.microsoft.com/office/drawing/2014/main" id="{05500CE9-98C0-5825-56C5-0AE950B5E154}"/>
+                <a16:creationId xmlns:a16="http://schemas.microsoft.com/office/drawing/2014/main" id="{723CA0B1-1522-745C-913D-A7F52AFA6653}"/>
               </a:ext>
             </a:extLst>
           </p:cNvPr>
@@ -17681,20 +18194,20 @@
           <a:bodyPr/>
           <a:lstStyle/>
           <a:p>
-            <a:fld id="{4617FB60-BF3C-4081-9AB7-A4E16EDB9E9D}" type="datetimeFigureOut">
-              <a:rPr lang="sv-SE" smtClean="0"/>
-              <a:t>2024-09-07</a:t>
+            <a:fld id="{AF45165C-61D5-42B7-9D8B-D94D579A4112}" type="datetimeFigureOut">
+              <a:rPr lang="LID4096" smtClean="0"/>
+              <a:t>10/08/2024</a:t>
             </a:fld>
-            <a:endParaRPr lang="sv-SE"/>
+            <a:endParaRPr lang="LID4096"/>
           </a:p>
         </p:txBody>
       </p:sp>
       <p:sp>
         <p:nvSpPr>
-          <p:cNvPr id="5" name="Platshållare för sidfot 4">
+          <p:cNvPr id="5" name="Footer Placeholder 4">
             <a:extLst>
               <a:ext uri="{FF2B5EF4-FFF2-40B4-BE49-F238E27FC236}">
-                <a16:creationId xmlns:a16="http://schemas.microsoft.com/office/drawing/2014/main" id="{F89E4652-60C9-6D7C-2678-71E8B6E0BC53}"/>
+                <a16:creationId xmlns:a16="http://schemas.microsoft.com/office/drawing/2014/main" id="{50DA92F4-B51B-21C5-9001-8B5BFB314003}"/>
               </a:ext>
             </a:extLst>
           </p:cNvPr>
@@ -17710,16 +18223,16 @@
           <a:bodyPr/>
           <a:lstStyle/>
           <a:p>
-            <a:endParaRPr lang="sv-SE"/>
+            <a:endParaRPr lang="LID4096"/>
           </a:p>
         </p:txBody>
       </p:sp>
       <p:sp>
         <p:nvSpPr>
-          <p:cNvPr id="6" name="Platshållare för bildnummer 5">
+          <p:cNvPr id="6" name="Slide Number Placeholder 5">
             <a:extLst>
               <a:ext uri="{FF2B5EF4-FFF2-40B4-BE49-F238E27FC236}">
-                <a16:creationId xmlns:a16="http://schemas.microsoft.com/office/drawing/2014/main" id="{ECC05122-8521-0657-0183-A65D51EA5B63}"/>
+                <a16:creationId xmlns:a16="http://schemas.microsoft.com/office/drawing/2014/main" id="{5A123D4F-42CC-78A2-8BC5-36D8A02A50C6}"/>
               </a:ext>
             </a:extLst>
           </p:cNvPr>
@@ -17735,18 +18248,18 @@
           <a:bodyPr/>
           <a:lstStyle/>
           <a:p>
-            <a:fld id="{35855755-DE42-431D-889F-A55AD89DA05D}" type="slidenum">
-              <a:rPr lang="sv-SE" smtClean="0"/>
+            <a:fld id="{D56D06D4-6DF8-4247-80D0-AFCDC6A01DC2}" type="slidenum">
+              <a:rPr lang="LID4096" smtClean="0"/>
               <a:t>‹#›</a:t>
             </a:fld>
-            <a:endParaRPr lang="sv-SE"/>
+            <a:endParaRPr lang="LID4096"/>
           </a:p>
         </p:txBody>
       </p:sp>
     </p:spTree>
     <p:extLst>
       <p:ext uri="{BB962C8B-B14F-4D97-AF65-F5344CB8AC3E}">
-        <p14:creationId xmlns:p14="http://schemas.microsoft.com/office/powerpoint/2010/main" val="4130794852"/>
+        <p14:creationId xmlns:p14="http://schemas.microsoft.com/office/powerpoint/2010/main" val="2058912099"/>
       </p:ext>
     </p:extLst>
   </p:cSld>
@@ -17758,7 +18271,7 @@
 
 <file path=ppt/slideLayouts/slideLayout22.xml><?xml version="1.0" encoding="utf-8"?>
 <p:sldLayout xmlns:a="http://schemas.openxmlformats.org/drawingml/2006/main" xmlns:r="http://schemas.openxmlformats.org/officeDocument/2006/relationships" xmlns:p="http://schemas.openxmlformats.org/presentationml/2006/main" type="vertTitleAndTx" preserve="1">
-  <p:cSld name="Lodrät rubrik och text">
+  <p:cSld name="Vertical Title and Text">
     <p:spTree>
       <p:nvGrpSpPr>
         <p:cNvPr id="1" name=""/>
@@ -17775,10 +18288,10 @@
       </p:grpSpPr>
       <p:sp>
         <p:nvSpPr>
-          <p:cNvPr id="2" name="Lodrät rubrik 1">
+          <p:cNvPr id="2" name="Vertical Title 1">
             <a:extLst>
               <a:ext uri="{FF2B5EF4-FFF2-40B4-BE49-F238E27FC236}">
-                <a16:creationId xmlns:a16="http://schemas.microsoft.com/office/drawing/2014/main" id="{CD737527-71CF-CE01-F372-9EE08C365C9D}"/>
+                <a16:creationId xmlns:a16="http://schemas.microsoft.com/office/drawing/2014/main" id="{44D1E1F2-B046-1CC9-8BFF-CC8405DF8BC4}"/>
               </a:ext>
             </a:extLst>
           </p:cNvPr>
@@ -17800,18 +18313,19 @@
           <a:lstStyle/>
           <a:p>
             <a:r>
-              <a:rPr lang="sv-SE"/>
-              <a:t>Klicka här för att ändra mall för rubrikformat</a:t>
+              <a:rPr lang="en-US"/>
+              <a:t>Click to edit Master title style</a:t>
             </a:r>
+            <a:endParaRPr lang="LID4096"/>
           </a:p>
         </p:txBody>
       </p:sp>
       <p:sp>
         <p:nvSpPr>
-          <p:cNvPr id="3" name="Platshållare för lodrät text 2">
+          <p:cNvPr id="3" name="Vertical Text Placeholder 2">
             <a:extLst>
               <a:ext uri="{FF2B5EF4-FFF2-40B4-BE49-F238E27FC236}">
-                <a16:creationId xmlns:a16="http://schemas.microsoft.com/office/drawing/2014/main" id="{5054B8F6-CF76-9E0C-B9D1-AB487901F175}"/>
+                <a16:creationId xmlns:a16="http://schemas.microsoft.com/office/drawing/2014/main" id="{AF302E73-BF62-65F4-A16A-8DB7512E732E}"/>
               </a:ext>
             </a:extLst>
           </p:cNvPr>
@@ -17834,46 +18348,47 @@
           <a:p>
             <a:pPr lvl="0"/>
             <a:r>
-              <a:rPr lang="sv-SE"/>
-              <a:t>Klicka här för att ändra format på bakgrundstexten</a:t>
+              <a:rPr lang="en-US"/>
+              <a:t>Click to edit Master text styles</a:t>
             </a:r>
           </a:p>
           <a:p>
             <a:pPr lvl="1"/>
             <a:r>
-              <a:rPr lang="sv-SE"/>
-              <a:t>Nivå två</a:t>
+              <a:rPr lang="en-US"/>
+              <a:t>Second level</a:t>
             </a:r>
           </a:p>
           <a:p>
             <a:pPr lvl="2"/>
             <a:r>
-              <a:rPr lang="sv-SE"/>
-              <a:t>Nivå tre</a:t>
+              <a:rPr lang="en-US"/>
+              <a:t>Third level</a:t>
             </a:r>
           </a:p>
           <a:p>
             <a:pPr lvl="3"/>
             <a:r>
-              <a:rPr lang="sv-SE"/>
-              <a:t>Nivå fyra</a:t>
+              <a:rPr lang="en-US"/>
+              <a:t>Fourth level</a:t>
             </a:r>
           </a:p>
           <a:p>
             <a:pPr lvl="4"/>
             <a:r>
-              <a:rPr lang="sv-SE"/>
-              <a:t>Nivå fem</a:t>
+              <a:rPr lang="en-US"/>
+              <a:t>Fifth level</a:t>
             </a:r>
+            <a:endParaRPr lang="LID4096"/>
           </a:p>
         </p:txBody>
       </p:sp>
       <p:sp>
         <p:nvSpPr>
-          <p:cNvPr id="4" name="Platshållare för datum 3">
+          <p:cNvPr id="4" name="Date Placeholder 3">
             <a:extLst>
               <a:ext uri="{FF2B5EF4-FFF2-40B4-BE49-F238E27FC236}">
-                <a16:creationId xmlns:a16="http://schemas.microsoft.com/office/drawing/2014/main" id="{76FB98AA-FE35-BA41-B745-8AF50D5B6211}"/>
+                <a16:creationId xmlns:a16="http://schemas.microsoft.com/office/drawing/2014/main" id="{9DF3AA80-1B69-FD6F-2091-2C2748ED116D}"/>
               </a:ext>
             </a:extLst>
           </p:cNvPr>
@@ -17889,20 +18404,20 @@
           <a:bodyPr/>
           <a:lstStyle/>
           <a:p>
-            <a:fld id="{4617FB60-BF3C-4081-9AB7-A4E16EDB9E9D}" type="datetimeFigureOut">
-              <a:rPr lang="sv-SE" smtClean="0"/>
-              <a:t>2024-09-07</a:t>
+            <a:fld id="{AF45165C-61D5-42B7-9D8B-D94D579A4112}" type="datetimeFigureOut">
+              <a:rPr lang="LID4096" smtClean="0"/>
+              <a:t>10/08/2024</a:t>
             </a:fld>
-            <a:endParaRPr lang="sv-SE"/>
+            <a:endParaRPr lang="LID4096"/>
           </a:p>
         </p:txBody>
       </p:sp>
       <p:sp>
         <p:nvSpPr>
-          <p:cNvPr id="5" name="Platshållare för sidfot 4">
+          <p:cNvPr id="5" name="Footer Placeholder 4">
             <a:extLst>
               <a:ext uri="{FF2B5EF4-FFF2-40B4-BE49-F238E27FC236}">
-                <a16:creationId xmlns:a16="http://schemas.microsoft.com/office/drawing/2014/main" id="{7147481E-EFA0-5604-EA0B-4CD223F6C50F}"/>
+                <a16:creationId xmlns:a16="http://schemas.microsoft.com/office/drawing/2014/main" id="{DE5C08A5-6434-5968-1E8C-AE99A2D3D1C8}"/>
               </a:ext>
             </a:extLst>
           </p:cNvPr>
@@ -17918,16 +18433,16 @@
           <a:bodyPr/>
           <a:lstStyle/>
           <a:p>
-            <a:endParaRPr lang="sv-SE"/>
+            <a:endParaRPr lang="LID4096"/>
           </a:p>
         </p:txBody>
       </p:sp>
       <p:sp>
         <p:nvSpPr>
-          <p:cNvPr id="6" name="Platshållare för bildnummer 5">
+          <p:cNvPr id="6" name="Slide Number Placeholder 5">
             <a:extLst>
               <a:ext uri="{FF2B5EF4-FFF2-40B4-BE49-F238E27FC236}">
-                <a16:creationId xmlns:a16="http://schemas.microsoft.com/office/drawing/2014/main" id="{DF467474-F9BF-AFC9-793A-819ED4F4BBA9}"/>
+                <a16:creationId xmlns:a16="http://schemas.microsoft.com/office/drawing/2014/main" id="{7A53439B-D4D2-4997-9675-DC9CCD23560A}"/>
               </a:ext>
             </a:extLst>
           </p:cNvPr>
@@ -17943,18 +18458,213 @@
           <a:bodyPr/>
           <a:lstStyle/>
           <a:p>
-            <a:fld id="{35855755-DE42-431D-889F-A55AD89DA05D}" type="slidenum">
-              <a:rPr lang="sv-SE" smtClean="0"/>
+            <a:fld id="{D56D06D4-6DF8-4247-80D0-AFCDC6A01DC2}" type="slidenum">
+              <a:rPr lang="LID4096" smtClean="0"/>
               <a:t>‹#›</a:t>
             </a:fld>
-            <a:endParaRPr lang="sv-SE"/>
+            <a:endParaRPr lang="LID4096"/>
           </a:p>
         </p:txBody>
       </p:sp>
     </p:spTree>
     <p:extLst>
       <p:ext uri="{BB962C8B-B14F-4D97-AF65-F5344CB8AC3E}">
-        <p14:creationId xmlns:p14="http://schemas.microsoft.com/office/powerpoint/2010/main" val="561513121"/>
+        <p14:creationId xmlns:p14="http://schemas.microsoft.com/office/powerpoint/2010/main" val="2334198321"/>
+      </p:ext>
+    </p:extLst>
+  </p:cSld>
+  <p:clrMapOvr>
+    <a:masterClrMapping/>
+  </p:clrMapOvr>
+</p:sldLayout>
+</file>
+
+<file path=ppt/slideLayouts/slideLayout23.xml><?xml version="1.0" encoding="utf-8"?>
+<p:sldLayout xmlns:a="http://schemas.openxmlformats.org/drawingml/2006/main" xmlns:r="http://schemas.openxmlformats.org/officeDocument/2006/relationships" xmlns:p="http://schemas.openxmlformats.org/presentationml/2006/main" userDrawn="1">
+  <p:cSld name="Full picture slide">
+    <p:spTree>
+      <p:nvGrpSpPr>
+        <p:cNvPr id="1" name=""/>
+        <p:cNvGrpSpPr/>
+        <p:nvPr/>
+      </p:nvGrpSpPr>
+      <p:grpSpPr>
+        <a:xfrm>
+          <a:off x="0" y="0"/>
+          <a:ext cx="0" cy="0"/>
+          <a:chOff x="0" y="0"/>
+          <a:chExt cx="0" cy="0"/>
+        </a:xfrm>
+      </p:grpSpPr>
+      <p:sp>
+        <p:nvSpPr>
+          <p:cNvPr id="5" name="Date Placeholder 4">
+            <a:extLst>
+              <a:ext uri="{FF2B5EF4-FFF2-40B4-BE49-F238E27FC236}">
+                <a16:creationId xmlns:a16="http://schemas.microsoft.com/office/drawing/2014/main" id="{8D758A4A-602B-9F46-BCDA-E75145D85522}"/>
+              </a:ext>
+            </a:extLst>
+          </p:cNvPr>
+          <p:cNvSpPr>
+            <a:spLocks noGrp="1"/>
+          </p:cNvSpPr>
+          <p:nvPr>
+            <p:ph type="dt" sz="half" idx="10"/>
+          </p:nvPr>
+        </p:nvSpPr>
+        <p:spPr/>
+        <p:txBody>
+          <a:bodyPr/>
+          <a:lstStyle/>
+          <a:p>
+            <a:fld id="{E3D2B3A3-464B-6B4B-98C9-882832127905}" type="datetime1">
+              <a:rPr lang="en-US" smtClean="0"/>
+              <a:t>10/8/2024</a:t>
+            </a:fld>
+            <a:endParaRPr lang="en-US"/>
+          </a:p>
+        </p:txBody>
+      </p:sp>
+      <p:sp>
+        <p:nvSpPr>
+          <p:cNvPr id="6" name="Footer Placeholder 5">
+            <a:extLst>
+              <a:ext uri="{FF2B5EF4-FFF2-40B4-BE49-F238E27FC236}">
+                <a16:creationId xmlns:a16="http://schemas.microsoft.com/office/drawing/2014/main" id="{F0D35858-31C3-1D47-846B-80B423D5E6AC}"/>
+              </a:ext>
+            </a:extLst>
+          </p:cNvPr>
+          <p:cNvSpPr>
+            <a:spLocks noGrp="1"/>
+          </p:cNvSpPr>
+          <p:nvPr>
+            <p:ph type="ftr" sz="quarter" idx="11"/>
+          </p:nvPr>
+        </p:nvSpPr>
+        <p:spPr/>
+        <p:txBody>
+          <a:bodyPr/>
+          <a:lstStyle>
+            <a:lvl1pPr>
+              <a:defRPr/>
+            </a:lvl1pPr>
+          </a:lstStyle>
+          <a:p>
+            <a:r>
+              <a:rPr lang="en-US" dirty="0"/>
+              <a:t>dataMinds Connect 2019</a:t>
+            </a:r>
+          </a:p>
+        </p:txBody>
+      </p:sp>
+      <p:sp>
+        <p:nvSpPr>
+          <p:cNvPr id="7" name="Slide Number Placeholder 6">
+            <a:extLst>
+              <a:ext uri="{FF2B5EF4-FFF2-40B4-BE49-F238E27FC236}">
+                <a16:creationId xmlns:a16="http://schemas.microsoft.com/office/drawing/2014/main" id="{E9204DC2-3413-3548-8CF8-C5C663E9BB39}"/>
+              </a:ext>
+            </a:extLst>
+          </p:cNvPr>
+          <p:cNvSpPr>
+            <a:spLocks noGrp="1"/>
+          </p:cNvSpPr>
+          <p:nvPr>
+            <p:ph type="sldNum" sz="quarter" idx="12"/>
+          </p:nvPr>
+        </p:nvSpPr>
+        <p:spPr/>
+        <p:txBody>
+          <a:bodyPr/>
+          <a:lstStyle/>
+          <a:p>
+            <a:fld id="{C0B2EF14-4A5E-9745-A203-CFD06475368E}" type="slidenum">
+              <a:rPr lang="en-US" smtClean="0"/>
+              <a:t>‹#›</a:t>
+            </a:fld>
+            <a:endParaRPr lang="en-US"/>
+          </a:p>
+        </p:txBody>
+      </p:sp>
+      <p:sp>
+        <p:nvSpPr>
+          <p:cNvPr id="10" name="Picture Placeholder 2">
+            <a:extLst>
+              <a:ext uri="{FF2B5EF4-FFF2-40B4-BE49-F238E27FC236}">
+                <a16:creationId xmlns:a16="http://schemas.microsoft.com/office/drawing/2014/main" id="{59507F9A-98FE-9840-8666-8F444E9976E2}"/>
+              </a:ext>
+            </a:extLst>
+          </p:cNvPr>
+          <p:cNvSpPr>
+            <a:spLocks noGrp="1"/>
+          </p:cNvSpPr>
+          <p:nvPr>
+            <p:ph type="pic" idx="14"/>
+          </p:nvPr>
+        </p:nvSpPr>
+        <p:spPr>
+          <a:xfrm>
+            <a:off x="836612" y="534210"/>
+            <a:ext cx="10515599" cy="5745984"/>
+          </a:xfrm>
+          <a:effectLst>
+            <a:outerShdw blurRad="139700" dist="38100" dir="2700000" algn="tl" rotWithShape="0">
+              <a:schemeClr val="bg2">
+                <a:lumMod val="50000"/>
+                <a:alpha val="40000"/>
+              </a:schemeClr>
+            </a:outerShdw>
+          </a:effectLst>
+        </p:spPr>
+        <p:txBody>
+          <a:bodyPr/>
+          <a:lstStyle>
+            <a:lvl1pPr marL="0" indent="0">
+              <a:buNone/>
+              <a:defRPr sz="3200"/>
+            </a:lvl1pPr>
+            <a:lvl2pPr marL="457200" indent="0">
+              <a:buNone/>
+              <a:defRPr sz="2800"/>
+            </a:lvl2pPr>
+            <a:lvl3pPr marL="914400" indent="0">
+              <a:buNone/>
+              <a:defRPr sz="2400"/>
+            </a:lvl3pPr>
+            <a:lvl4pPr marL="1371600" indent="0">
+              <a:buNone/>
+              <a:defRPr sz="2000"/>
+            </a:lvl4pPr>
+            <a:lvl5pPr marL="1828800" indent="0">
+              <a:buNone/>
+              <a:defRPr sz="2000"/>
+            </a:lvl5pPr>
+            <a:lvl6pPr marL="2286000" indent="0">
+              <a:buNone/>
+              <a:defRPr sz="2000"/>
+            </a:lvl6pPr>
+            <a:lvl7pPr marL="2743200" indent="0">
+              <a:buNone/>
+              <a:defRPr sz="2000"/>
+            </a:lvl7pPr>
+            <a:lvl8pPr marL="3200400" indent="0">
+              <a:buNone/>
+              <a:defRPr sz="2000"/>
+            </a:lvl8pPr>
+            <a:lvl9pPr marL="3657600" indent="0">
+              <a:buNone/>
+              <a:defRPr sz="2000"/>
+            </a:lvl9pPr>
+          </a:lstStyle>
+          <a:p>
+            <a:endParaRPr lang="en-US"/>
+          </a:p>
+        </p:txBody>
+      </p:sp>
+    </p:spTree>
+    <p:extLst>
+      <p:ext uri="{BB962C8B-B14F-4D97-AF65-F5344CB8AC3E}">
+        <p14:creationId xmlns:p14="http://schemas.microsoft.com/office/powerpoint/2010/main" val="3759023838"/>
       </p:ext>
     </p:extLst>
   </p:cSld>
@@ -18172,7 +18882,7 @@
           <a:p>
             <a:fld id="{96FF6413-3139-4955-9DFE-23DDB370AD4E}" type="datetimeFigureOut">
               <a:rPr lang="LID4096" smtClean="0"/>
-              <a:t>09/07/2024</a:t>
+              <a:t>10/08/2024</a:t>
             </a:fld>
             <a:endParaRPr lang="LID4096"/>
           </a:p>
@@ -18509,7 +19219,7 @@
           <a:p>
             <a:fld id="{96FF6413-3139-4955-9DFE-23DDB370AD4E}" type="datetimeFigureOut">
               <a:rPr lang="LID4096" smtClean="0"/>
-              <a:t>09/07/2024</a:t>
+              <a:t>10/08/2024</a:t>
             </a:fld>
             <a:endParaRPr lang="LID4096"/>
           </a:p>
@@ -18999,7 +19709,7 @@
           <a:p>
             <a:fld id="{96FF6413-3139-4955-9DFE-23DDB370AD4E}" type="datetimeFigureOut">
               <a:rPr lang="LID4096" smtClean="0"/>
-              <a:t>09/07/2024</a:t>
+              <a:t>10/08/2024</a:t>
             </a:fld>
             <a:endParaRPr lang="LID4096"/>
           </a:p>
@@ -19148,7 +19858,7 @@
           <a:p>
             <a:fld id="{96FF6413-3139-4955-9DFE-23DDB370AD4E}" type="datetimeFigureOut">
               <a:rPr lang="LID4096" smtClean="0"/>
-              <a:t>09/07/2024</a:t>
+              <a:t>10/08/2024</a:t>
             </a:fld>
             <a:endParaRPr lang="LID4096"/>
           </a:p>
@@ -19261,7 +19971,7 @@
           <a:p>
             <a:fld id="{96FF6413-3139-4955-9DFE-23DDB370AD4E}" type="datetimeFigureOut">
               <a:rPr lang="LID4096" smtClean="0"/>
-              <a:t>09/07/2024</a:t>
+              <a:t>10/08/2024</a:t>
             </a:fld>
             <a:endParaRPr lang="LID4096"/>
           </a:p>
@@ -19595,7 +20305,7 @@
           <a:p>
             <a:fld id="{96FF6413-3139-4955-9DFE-23DDB370AD4E}" type="datetimeFigureOut">
               <a:rPr lang="LID4096" smtClean="0"/>
-              <a:t>09/07/2024</a:t>
+              <a:t>10/08/2024</a:t>
             </a:fld>
             <a:endParaRPr lang="LID4096"/>
           </a:p>
@@ -19890,7 +20600,7 @@
           <a:p>
             <a:fld id="{96FF6413-3139-4955-9DFE-23DDB370AD4E}" type="datetimeFigureOut">
               <a:rPr lang="LID4096" smtClean="0"/>
-              <a:t>09/07/2024</a:t>
+              <a:t>10/08/2024</a:t>
             </a:fld>
             <a:endParaRPr lang="LID4096"/>
           </a:p>
@@ -20142,7 +20852,7 @@
             <a:fld id="{96FF6413-3139-4955-9DFE-23DDB370AD4E}" type="datetimeFigureOut">
               <a:rPr lang="LID4096" smtClean="0"/>
               <a:pPr/>
-              <a:t>09/07/2024</a:t>
+              <a:t>10/08/2024</a:t>
             </a:fld>
             <a:endParaRPr lang="LID4096" dirty="0"/>
           </a:p>
@@ -20607,10 +21317,10 @@
       </p:grpSpPr>
       <p:sp>
         <p:nvSpPr>
-          <p:cNvPr id="2" name="Platshållare för rubrik 1">
+          <p:cNvPr id="2" name="Title Placeholder 1">
             <a:extLst>
               <a:ext uri="{FF2B5EF4-FFF2-40B4-BE49-F238E27FC236}">
-                <a16:creationId xmlns:a16="http://schemas.microsoft.com/office/drawing/2014/main" id="{857F1F53-6748-451A-718E-F6EA308F4D49}"/>
+                <a16:creationId xmlns:a16="http://schemas.microsoft.com/office/drawing/2014/main" id="{FD869C69-8949-CEA7-474B-5F049C27887D}"/>
               </a:ext>
             </a:extLst>
           </p:cNvPr>
@@ -20637,18 +21347,19 @@
           <a:lstStyle/>
           <a:p>
             <a:r>
-              <a:rPr lang="sv-SE"/>
-              <a:t>Klicka här för att ändra mall för rubrikformat</a:t>
+              <a:rPr lang="en-US"/>
+              <a:t>Click to edit Master title style</a:t>
             </a:r>
+            <a:endParaRPr lang="LID4096"/>
           </a:p>
         </p:txBody>
       </p:sp>
       <p:sp>
         <p:nvSpPr>
-          <p:cNvPr id="3" name="Platshållare för text 2">
+          <p:cNvPr id="3" name="Text Placeholder 2">
             <a:extLst>
               <a:ext uri="{FF2B5EF4-FFF2-40B4-BE49-F238E27FC236}">
-                <a16:creationId xmlns:a16="http://schemas.microsoft.com/office/drawing/2014/main" id="{A90C4885-EAC9-6492-A642-F02C23518A20}"/>
+                <a16:creationId xmlns:a16="http://schemas.microsoft.com/office/drawing/2014/main" id="{C7313386-BF11-9474-D788-86DCD8A330FA}"/>
               </a:ext>
             </a:extLst>
           </p:cNvPr>
@@ -20676,46 +21387,47 @@
           <a:p>
             <a:pPr lvl="0"/>
             <a:r>
-              <a:rPr lang="sv-SE"/>
-              <a:t>Klicka här för att ändra format på bakgrundstexten</a:t>
+              <a:rPr lang="en-US"/>
+              <a:t>Click to edit Master text styles</a:t>
             </a:r>
           </a:p>
           <a:p>
             <a:pPr lvl="1"/>
             <a:r>
-              <a:rPr lang="sv-SE"/>
-              <a:t>Nivå två</a:t>
+              <a:rPr lang="en-US"/>
+              <a:t>Second level</a:t>
             </a:r>
           </a:p>
           <a:p>
             <a:pPr lvl="2"/>
             <a:r>
-              <a:rPr lang="sv-SE"/>
-              <a:t>Nivå tre</a:t>
+              <a:rPr lang="en-US"/>
+              <a:t>Third level</a:t>
             </a:r>
           </a:p>
           <a:p>
             <a:pPr lvl="3"/>
             <a:r>
-              <a:rPr lang="sv-SE"/>
-              <a:t>Nivå fyra</a:t>
+              <a:rPr lang="en-US"/>
+              <a:t>Fourth level</a:t>
             </a:r>
           </a:p>
           <a:p>
             <a:pPr lvl="4"/>
             <a:r>
-              <a:rPr lang="sv-SE"/>
-              <a:t>Nivå fem</a:t>
+              <a:rPr lang="en-US"/>
+              <a:t>Fifth level</a:t>
             </a:r>
+            <a:endParaRPr lang="LID4096"/>
           </a:p>
         </p:txBody>
       </p:sp>
       <p:sp>
         <p:nvSpPr>
-          <p:cNvPr id="4" name="Platshållare för datum 3">
+          <p:cNvPr id="4" name="Date Placeholder 3">
             <a:extLst>
               <a:ext uri="{FF2B5EF4-FFF2-40B4-BE49-F238E27FC236}">
-                <a16:creationId xmlns:a16="http://schemas.microsoft.com/office/drawing/2014/main" id="{63F0E55A-0598-5F95-661D-9D844D9113BE}"/>
+                <a16:creationId xmlns:a16="http://schemas.microsoft.com/office/drawing/2014/main" id="{2639A3AD-3AD1-E594-C3AC-04AA1FD4C5AF}"/>
               </a:ext>
             </a:extLst>
           </p:cNvPr>
@@ -20749,20 +21461,20 @@
             </a:lvl1pPr>
           </a:lstStyle>
           <a:p>
-            <a:fld id="{4617FB60-BF3C-4081-9AB7-A4E16EDB9E9D}" type="datetimeFigureOut">
-              <a:rPr lang="sv-SE" smtClean="0"/>
-              <a:t>2024-09-07</a:t>
+            <a:fld id="{AF45165C-61D5-42B7-9D8B-D94D579A4112}" type="datetimeFigureOut">
+              <a:rPr lang="LID4096" smtClean="0"/>
+              <a:t>10/08/2024</a:t>
             </a:fld>
-            <a:endParaRPr lang="sv-SE"/>
+            <a:endParaRPr lang="LID4096"/>
           </a:p>
         </p:txBody>
       </p:sp>
       <p:sp>
         <p:nvSpPr>
-          <p:cNvPr id="5" name="Platshållare för sidfot 4">
+          <p:cNvPr id="5" name="Footer Placeholder 4">
             <a:extLst>
               <a:ext uri="{FF2B5EF4-FFF2-40B4-BE49-F238E27FC236}">
-                <a16:creationId xmlns:a16="http://schemas.microsoft.com/office/drawing/2014/main" id="{F7C21EE0-170C-18B8-07C0-D0771243952C}"/>
+                <a16:creationId xmlns:a16="http://schemas.microsoft.com/office/drawing/2014/main" id="{E37AF967-3329-CABE-268A-F950DE35B10E}"/>
               </a:ext>
             </a:extLst>
           </p:cNvPr>
@@ -20796,16 +21508,16 @@
             </a:lvl1pPr>
           </a:lstStyle>
           <a:p>
-            <a:endParaRPr lang="sv-SE"/>
+            <a:endParaRPr lang="LID4096"/>
           </a:p>
         </p:txBody>
       </p:sp>
       <p:sp>
         <p:nvSpPr>
-          <p:cNvPr id="6" name="Platshållare för bildnummer 5">
+          <p:cNvPr id="6" name="Slide Number Placeholder 5">
             <a:extLst>
               <a:ext uri="{FF2B5EF4-FFF2-40B4-BE49-F238E27FC236}">
-                <a16:creationId xmlns:a16="http://schemas.microsoft.com/office/drawing/2014/main" id="{D92E3172-FA6F-677C-3254-E602B0FE1101}"/>
+                <a16:creationId xmlns:a16="http://schemas.microsoft.com/office/drawing/2014/main" id="{58ADC850-B1ED-1D64-97C0-EECF8CAF8A1F}"/>
               </a:ext>
             </a:extLst>
           </p:cNvPr>
@@ -20839,18 +21551,18 @@
             </a:lvl1pPr>
           </a:lstStyle>
           <a:p>
-            <a:fld id="{35855755-DE42-431D-889F-A55AD89DA05D}" type="slidenum">
-              <a:rPr lang="sv-SE" smtClean="0"/>
+            <a:fld id="{D56D06D4-6DF8-4247-80D0-AFCDC6A01DC2}" type="slidenum">
+              <a:rPr lang="LID4096" smtClean="0"/>
               <a:t>‹#›</a:t>
             </a:fld>
-            <a:endParaRPr lang="sv-SE"/>
+            <a:endParaRPr lang="LID4096"/>
           </a:p>
         </p:txBody>
       </p:sp>
     </p:spTree>
     <p:extLst>
       <p:ext uri="{BB962C8B-B14F-4D97-AF65-F5344CB8AC3E}">
-        <p14:creationId xmlns:p14="http://schemas.microsoft.com/office/powerpoint/2010/main" val="1507322467"/>
+        <p14:creationId xmlns:p14="http://schemas.microsoft.com/office/powerpoint/2010/main" val="3624155340"/>
       </p:ext>
     </p:extLst>
   </p:cSld>
@@ -20867,6 +21579,7 @@
     <p:sldLayoutId id="2147483669" r:id="rId9"/>
     <p:sldLayoutId id="2147483670" r:id="rId10"/>
     <p:sldLayoutId id="2147483671" r:id="rId11"/>
+    <p:sldLayoutId id="2147483672" r:id="rId12"/>
   </p:sldLayoutIdLst>
   <p:txStyles>
     <p:titleStyle>
@@ -21054,7 +21767,7 @@
     </p:bodyStyle>
     <p:otherStyle>
       <a:defPPr>
-        <a:defRPr lang="sv-SE"/>
+        <a:defRPr lang="LID4096"/>
       </a:defPPr>
       <a:lvl1pPr marL="0" algn="l" defTabSz="914400" rtl="0" eaLnBrk="1" latinLnBrk="0" hangingPunct="1">
         <a:defRPr sz="1800" kern="1200">
@@ -26851,6 +27564,78 @@
   <p:cSld>
     <p:spTree>
       <p:nvGrpSpPr>
+        <p:cNvPr id="1" name="">
+          <a:extLst>
+            <a:ext uri="{FF2B5EF4-FFF2-40B4-BE49-F238E27FC236}">
+              <a16:creationId xmlns:a16="http://schemas.microsoft.com/office/drawing/2014/main" id="{DCBF01CC-85B5-8A86-7CCC-00B2B77DC4C6}"/>
+            </a:ext>
+          </a:extLst>
+        </p:cNvPr>
+        <p:cNvGrpSpPr/>
+        <p:nvPr/>
+      </p:nvGrpSpPr>
+      <p:grpSpPr>
+        <a:xfrm>
+          <a:off x="0" y="0"/>
+          <a:ext cx="0" cy="0"/>
+          <a:chOff x="0" y="0"/>
+          <a:chExt cx="0" cy="0"/>
+        </a:xfrm>
+      </p:grpSpPr>
+      <p:pic>
+        <p:nvPicPr>
+          <p:cNvPr id="5" name="Picture 4" descr="A qr code with dots and lines&#10;&#10;Description automatically generated">
+            <a:extLst>
+              <a:ext uri="{FF2B5EF4-FFF2-40B4-BE49-F238E27FC236}">
+                <a16:creationId xmlns:a16="http://schemas.microsoft.com/office/drawing/2014/main" id="{1C97A8DA-9D90-C72F-9C25-A12D71D0F30D}"/>
+              </a:ext>
+            </a:extLst>
+          </p:cNvPr>
+          <p:cNvPicPr>
+            <a:picLocks noChangeAspect="1"/>
+          </p:cNvPicPr>
+          <p:nvPr/>
+        </p:nvPicPr>
+        <p:blipFill>
+          <a:blip r:embed="rId2">
+            <a:extLst>
+              <a:ext uri="{28A0092B-C50C-407E-A947-70E740481C1C}">
+                <a14:useLocalDpi xmlns:a14="http://schemas.microsoft.com/office/drawing/2010/main" val="0"/>
+              </a:ext>
+            </a:extLst>
+          </a:blip>
+          <a:stretch>
+            <a:fillRect/>
+          </a:stretch>
+        </p:blipFill>
+        <p:spPr>
+          <a:xfrm>
+            <a:off x="4234542" y="1567542"/>
+            <a:ext cx="3722915" cy="3722915"/>
+          </a:xfrm>
+          <a:prstGeom prst="rect">
+            <a:avLst/>
+          </a:prstGeom>
+        </p:spPr>
+      </p:pic>
+    </p:spTree>
+    <p:extLst>
+      <p:ext uri="{BB962C8B-B14F-4D97-AF65-F5344CB8AC3E}">
+        <p14:creationId xmlns:p14="http://schemas.microsoft.com/office/powerpoint/2010/main" val="3246104629"/>
+      </p:ext>
+    </p:extLst>
+  </p:cSld>
+  <p:clrMapOvr>
+    <a:masterClrMapping/>
+  </p:clrMapOvr>
+</p:sld>
+</file>
+
+<file path=ppt/slides/slide2.xml><?xml version="1.0" encoding="utf-8"?>
+<p:sld xmlns:a="http://schemas.openxmlformats.org/drawingml/2006/main" xmlns:r="http://schemas.openxmlformats.org/officeDocument/2006/relationships" xmlns:p="http://schemas.openxmlformats.org/presentationml/2006/main">
+  <p:cSld>
+    <p:spTree>
+      <p:nvGrpSpPr>
         <p:cNvPr id="1" name=""/>
         <p:cNvGrpSpPr/>
         <p:nvPr/>
@@ -26863,225 +27648,17 @@
           <a:chExt cx="0" cy="0"/>
         </a:xfrm>
       </p:grpSpPr>
-      <p:sp>
-        <p:nvSpPr>
-          <p:cNvPr id="4" name="textruta 3">
+      <p:pic>
+        <p:nvPicPr>
+          <p:cNvPr id="1026" name="Picture 2">
             <a:extLst>
               <a:ext uri="{FF2B5EF4-FFF2-40B4-BE49-F238E27FC236}">
-                <a16:creationId xmlns:a16="http://schemas.microsoft.com/office/drawing/2014/main" id="{7B6ECFC8-D962-81BC-8CD8-9E0404E25B1B}"/>
-              </a:ext>
-            </a:extLst>
-          </p:cNvPr>
-          <p:cNvSpPr txBox="1"/>
-          <p:nvPr/>
-        </p:nvSpPr>
-        <p:spPr>
-          <a:xfrm>
-            <a:off x="0" y="366420"/>
-            <a:ext cx="12192000" cy="830997"/>
-          </a:xfrm>
-          <a:prstGeom prst="rect">
-            <a:avLst/>
-          </a:prstGeom>
-          <a:noFill/>
-        </p:spPr>
-        <p:txBody>
-          <a:bodyPr wrap="square" rtlCol="0">
-            <a:spAutoFit/>
-          </a:bodyPr>
-          <a:lstStyle/>
-          <a:p>
-            <a:pPr marL="0" marR="0" lvl="0" indent="0" algn="ctr" defTabSz="914400" rtl="0" eaLnBrk="1" fontAlgn="auto" latinLnBrk="0" hangingPunct="1">
-              <a:lnSpc>
-                <a:spcPct val="100000"/>
-              </a:lnSpc>
-              <a:spcBef>
-                <a:spcPts val="0"/>
-              </a:spcBef>
-              <a:spcAft>
-                <a:spcPts val="0"/>
-              </a:spcAft>
-              <a:buClrTx/>
-              <a:buSzTx/>
-              <a:buFontTx/>
-              <a:buNone/>
-              <a:tabLst/>
-              <a:defRPr/>
-            </a:pPr>
-            <a:r>
-              <a:rPr kumimoji="0" lang="sv-SE" sz="4800" b="0" i="0" u="none" strike="noStrike" kern="1200" cap="none" spc="0" normalizeH="0" baseline="0" noProof="0" dirty="0">
-                <a:ln>
-                  <a:noFill/>
-                </a:ln>
-                <a:solidFill>
-                  <a:srgbClr val="4472C4">
-                    <a:lumMod val="75000"/>
-                  </a:srgbClr>
-                </a:solidFill>
-                <a:effectLst/>
-                <a:uLnTx/>
-                <a:uFillTx/>
-                <a:latin typeface="Calibri" panose="020F0502020204030204"/>
-                <a:ea typeface="+mn-ea"/>
-                <a:cs typeface="+mn-cs"/>
-              </a:rPr>
-              <a:t>Data </a:t>
-            </a:r>
-            <a:r>
-              <a:rPr kumimoji="0" lang="sv-SE" sz="4800" b="0" i="0" u="none" strike="noStrike" kern="1200" cap="none" spc="0" normalizeH="0" baseline="0" noProof="0" dirty="0" err="1">
-                <a:ln>
-                  <a:noFill/>
-                </a:ln>
-                <a:solidFill>
-                  <a:srgbClr val="4472C4">
-                    <a:lumMod val="75000"/>
-                  </a:srgbClr>
-                </a:solidFill>
-                <a:effectLst/>
-                <a:uLnTx/>
-                <a:uFillTx/>
-                <a:latin typeface="Calibri" panose="020F0502020204030204"/>
-                <a:ea typeface="+mn-ea"/>
-                <a:cs typeface="+mn-cs"/>
-              </a:rPr>
-              <a:t>Saturday</a:t>
-            </a:r>
-            <a:r>
-              <a:rPr kumimoji="0" lang="sv-SE" sz="4800" b="0" i="0" u="none" strike="noStrike" kern="1200" cap="none" spc="0" normalizeH="0" baseline="0" noProof="0" dirty="0">
-                <a:ln>
-                  <a:noFill/>
-                </a:ln>
-                <a:solidFill>
-                  <a:srgbClr val="4472C4">
-                    <a:lumMod val="75000"/>
-                  </a:srgbClr>
-                </a:solidFill>
-                <a:effectLst/>
-                <a:uLnTx/>
-                <a:uFillTx/>
-                <a:latin typeface="Calibri" panose="020F0502020204030204"/>
-                <a:ea typeface="+mn-ea"/>
-                <a:cs typeface="+mn-cs"/>
-              </a:rPr>
-              <a:t> Gothenburg 2024</a:t>
-            </a:r>
-          </a:p>
-        </p:txBody>
-      </p:sp>
-      <p:sp>
-        <p:nvSpPr>
-          <p:cNvPr id="5" name="textruta 4">
-            <a:extLst>
-              <a:ext uri="{FF2B5EF4-FFF2-40B4-BE49-F238E27FC236}">
-                <a16:creationId xmlns:a16="http://schemas.microsoft.com/office/drawing/2014/main" id="{4DEFE1A2-D309-13ED-8FEF-45BF7CFE4747}"/>
-              </a:ext>
-            </a:extLst>
-          </p:cNvPr>
-          <p:cNvSpPr txBox="1"/>
-          <p:nvPr/>
-        </p:nvSpPr>
-        <p:spPr>
-          <a:xfrm>
-            <a:off x="0" y="1197417"/>
-            <a:ext cx="12192000" cy="646331"/>
-          </a:xfrm>
-          <a:prstGeom prst="rect">
-            <a:avLst/>
-          </a:prstGeom>
-          <a:noFill/>
-        </p:spPr>
-        <p:txBody>
-          <a:bodyPr wrap="square" rtlCol="0">
-            <a:spAutoFit/>
-          </a:bodyPr>
-          <a:lstStyle/>
-          <a:p>
-            <a:pPr marL="0" marR="0" lvl="0" indent="0" algn="ctr" defTabSz="914400" rtl="0" eaLnBrk="1" fontAlgn="auto" latinLnBrk="0" hangingPunct="1">
-              <a:lnSpc>
-                <a:spcPct val="100000"/>
-              </a:lnSpc>
-              <a:spcBef>
-                <a:spcPts val="0"/>
-              </a:spcBef>
-              <a:spcAft>
-                <a:spcPts val="0"/>
-              </a:spcAft>
-              <a:buClrTx/>
-              <a:buSzTx/>
-              <a:buFontTx/>
-              <a:buNone/>
-              <a:tabLst/>
-              <a:defRPr/>
-            </a:pPr>
-            <a:r>
-              <a:rPr kumimoji="0" lang="sv-SE" sz="3600" b="0" i="0" u="none" strike="noStrike" kern="1200" cap="none" spc="0" normalizeH="0" baseline="0" noProof="0" dirty="0">
-                <a:ln>
-                  <a:noFill/>
-                </a:ln>
-                <a:solidFill>
-                  <a:srgbClr val="4472C4">
-                    <a:lumMod val="75000"/>
-                  </a:srgbClr>
-                </a:solidFill>
-                <a:effectLst/>
-                <a:uLnTx/>
-                <a:uFillTx/>
-                <a:latin typeface="Calibri" panose="020F0502020204030204"/>
-                <a:ea typeface="+mn-ea"/>
-                <a:cs typeface="+mn-cs"/>
-              </a:rPr>
-              <a:t>Sponsors</a:t>
-            </a:r>
-          </a:p>
-        </p:txBody>
-      </p:sp>
-      <p:pic>
-        <p:nvPicPr>
-          <p:cNvPr id="3" name="Bildobjekt 2">
-            <a:extLst>
-              <a:ext uri="{FF2B5EF4-FFF2-40B4-BE49-F238E27FC236}">
-                <a16:creationId xmlns:a16="http://schemas.microsoft.com/office/drawing/2014/main" id="{25D87688-2C1D-CC29-07BE-0E9F33D77686}"/>
+                <a16:creationId xmlns:a16="http://schemas.microsoft.com/office/drawing/2014/main" id="{9E866490-0D4D-160B-E473-1E0652A296BA}"/>
               </a:ext>
             </a:extLst>
           </p:cNvPr>
           <p:cNvPicPr>
-            <a:picLocks noChangeAspect="1"/>
-          </p:cNvPicPr>
-          <p:nvPr/>
-        </p:nvPicPr>
-        <p:blipFill>
-          <a:blip r:embed="rId2">
-            <a:extLst>
-              <a:ext uri="{28A0092B-C50C-407E-A947-70E740481C1C}">
-                <a14:useLocalDpi xmlns:a14="http://schemas.microsoft.com/office/drawing/2010/main" val="0"/>
-              </a:ext>
-            </a:extLst>
-          </a:blip>
-          <a:stretch>
-            <a:fillRect/>
-          </a:stretch>
-        </p:blipFill>
-        <p:spPr>
-          <a:xfrm>
-            <a:off x="5193271" y="2011777"/>
-            <a:ext cx="2847038" cy="2447453"/>
-          </a:xfrm>
-          <a:prstGeom prst="rect">
-            <a:avLst/>
-          </a:prstGeom>
-        </p:spPr>
-      </p:pic>
-      <p:pic>
-        <p:nvPicPr>
-          <p:cNvPr id="7" name="Bildobjekt 6">
-            <a:extLst>
-              <a:ext uri="{FF2B5EF4-FFF2-40B4-BE49-F238E27FC236}">
-                <a16:creationId xmlns:a16="http://schemas.microsoft.com/office/drawing/2014/main" id="{66C0E78F-5E57-44E8-1A2D-E435DDB36C1E}"/>
-              </a:ext>
-            </a:extLst>
-          </p:cNvPr>
-          <p:cNvPicPr>
-            <a:picLocks noChangeAspect="1"/>
+            <a:picLocks noChangeAspect="1" noChangeArrowheads="1"/>
           </p:cNvPicPr>
           <p:nvPr/>
         </p:nvPicPr>
@@ -27093,26 +27670,356 @@
               </a:ext>
             </a:extLst>
           </a:blip>
+          <a:srcRect/>
+          <a:stretch/>
+        </p:blipFill>
+        <p:spPr bwMode="auto">
+          <a:xfrm>
+            <a:off x="7025094" y="4896992"/>
+            <a:ext cx="1814977" cy="939391"/>
+          </a:xfrm>
+          <a:prstGeom prst="rect">
+            <a:avLst/>
+          </a:prstGeom>
+          <a:noFill/>
+          <a:extLst>
+            <a:ext uri="{909E8E84-426E-40DD-AFC4-6F175D3DCCD1}">
+              <a14:hiddenFill xmlns:a14="http://schemas.microsoft.com/office/drawing/2010/main">
+                <a:solidFill>
+                  <a:srgbClr val="FFFFFF"/>
+                </a:solidFill>
+              </a14:hiddenFill>
+            </a:ext>
+          </a:extLst>
+        </p:spPr>
+      </p:pic>
+      <p:pic>
+        <p:nvPicPr>
+          <p:cNvPr id="1032" name="Picture 8">
+            <a:extLst>
+              <a:ext uri="{FF2B5EF4-FFF2-40B4-BE49-F238E27FC236}">
+                <a16:creationId xmlns:a16="http://schemas.microsoft.com/office/drawing/2014/main" id="{36600D68-5616-24D9-48A5-5F217D335767}"/>
+              </a:ext>
+            </a:extLst>
+          </p:cNvPr>
+          <p:cNvPicPr>
+            <a:picLocks noChangeAspect="1" noChangeArrowheads="1"/>
+          </p:cNvPicPr>
+          <p:nvPr/>
+        </p:nvPicPr>
+        <p:blipFill>
+          <a:blip r:embed="rId4">
+            <a:extLst>
+              <a:ext uri="{28A0092B-C50C-407E-A947-70E740481C1C}">
+                <a14:useLocalDpi xmlns:a14="http://schemas.microsoft.com/office/drawing/2010/main" val="0"/>
+              </a:ext>
+            </a:extLst>
+          </a:blip>
+          <a:srcRect/>
+          <a:stretch/>
+        </p:blipFill>
+        <p:spPr bwMode="auto">
+          <a:xfrm>
+            <a:off x="383499" y="1055248"/>
+            <a:ext cx="1778000" cy="751525"/>
+          </a:xfrm>
+          <a:prstGeom prst="rect">
+            <a:avLst/>
+          </a:prstGeom>
+          <a:noFill/>
+          <a:extLst>
+            <a:ext uri="{909E8E84-426E-40DD-AFC4-6F175D3DCCD1}">
+              <a14:hiddenFill xmlns:a14="http://schemas.microsoft.com/office/drawing/2010/main">
+                <a:solidFill>
+                  <a:srgbClr val="FFFFFF"/>
+                </a:solidFill>
+              </a14:hiddenFill>
+            </a:ext>
+          </a:extLst>
+        </p:spPr>
+      </p:pic>
+      <p:pic>
+        <p:nvPicPr>
+          <p:cNvPr id="1036" name="Picture 12">
+            <a:extLst>
+              <a:ext uri="{FF2B5EF4-FFF2-40B4-BE49-F238E27FC236}">
+                <a16:creationId xmlns:a16="http://schemas.microsoft.com/office/drawing/2014/main" id="{20441374-7782-0381-160E-6F0AB5077C62}"/>
+              </a:ext>
+            </a:extLst>
+          </p:cNvPr>
+          <p:cNvPicPr>
+            <a:picLocks noChangeAspect="1" noChangeArrowheads="1"/>
+          </p:cNvPicPr>
+          <p:nvPr/>
+        </p:nvPicPr>
+        <p:blipFill>
+          <a:blip r:embed="rId5">
+            <a:extLst>
+              <a:ext uri="{28A0092B-C50C-407E-A947-70E740481C1C}">
+                <a14:useLocalDpi xmlns:a14="http://schemas.microsoft.com/office/drawing/2010/main" val="0"/>
+              </a:ext>
+            </a:extLst>
+          </a:blip>
+          <a:srcRect/>
+          <a:stretch/>
+        </p:blipFill>
+        <p:spPr bwMode="auto">
+          <a:xfrm>
+            <a:off x="9673352" y="4054503"/>
+            <a:ext cx="1866900" cy="668000"/>
+          </a:xfrm>
+          <a:prstGeom prst="rect">
+            <a:avLst/>
+          </a:prstGeom>
+          <a:noFill/>
+          <a:extLst>
+            <a:ext uri="{909E8E84-426E-40DD-AFC4-6F175D3DCCD1}">
+              <a14:hiddenFill xmlns:a14="http://schemas.microsoft.com/office/drawing/2010/main">
+                <a:solidFill>
+                  <a:srgbClr val="FFFFFF"/>
+                </a:solidFill>
+              </a14:hiddenFill>
+            </a:ext>
+          </a:extLst>
+        </p:spPr>
+      </p:pic>
+      <p:pic>
+        <p:nvPicPr>
+          <p:cNvPr id="1042" name="Picture 18">
+            <a:extLst>
+              <a:ext uri="{FF2B5EF4-FFF2-40B4-BE49-F238E27FC236}">
+                <a16:creationId xmlns:a16="http://schemas.microsoft.com/office/drawing/2014/main" id="{CD81E799-97E9-5C57-B131-FCC56FA21E07}"/>
+              </a:ext>
+            </a:extLst>
+          </p:cNvPr>
+          <p:cNvPicPr>
+            <a:picLocks noChangeAspect="1" noChangeArrowheads="1"/>
+          </p:cNvPicPr>
+          <p:nvPr/>
+        </p:nvPicPr>
+        <p:blipFill>
+          <a:blip r:embed="rId6">
+            <a:extLst>
+              <a:ext uri="{28A0092B-C50C-407E-A947-70E740481C1C}">
+                <a14:useLocalDpi xmlns:a14="http://schemas.microsoft.com/office/drawing/2010/main" val="0"/>
+              </a:ext>
+            </a:extLst>
+          </a:blip>
+          <a:srcRect/>
+          <a:stretch/>
+        </p:blipFill>
+        <p:spPr bwMode="auto">
+          <a:xfrm>
+            <a:off x="9758795" y="1402101"/>
+            <a:ext cx="1696014" cy="295892"/>
+          </a:xfrm>
+          <a:prstGeom prst="rect">
+            <a:avLst/>
+          </a:prstGeom>
+          <a:noFill/>
+          <a:extLst>
+            <a:ext uri="{909E8E84-426E-40DD-AFC4-6F175D3DCCD1}">
+              <a14:hiddenFill xmlns:a14="http://schemas.microsoft.com/office/drawing/2010/main">
+                <a:solidFill>
+                  <a:srgbClr val="FFFFFF"/>
+                </a:solidFill>
+              </a14:hiddenFill>
+            </a:ext>
+          </a:extLst>
+        </p:spPr>
+      </p:pic>
+      <p:pic>
+        <p:nvPicPr>
+          <p:cNvPr id="1044" name="Picture 20">
+            <a:extLst>
+              <a:ext uri="{FF2B5EF4-FFF2-40B4-BE49-F238E27FC236}">
+                <a16:creationId xmlns:a16="http://schemas.microsoft.com/office/drawing/2014/main" id="{DF5B1D89-1A26-A465-B63E-CEB789753719}"/>
+              </a:ext>
+            </a:extLst>
+          </p:cNvPr>
+          <p:cNvPicPr>
+            <a:picLocks noChangeAspect="1" noChangeArrowheads="1"/>
+          </p:cNvPicPr>
+          <p:nvPr/>
+        </p:nvPicPr>
+        <p:blipFill>
+          <a:blip r:embed="rId7">
+            <a:extLst>
+              <a:ext uri="{28A0092B-C50C-407E-A947-70E740481C1C}">
+                <a14:useLocalDpi xmlns:a14="http://schemas.microsoft.com/office/drawing/2010/main" val="0"/>
+              </a:ext>
+            </a:extLst>
+          </a:blip>
+          <a:srcRect/>
+          <a:stretch/>
+        </p:blipFill>
+        <p:spPr bwMode="auto">
+          <a:xfrm>
+            <a:off x="804631" y="4022126"/>
+            <a:ext cx="1230459" cy="636859"/>
+          </a:xfrm>
+          <a:prstGeom prst="rect">
+            <a:avLst/>
+          </a:prstGeom>
+          <a:noFill/>
+          <a:extLst>
+            <a:ext uri="{909E8E84-426E-40DD-AFC4-6F175D3DCCD1}">
+              <a14:hiddenFill xmlns:a14="http://schemas.microsoft.com/office/drawing/2010/main">
+                <a:solidFill>
+                  <a:srgbClr val="FFFFFF"/>
+                </a:solidFill>
+              </a14:hiddenFill>
+            </a:ext>
+          </a:extLst>
+        </p:spPr>
+      </p:pic>
+      <p:pic>
+        <p:nvPicPr>
+          <p:cNvPr id="1056" name="Picture 32">
+            <a:extLst>
+              <a:ext uri="{FF2B5EF4-FFF2-40B4-BE49-F238E27FC236}">
+                <a16:creationId xmlns:a16="http://schemas.microsoft.com/office/drawing/2014/main" id="{BF5F59A3-63CF-9567-9348-97F3A6BA5A1A}"/>
+              </a:ext>
+            </a:extLst>
+          </p:cNvPr>
+          <p:cNvPicPr>
+            <a:picLocks noChangeAspect="1" noChangeArrowheads="1"/>
+          </p:cNvPicPr>
+          <p:nvPr/>
+        </p:nvPicPr>
+        <p:blipFill>
+          <a:blip r:embed="rId8">
+            <a:extLst>
+              <a:ext uri="{28A0092B-C50C-407E-A947-70E740481C1C}">
+                <a14:useLocalDpi xmlns:a14="http://schemas.microsoft.com/office/drawing/2010/main" val="0"/>
+              </a:ext>
+            </a:extLst>
+          </a:blip>
+          <a:srcRect/>
           <a:stretch>
             <a:fillRect/>
           </a:stretch>
         </p:blipFill>
-        <p:spPr>
+        <p:spPr bwMode="auto">
           <a:xfrm>
-            <a:off x="9010389" y="3107484"/>
-            <a:ext cx="1464479" cy="1642407"/>
+            <a:off x="3891876" y="3069205"/>
+            <a:ext cx="1262560" cy="653474"/>
           </a:xfrm>
           <a:prstGeom prst="rect">
             <a:avLst/>
           </a:prstGeom>
+          <a:noFill/>
+          <a:extLst>
+            <a:ext uri="{909E8E84-426E-40DD-AFC4-6F175D3DCCD1}">
+              <a14:hiddenFill xmlns:a14="http://schemas.microsoft.com/office/drawing/2010/main">
+                <a:solidFill>
+                  <a:srgbClr val="FFFFFF"/>
+                </a:solidFill>
+              </a14:hiddenFill>
+            </a:ext>
+          </a:extLst>
+        </p:spPr>
+      </p:pic>
+      <p:pic>
+        <p:nvPicPr>
+          <p:cNvPr id="1058" name="Picture 34">
+            <a:extLst>
+              <a:ext uri="{FF2B5EF4-FFF2-40B4-BE49-F238E27FC236}">
+                <a16:creationId xmlns:a16="http://schemas.microsoft.com/office/drawing/2014/main" id="{1754C16A-2E1E-2B7E-1497-2A34ADDC3369}"/>
+              </a:ext>
+            </a:extLst>
+          </p:cNvPr>
+          <p:cNvPicPr>
+            <a:picLocks noChangeAspect="1" noChangeArrowheads="1"/>
+          </p:cNvPicPr>
+          <p:nvPr/>
+        </p:nvPicPr>
+        <p:blipFill>
+          <a:blip r:embed="rId9">
+            <a:extLst>
+              <a:ext uri="{28A0092B-C50C-407E-A947-70E740481C1C}">
+                <a14:useLocalDpi xmlns:a14="http://schemas.microsoft.com/office/drawing/2010/main" val="0"/>
+              </a:ext>
+            </a:extLst>
+          </a:blip>
+          <a:srcRect/>
+          <a:stretch>
+            <a:fillRect/>
+          </a:stretch>
+        </p:blipFill>
+        <p:spPr bwMode="auto">
+          <a:xfrm>
+            <a:off x="3891876" y="2026139"/>
+            <a:ext cx="1262560" cy="653474"/>
+          </a:xfrm>
+          <a:prstGeom prst="rect">
+            <a:avLst/>
+          </a:prstGeom>
+          <a:noFill/>
+          <a:extLst>
+            <a:ext uri="{909E8E84-426E-40DD-AFC4-6F175D3DCCD1}">
+              <a14:hiddenFill xmlns:a14="http://schemas.microsoft.com/office/drawing/2010/main">
+                <a:solidFill>
+                  <a:srgbClr val="FFFFFF"/>
+                </a:solidFill>
+              </a14:hiddenFill>
+            </a:ext>
+          </a:extLst>
+        </p:spPr>
+      </p:pic>
+      <p:pic>
+        <p:nvPicPr>
+          <p:cNvPr id="1066" name="Picture 42">
+            <a:extLst>
+              <a:ext uri="{FF2B5EF4-FFF2-40B4-BE49-F238E27FC236}">
+                <a16:creationId xmlns:a16="http://schemas.microsoft.com/office/drawing/2014/main" id="{239EA178-22AC-E7B3-3511-0240F490EFA5}"/>
+              </a:ext>
+            </a:extLst>
+          </p:cNvPr>
+          <p:cNvPicPr>
+            <a:picLocks noChangeAspect="1" noChangeArrowheads="1"/>
+          </p:cNvPicPr>
+          <p:nvPr/>
+        </p:nvPicPr>
+        <p:blipFill>
+          <a:blip r:embed="rId10">
+            <a:extLst>
+              <a:ext uri="{28A0092B-C50C-407E-A947-70E740481C1C}">
+                <a14:useLocalDpi xmlns:a14="http://schemas.microsoft.com/office/drawing/2010/main" val="0"/>
+              </a:ext>
+            </a:extLst>
+          </a:blip>
+          <a:srcRect/>
+          <a:stretch>
+            <a:fillRect/>
+          </a:stretch>
+        </p:blipFill>
+        <p:spPr bwMode="auto">
+          <a:xfrm>
+            <a:off x="2161499" y="5785723"/>
+            <a:ext cx="1929251" cy="998538"/>
+          </a:xfrm>
+          <a:prstGeom prst="rect">
+            <a:avLst/>
+          </a:prstGeom>
+          <a:noFill/>
+          <a:extLst>
+            <a:ext uri="{909E8E84-426E-40DD-AFC4-6F175D3DCCD1}">
+              <a14:hiddenFill xmlns:a14="http://schemas.microsoft.com/office/drawing/2010/main">
+                <a:solidFill>
+                  <a:srgbClr val="FFFFFF"/>
+                </a:solidFill>
+              </a14:hiddenFill>
+            </a:ext>
+          </a:extLst>
         </p:spPr>
       </p:pic>
       <p:sp>
         <p:nvSpPr>
-          <p:cNvPr id="14" name="textruta 13">
+          <p:cNvPr id="3" name="TextBox 2">
             <a:extLst>
               <a:ext uri="{FF2B5EF4-FFF2-40B4-BE49-F238E27FC236}">
-                <a16:creationId xmlns:a16="http://schemas.microsoft.com/office/drawing/2014/main" id="{43BFEBBE-BC81-EE8B-9C5A-85333ED88EC4}"/>
+                <a16:creationId xmlns:a16="http://schemas.microsoft.com/office/drawing/2014/main" id="{A92C13BF-25E2-7F07-3995-A95D902A38C6}"/>
               </a:ext>
             </a:extLst>
           </p:cNvPr>
@@ -27121,8 +28028,8 @@
         </p:nvSpPr>
         <p:spPr>
           <a:xfrm>
-            <a:off x="5458464" y="3793671"/>
-            <a:ext cx="2400978" cy="369332"/>
+            <a:off x="308211" y="72078"/>
+            <a:ext cx="8570841" cy="923330"/>
           </a:xfrm>
           <a:prstGeom prst="rect">
             <a:avLst/>
@@ -27130,7 +28037,7 @@
           <a:noFill/>
         </p:spPr>
         <p:txBody>
-          <a:bodyPr wrap="none" rtlCol="0">
+          <a:bodyPr wrap="square">
             <a:spAutoFit/>
           </a:bodyPr>
           <a:lstStyle/>
@@ -27153,7 +28060,7 @@
               <a:defRPr/>
             </a:pPr>
             <a:r>
-              <a:rPr kumimoji="0" lang="sv-SE" sz="1800" b="0" i="0" u="none" strike="noStrike" kern="1200" cap="none" spc="0" normalizeH="0" baseline="0" noProof="0" dirty="0">
+              <a:rPr kumimoji="0" lang="nl-BE" sz="5400" b="1" i="0" u="none" strike="noStrike" kern="1200" cap="none" spc="0" normalizeH="0" baseline="0" noProof="0" dirty="0">
                 <a:ln>
                   <a:noFill/>
                 </a:ln>
@@ -27163,14 +28070,14 @@
                 <a:effectLst/>
                 <a:uLnTx/>
                 <a:uFillTx/>
-                <a:latin typeface="Calibri" panose="020F0502020204030204"/>
+                <a:latin typeface="Work Sans" pitchFamily="2" charset="0"/>
                 <a:ea typeface="+mn-ea"/>
                 <a:cs typeface="+mn-cs"/>
               </a:rPr>
-              <a:t>The </a:t>
+              <a:t>Thank you, partners </a:t>
             </a:r>
             <a:r>
-              <a:rPr kumimoji="0" lang="sv-SE" sz="1800" b="0" i="0" u="none" strike="noStrike" kern="1200" cap="none" spc="0" normalizeH="0" baseline="0" noProof="0" dirty="0" err="1">
+              <a:rPr kumimoji="0" lang="en-US" sz="5400" b="1" i="0" u="none" strike="noStrike" kern="1200" cap="none" spc="0" normalizeH="0" baseline="0" noProof="0" dirty="0">
                 <a:ln>
                   <a:noFill/>
                 </a:ln>
@@ -27180,38 +28087,250 @@
                 <a:effectLst/>
                 <a:uLnTx/>
                 <a:uFillTx/>
-                <a:latin typeface="Calibri" panose="020F0502020204030204"/>
+                <a:latin typeface="Work Sans" pitchFamily="2" charset="0"/>
                 <a:ea typeface="+mn-ea"/>
                 <a:cs typeface="+mn-cs"/>
               </a:rPr>
-              <a:t>after</a:t>
+              <a:t>💖</a:t>
             </a:r>
-            <a:r>
-              <a:rPr kumimoji="0" lang="sv-SE" sz="1800" b="0" i="0" u="none" strike="noStrike" kern="1200" cap="none" spc="0" normalizeH="0" baseline="0" noProof="0" dirty="0">
-                <a:ln>
-                  <a:noFill/>
-                </a:ln>
-                <a:solidFill>
-                  <a:prstClr val="black"/>
-                </a:solidFill>
-                <a:effectLst/>
-                <a:uLnTx/>
-                <a:uFillTx/>
-                <a:latin typeface="Calibri" panose="020F0502020204030204"/>
-                <a:ea typeface="+mn-ea"/>
-                <a:cs typeface="+mn-cs"/>
-              </a:rPr>
-              <a:t>-party sponsor</a:t>
-            </a:r>
+            <a:endParaRPr kumimoji="0" lang="LID4096" sz="5400" b="1" i="0" u="none" strike="noStrike" kern="1200" cap="none" spc="0" normalizeH="0" baseline="0" noProof="0" dirty="0">
+              <a:ln>
+                <a:noFill/>
+              </a:ln>
+              <a:solidFill>
+                <a:prstClr val="black"/>
+              </a:solidFill>
+              <a:effectLst/>
+              <a:uLnTx/>
+              <a:uFillTx/>
+              <a:latin typeface="Work Sans" pitchFamily="2" charset="0"/>
+              <a:ea typeface="+mn-ea"/>
+              <a:cs typeface="+mn-cs"/>
+            </a:endParaRPr>
           </a:p>
         </p:txBody>
       </p:sp>
       <p:pic>
         <p:nvPicPr>
-          <p:cNvPr id="11" name="Bildobjekt 10">
+          <p:cNvPr id="4" name="Picture 18">
             <a:extLst>
               <a:ext uri="{FF2B5EF4-FFF2-40B4-BE49-F238E27FC236}">
-                <a16:creationId xmlns:a16="http://schemas.microsoft.com/office/drawing/2014/main" id="{63CC983B-87A9-E1A1-DCB8-D2EC93CAAC27}"/>
+                <a16:creationId xmlns:a16="http://schemas.microsoft.com/office/drawing/2014/main" id="{B6530801-1CC0-4B1B-94DA-5DB46863C42C}"/>
+              </a:ext>
+            </a:extLst>
+          </p:cNvPr>
+          <p:cNvPicPr>
+            <a:picLocks noChangeAspect="1" noChangeArrowheads="1"/>
+          </p:cNvPicPr>
+          <p:nvPr/>
+        </p:nvPicPr>
+        <p:blipFill>
+          <a:blip r:embed="rId11">
+            <a:extLst>
+              <a:ext uri="{28A0092B-C50C-407E-A947-70E740481C1C}">
+                <a14:useLocalDpi xmlns:a14="http://schemas.microsoft.com/office/drawing/2010/main" val="0"/>
+              </a:ext>
+            </a:extLst>
+          </a:blip>
+          <a:srcRect/>
+          <a:stretch/>
+        </p:blipFill>
+        <p:spPr bwMode="auto">
+          <a:xfrm>
+            <a:off x="7279441" y="4130930"/>
+            <a:ext cx="1225663" cy="456457"/>
+          </a:xfrm>
+          <a:prstGeom prst="rect">
+            <a:avLst/>
+          </a:prstGeom>
+          <a:noFill/>
+          <a:extLst>
+            <a:ext uri="{909E8E84-426E-40DD-AFC4-6F175D3DCCD1}">
+              <a14:hiddenFill xmlns:a14="http://schemas.microsoft.com/office/drawing/2010/main">
+                <a:solidFill>
+                  <a:srgbClr val="FFFFFF"/>
+                </a:solidFill>
+              </a14:hiddenFill>
+            </a:ext>
+          </a:extLst>
+        </p:spPr>
+      </p:pic>
+      <p:pic>
+        <p:nvPicPr>
+          <p:cNvPr id="9" name="Picture 16">
+            <a:extLst>
+              <a:ext uri="{FF2B5EF4-FFF2-40B4-BE49-F238E27FC236}">
+                <a16:creationId xmlns:a16="http://schemas.microsoft.com/office/drawing/2014/main" id="{6B04451F-DB01-5042-012E-0FDDE54F33E1}"/>
+              </a:ext>
+            </a:extLst>
+          </p:cNvPr>
+          <p:cNvPicPr>
+            <a:picLocks noChangeAspect="1" noChangeArrowheads="1"/>
+          </p:cNvPicPr>
+          <p:nvPr/>
+        </p:nvPicPr>
+        <p:blipFill>
+          <a:blip r:embed="rId12">
+            <a:extLst>
+              <a:ext uri="{28A0092B-C50C-407E-A947-70E740481C1C}">
+                <a14:useLocalDpi xmlns:a14="http://schemas.microsoft.com/office/drawing/2010/main" val="0"/>
+              </a:ext>
+            </a:extLst>
+          </a:blip>
+          <a:srcRect/>
+          <a:stretch/>
+        </p:blipFill>
+        <p:spPr bwMode="auto">
+          <a:xfrm>
+            <a:off x="3670582" y="1335986"/>
+            <a:ext cx="1605611" cy="362007"/>
+          </a:xfrm>
+          <a:prstGeom prst="rect">
+            <a:avLst/>
+          </a:prstGeom>
+          <a:noFill/>
+          <a:extLst>
+            <a:ext uri="{909E8E84-426E-40DD-AFC4-6F175D3DCCD1}">
+              <a14:hiddenFill xmlns:a14="http://schemas.microsoft.com/office/drawing/2010/main">
+                <a:solidFill>
+                  <a:srgbClr val="FFFFFF"/>
+                </a:solidFill>
+              </a14:hiddenFill>
+            </a:ext>
+          </a:extLst>
+        </p:spPr>
+      </p:pic>
+      <p:pic>
+        <p:nvPicPr>
+          <p:cNvPr id="10" name="Picture 18">
+            <a:extLst>
+              <a:ext uri="{FF2B5EF4-FFF2-40B4-BE49-F238E27FC236}">
+                <a16:creationId xmlns:a16="http://schemas.microsoft.com/office/drawing/2014/main" id="{4652D4E1-7513-2A7E-35EA-F12397AC326A}"/>
+              </a:ext>
+            </a:extLst>
+          </p:cNvPr>
+          <p:cNvPicPr>
+            <a:picLocks noChangeAspect="1" noChangeArrowheads="1"/>
+          </p:cNvPicPr>
+          <p:nvPr/>
+        </p:nvPicPr>
+        <p:blipFill>
+          <a:blip r:embed="rId13">
+            <a:extLst>
+              <a:ext uri="{28A0092B-C50C-407E-A947-70E740481C1C}">
+                <a14:useLocalDpi xmlns:a14="http://schemas.microsoft.com/office/drawing/2010/main" val="0"/>
+              </a:ext>
+            </a:extLst>
+          </a:blip>
+          <a:srcRect/>
+          <a:stretch/>
+        </p:blipFill>
+        <p:spPr bwMode="auto">
+          <a:xfrm>
+            <a:off x="222505" y="3167602"/>
+            <a:ext cx="2183316" cy="450967"/>
+          </a:xfrm>
+          <a:prstGeom prst="rect">
+            <a:avLst/>
+          </a:prstGeom>
+          <a:noFill/>
+          <a:extLst>
+            <a:ext uri="{909E8E84-426E-40DD-AFC4-6F175D3DCCD1}">
+              <a14:hiddenFill xmlns:a14="http://schemas.microsoft.com/office/drawing/2010/main">
+                <a:solidFill>
+                  <a:srgbClr val="FFFFFF"/>
+                </a:solidFill>
+              </a14:hiddenFill>
+            </a:ext>
+          </a:extLst>
+        </p:spPr>
+      </p:pic>
+      <p:pic>
+        <p:nvPicPr>
+          <p:cNvPr id="11" name="Picture 20">
+            <a:extLst>
+              <a:ext uri="{FF2B5EF4-FFF2-40B4-BE49-F238E27FC236}">
+                <a16:creationId xmlns:a16="http://schemas.microsoft.com/office/drawing/2014/main" id="{CA3FA7CB-71EA-EE1F-A6BD-79521544FF92}"/>
+              </a:ext>
+            </a:extLst>
+          </p:cNvPr>
+          <p:cNvPicPr>
+            <a:picLocks noChangeAspect="1" noChangeArrowheads="1"/>
+          </p:cNvPicPr>
+          <p:nvPr/>
+        </p:nvPicPr>
+        <p:blipFill>
+          <a:blip r:embed="rId14">
+            <a:extLst>
+              <a:ext uri="{28A0092B-C50C-407E-A947-70E740481C1C}">
+                <a14:useLocalDpi xmlns:a14="http://schemas.microsoft.com/office/drawing/2010/main" val="0"/>
+              </a:ext>
+            </a:extLst>
+          </a:blip>
+          <a:srcRect/>
+          <a:stretch/>
+        </p:blipFill>
+        <p:spPr bwMode="auto">
+          <a:xfrm>
+            <a:off x="10052435" y="3182778"/>
+            <a:ext cx="1351835" cy="355233"/>
+          </a:xfrm>
+          <a:prstGeom prst="rect">
+            <a:avLst/>
+          </a:prstGeom>
+          <a:noFill/>
+          <a:extLst>
+            <a:ext uri="{909E8E84-426E-40DD-AFC4-6F175D3DCCD1}">
+              <a14:hiddenFill xmlns:a14="http://schemas.microsoft.com/office/drawing/2010/main">
+                <a:solidFill>
+                  <a:srgbClr val="FFFFFF"/>
+                </a:solidFill>
+              </a14:hiddenFill>
+            </a:ext>
+          </a:extLst>
+        </p:spPr>
+      </p:pic>
+      <p:pic>
+        <p:nvPicPr>
+          <p:cNvPr id="12" name="Picture 11">
+            <a:extLst>
+              <a:ext uri="{FF2B5EF4-FFF2-40B4-BE49-F238E27FC236}">
+                <a16:creationId xmlns:a16="http://schemas.microsoft.com/office/drawing/2014/main" id="{C54C4797-07FC-102B-CF70-B58537D8F708}"/>
+              </a:ext>
+            </a:extLst>
+          </p:cNvPr>
+          <p:cNvPicPr>
+            <a:picLocks noChangeAspect="1"/>
+          </p:cNvPicPr>
+          <p:nvPr/>
+        </p:nvPicPr>
+        <p:blipFill rotWithShape="1">
+          <a:blip r:embed="rId15">
+            <a:extLst>
+              <a:ext uri="{28A0092B-C50C-407E-A947-70E740481C1C}">
+                <a14:useLocalDpi xmlns:a14="http://schemas.microsoft.com/office/drawing/2010/main" val="0"/>
+              </a:ext>
+            </a:extLst>
+          </a:blip>
+          <a:srcRect t="26626" b="31998"/>
+          <a:stretch/>
+        </p:blipFill>
+        <p:spPr>
+          <a:xfrm>
+            <a:off x="6984580" y="2114992"/>
+            <a:ext cx="2032368" cy="560681"/>
+          </a:xfrm>
+          <a:prstGeom prst="rect">
+            <a:avLst/>
+          </a:prstGeom>
+        </p:spPr>
+      </p:pic>
+      <p:pic>
+        <p:nvPicPr>
+          <p:cNvPr id="17" name="Picture 16" descr="A blue and white logo&#10;&#10;Description automatically generated">
+            <a:extLst>
+              <a:ext uri="{FF2B5EF4-FFF2-40B4-BE49-F238E27FC236}">
+                <a16:creationId xmlns:a16="http://schemas.microsoft.com/office/drawing/2014/main" id="{38B87471-39BA-0D13-9715-5AE03F8887F3}"/>
               </a:ext>
             </a:extLst>
           </p:cNvPr>
@@ -27221,7 +28340,7 @@
           <p:nvPr/>
         </p:nvPicPr>
         <p:blipFill>
-          <a:blip r:embed="rId4">
+          <a:blip r:embed="rId16">
             <a:extLst>
               <a:ext uri="{28A0092B-C50C-407E-A947-70E740481C1C}">
                 <a14:useLocalDpi xmlns:a14="http://schemas.microsoft.com/office/drawing/2010/main" val="0"/>
@@ -27234,8 +28353,8 @@
         </p:blipFill>
         <p:spPr>
           <a:xfrm>
-            <a:off x="10286336" y="6214734"/>
-            <a:ext cx="1664079" cy="457304"/>
+            <a:off x="3957447" y="4112271"/>
+            <a:ext cx="1399636" cy="627293"/>
           </a:xfrm>
           <a:prstGeom prst="rect">
             <a:avLst/>
@@ -27244,10 +28363,10 @@
       </p:pic>
       <p:pic>
         <p:nvPicPr>
-          <p:cNvPr id="8" name="Bildobjekt 7" descr="En bild som visar röd, Grafik, Karmin, design&#10;&#10;Automatiskt genererad beskrivning">
+          <p:cNvPr id="5" name="Picture 4" descr="A logo with a purple and blue design&#10;&#10;Description automatically generated">
             <a:extLst>
               <a:ext uri="{FF2B5EF4-FFF2-40B4-BE49-F238E27FC236}">
-                <a16:creationId xmlns:a16="http://schemas.microsoft.com/office/drawing/2014/main" id="{3B4639CF-F594-D639-81A7-3B0A25C56BBB}"/>
+                <a16:creationId xmlns:a16="http://schemas.microsoft.com/office/drawing/2014/main" id="{6EDBD9B7-7E51-9C36-7FF9-BBD171E26FC5}"/>
               </a:ext>
             </a:extLst>
           </p:cNvPr>
@@ -27257,7 +28376,7 @@
           <p:nvPr/>
         </p:nvPicPr>
         <p:blipFill>
-          <a:blip r:embed="rId5">
+          <a:blip r:embed="rId17">
             <a:extLst>
               <a:ext uri="{28A0092B-C50C-407E-A947-70E740481C1C}">
                 <a14:useLocalDpi xmlns:a14="http://schemas.microsoft.com/office/drawing/2010/main" val="0"/>
@@ -27270,8 +28389,8 @@
         </p:blipFill>
         <p:spPr>
           <a:xfrm>
-            <a:off x="747953" y="2805600"/>
-            <a:ext cx="3586752" cy="859809"/>
+            <a:off x="11306280" y="136245"/>
+            <a:ext cx="743431" cy="743431"/>
           </a:xfrm>
           <a:prstGeom prst="rect">
             <a:avLst/>
@@ -27280,10 +28399,10 @@
       </p:pic>
       <p:pic>
         <p:nvPicPr>
-          <p:cNvPr id="12" name="Bildobjekt 11" descr="En bild som visar svart, mörker&#10;&#10;Automatiskt genererad beskrivning">
+          <p:cNvPr id="7" name="Picture 6" descr="A black background with grey text&#10;&#10;Description automatically generated">
             <a:extLst>
               <a:ext uri="{FF2B5EF4-FFF2-40B4-BE49-F238E27FC236}">
-                <a16:creationId xmlns:a16="http://schemas.microsoft.com/office/drawing/2014/main" id="{095F5C9C-4F9C-985A-DA14-6DD6AC5F858F}"/>
+                <a16:creationId xmlns:a16="http://schemas.microsoft.com/office/drawing/2014/main" id="{2F8249F5-99E0-6788-3537-A214B6193735}"/>
               </a:ext>
             </a:extLst>
           </p:cNvPr>
@@ -27293,7 +28412,7 @@
           <p:nvPr/>
         </p:nvPicPr>
         <p:blipFill>
-          <a:blip r:embed="rId6">
+          <a:blip r:embed="rId18">
             <a:extLst>
               <a:ext uri="{28A0092B-C50C-407E-A947-70E740481C1C}">
                 <a14:useLocalDpi xmlns:a14="http://schemas.microsoft.com/office/drawing/2010/main" val="0"/>
@@ -27306,8 +28425,8 @@
         </p:blipFill>
         <p:spPr>
           <a:xfrm>
-            <a:off x="347174" y="4459230"/>
-            <a:ext cx="4045212" cy="1330137"/>
+            <a:off x="7066574" y="1094728"/>
+            <a:ext cx="1702912" cy="881390"/>
           </a:xfrm>
           <a:prstGeom prst="rect">
             <a:avLst/>
@@ -27316,10 +28435,10 @@
       </p:pic>
       <p:pic>
         <p:nvPicPr>
-          <p:cNvPr id="16" name="Bild 15">
+          <p:cNvPr id="16" name="Picture 15" descr="A blue letters on a black background&#10;&#10;Description automatically generated">
             <a:extLst>
               <a:ext uri="{FF2B5EF4-FFF2-40B4-BE49-F238E27FC236}">
-                <a16:creationId xmlns:a16="http://schemas.microsoft.com/office/drawing/2014/main" id="{F7720950-5BCF-4931-E663-312FBD0AF678}"/>
+                <a16:creationId xmlns:a16="http://schemas.microsoft.com/office/drawing/2014/main" id="{8CD62D42-0625-219B-10CF-3AD32E9F2E28}"/>
               </a:ext>
             </a:extLst>
           </p:cNvPr>
@@ -27329,10 +28448,10 @@
           <p:nvPr/>
         </p:nvPicPr>
         <p:blipFill>
-          <a:blip r:embed="rId7">
+          <a:blip r:embed="rId19">
             <a:extLst>
-              <a:ext uri="{96DAC541-7B7A-43D3-8B79-37D633B846F1}">
-                <asvg:svgBlip xmlns:asvg="http://schemas.microsoft.com/office/drawing/2016/SVG/main" r:embed="rId8"/>
+              <a:ext uri="{28A0092B-C50C-407E-A947-70E740481C1C}">
+                <a14:useLocalDpi xmlns:a14="http://schemas.microsoft.com/office/drawing/2010/main" val="0"/>
               </a:ext>
             </a:extLst>
           </a:blip>
@@ -27342,8 +28461,188 @@
         </p:blipFill>
         <p:spPr>
           <a:xfrm>
-            <a:off x="5252357" y="4967968"/>
-            <a:ext cx="3200400" cy="1200150"/>
+            <a:off x="308211" y="2261704"/>
+            <a:ext cx="2004539" cy="450967"/>
+          </a:xfrm>
+          <a:prstGeom prst="rect">
+            <a:avLst/>
+          </a:prstGeom>
+        </p:spPr>
+      </p:pic>
+      <p:pic>
+        <p:nvPicPr>
+          <p:cNvPr id="20" name="Picture 19" descr="A black text on a white background&#10;&#10;Description automatically generated">
+            <a:extLst>
+              <a:ext uri="{FF2B5EF4-FFF2-40B4-BE49-F238E27FC236}">
+                <a16:creationId xmlns:a16="http://schemas.microsoft.com/office/drawing/2014/main" id="{AB6317DA-1541-6E13-4C39-C5E5DDF6A94D}"/>
+              </a:ext>
+            </a:extLst>
+          </p:cNvPr>
+          <p:cNvPicPr>
+            <a:picLocks noChangeAspect="1"/>
+          </p:cNvPicPr>
+          <p:nvPr/>
+        </p:nvPicPr>
+        <p:blipFill>
+          <a:blip r:embed="rId20">
+            <a:extLst>
+              <a:ext uri="{28A0092B-C50C-407E-A947-70E740481C1C}">
+                <a14:useLocalDpi xmlns:a14="http://schemas.microsoft.com/office/drawing/2010/main" val="0"/>
+              </a:ext>
+            </a:extLst>
+          </a:blip>
+          <a:stretch>
+            <a:fillRect/>
+          </a:stretch>
+        </p:blipFill>
+        <p:spPr>
+          <a:xfrm>
+            <a:off x="9778711" y="2059197"/>
+            <a:ext cx="1933418" cy="575955"/>
+          </a:xfrm>
+          <a:prstGeom prst="rect">
+            <a:avLst/>
+          </a:prstGeom>
+        </p:spPr>
+      </p:pic>
+      <p:pic>
+        <p:nvPicPr>
+          <p:cNvPr id="22" name="Picture 21" descr="A close-up of a logo&#10;&#10;Description automatically generated">
+            <a:extLst>
+              <a:ext uri="{FF2B5EF4-FFF2-40B4-BE49-F238E27FC236}">
+                <a16:creationId xmlns:a16="http://schemas.microsoft.com/office/drawing/2014/main" id="{5476C600-5EA8-6522-2B1C-71FA0F66B308}"/>
+              </a:ext>
+            </a:extLst>
+          </p:cNvPr>
+          <p:cNvPicPr>
+            <a:picLocks noChangeAspect="1"/>
+          </p:cNvPicPr>
+          <p:nvPr/>
+        </p:nvPicPr>
+        <p:blipFill>
+          <a:blip r:embed="rId21">
+            <a:extLst>
+              <a:ext uri="{28A0092B-C50C-407E-A947-70E740481C1C}">
+                <a14:useLocalDpi xmlns:a14="http://schemas.microsoft.com/office/drawing/2010/main" val="0"/>
+              </a:ext>
+            </a:extLst>
+          </a:blip>
+          <a:stretch>
+            <a:fillRect/>
+          </a:stretch>
+        </p:blipFill>
+        <p:spPr>
+          <a:xfrm>
+            <a:off x="3386652" y="5105526"/>
+            <a:ext cx="2413289" cy="674069"/>
+          </a:xfrm>
+          <a:prstGeom prst="rect">
+            <a:avLst/>
+          </a:prstGeom>
+        </p:spPr>
+      </p:pic>
+      <p:pic>
+        <p:nvPicPr>
+          <p:cNvPr id="26" name="Picture 25" descr="A logo with a black background&#10;&#10;Description automatically generated">
+            <a:extLst>
+              <a:ext uri="{FF2B5EF4-FFF2-40B4-BE49-F238E27FC236}">
+                <a16:creationId xmlns:a16="http://schemas.microsoft.com/office/drawing/2014/main" id="{1DFD5075-8E3C-62F1-8DCE-71C254D26A00}"/>
+              </a:ext>
+            </a:extLst>
+          </p:cNvPr>
+          <p:cNvPicPr>
+            <a:picLocks noChangeAspect="1"/>
+          </p:cNvPicPr>
+          <p:nvPr/>
+        </p:nvPicPr>
+        <p:blipFill>
+          <a:blip r:embed="rId22">
+            <a:extLst>
+              <a:ext uri="{28A0092B-C50C-407E-A947-70E740481C1C}">
+                <a14:useLocalDpi xmlns:a14="http://schemas.microsoft.com/office/drawing/2010/main" val="0"/>
+              </a:ext>
+            </a:extLst>
+          </a:blip>
+          <a:stretch>
+            <a:fillRect/>
+          </a:stretch>
+        </p:blipFill>
+        <p:spPr>
+          <a:xfrm>
+            <a:off x="6905828" y="3016251"/>
+            <a:ext cx="1972890" cy="712556"/>
+          </a:xfrm>
+          <a:prstGeom prst="rect">
+            <a:avLst/>
+          </a:prstGeom>
+        </p:spPr>
+      </p:pic>
+      <p:pic>
+        <p:nvPicPr>
+          <p:cNvPr id="28" name="Picture 27" descr="A black background with blue text&#10;&#10;Description automatically generated">
+            <a:extLst>
+              <a:ext uri="{FF2B5EF4-FFF2-40B4-BE49-F238E27FC236}">
+                <a16:creationId xmlns:a16="http://schemas.microsoft.com/office/drawing/2014/main" id="{C3F88812-7B43-33FE-3C88-53959DC25859}"/>
+              </a:ext>
+            </a:extLst>
+          </p:cNvPr>
+          <p:cNvPicPr>
+            <a:picLocks noChangeAspect="1"/>
+          </p:cNvPicPr>
+          <p:nvPr/>
+        </p:nvPicPr>
+        <p:blipFill>
+          <a:blip r:embed="rId23">
+            <a:extLst>
+              <a:ext uri="{28A0092B-C50C-407E-A947-70E740481C1C}">
+                <a14:useLocalDpi xmlns:a14="http://schemas.microsoft.com/office/drawing/2010/main" val="0"/>
+              </a:ext>
+            </a:extLst>
+          </a:blip>
+          <a:stretch>
+            <a:fillRect/>
+          </a:stretch>
+        </p:blipFill>
+        <p:spPr>
+          <a:xfrm>
+            <a:off x="5584903" y="5846464"/>
+            <a:ext cx="1694538" cy="877056"/>
+          </a:xfrm>
+          <a:prstGeom prst="rect">
+            <a:avLst/>
+          </a:prstGeom>
+        </p:spPr>
+      </p:pic>
+      <p:pic>
+        <p:nvPicPr>
+          <p:cNvPr id="30" name="Picture 29" descr="A black and white logo&#10;&#10;Description automatically generated">
+            <a:extLst>
+              <a:ext uri="{FF2B5EF4-FFF2-40B4-BE49-F238E27FC236}">
+                <a16:creationId xmlns:a16="http://schemas.microsoft.com/office/drawing/2014/main" id="{4784D16E-5D47-559D-D2D9-FDE9D702D8E9}"/>
+              </a:ext>
+            </a:extLst>
+          </p:cNvPr>
+          <p:cNvPicPr>
+            <a:picLocks noChangeAspect="1"/>
+          </p:cNvPicPr>
+          <p:nvPr/>
+        </p:nvPicPr>
+        <p:blipFill>
+          <a:blip r:embed="rId24">
+            <a:extLst>
+              <a:ext uri="{28A0092B-C50C-407E-A947-70E740481C1C}">
+                <a14:useLocalDpi xmlns:a14="http://schemas.microsoft.com/office/drawing/2010/main" val="0"/>
+              </a:ext>
+            </a:extLst>
+          </a:blip>
+          <a:stretch>
+            <a:fillRect/>
+          </a:stretch>
+        </p:blipFill>
+        <p:spPr>
+          <a:xfrm>
+            <a:off x="8369793" y="6071613"/>
+            <a:ext cx="1682642" cy="426757"/>
           </a:xfrm>
           <a:prstGeom prst="rect">
             <a:avLst/>
@@ -27353,7 +28652,7 @@
     </p:spTree>
     <p:extLst>
       <p:ext uri="{BB962C8B-B14F-4D97-AF65-F5344CB8AC3E}">
-        <p14:creationId xmlns:p14="http://schemas.microsoft.com/office/powerpoint/2010/main" val="1567241970"/>
+        <p14:creationId xmlns:p14="http://schemas.microsoft.com/office/powerpoint/2010/main" val="1993828845"/>
       </p:ext>
     </p:extLst>
   </p:cSld>
@@ -27363,162 +28662,7 @@
 </p:sld>
 </file>
 
-<file path=ppt/slides/slide18.xml><?xml version="1.0" encoding="utf-8"?>
-<p:sld xmlns:a="http://schemas.openxmlformats.org/drawingml/2006/main" xmlns:r="http://schemas.openxmlformats.org/officeDocument/2006/relationships" xmlns:p="http://schemas.openxmlformats.org/presentationml/2006/main">
-  <p:cSld>
-    <p:spTree>
-      <p:nvGrpSpPr>
-        <p:cNvPr id="1" name=""/>
-        <p:cNvGrpSpPr/>
-        <p:nvPr/>
-      </p:nvGrpSpPr>
-      <p:grpSpPr>
-        <a:xfrm>
-          <a:off x="0" y="0"/>
-          <a:ext cx="0" cy="0"/>
-          <a:chOff x="0" y="0"/>
-          <a:chExt cx="0" cy="0"/>
-        </a:xfrm>
-      </p:grpSpPr>
-      <p:sp>
-        <p:nvSpPr>
-          <p:cNvPr id="2" name="Rubrik 1">
-            <a:extLst>
-              <a:ext uri="{FF2B5EF4-FFF2-40B4-BE49-F238E27FC236}">
-                <a16:creationId xmlns:a16="http://schemas.microsoft.com/office/drawing/2014/main" id="{88648668-72EC-B84A-CF41-78CB99E439F6}"/>
-              </a:ext>
-            </a:extLst>
-          </p:cNvPr>
-          <p:cNvSpPr>
-            <a:spLocks noGrp="1"/>
-          </p:cNvSpPr>
-          <p:nvPr>
-            <p:ph type="ctrTitle"/>
-          </p:nvPr>
-        </p:nvSpPr>
-        <p:spPr>
-          <a:xfrm>
-            <a:off x="1524000" y="1122363"/>
-            <a:ext cx="9144000" cy="1141866"/>
-          </a:xfrm>
-        </p:spPr>
-        <p:txBody>
-          <a:bodyPr/>
-          <a:lstStyle/>
-          <a:p>
-            <a:r>
-              <a:rPr lang="sv-SE" dirty="0"/>
-              <a:t>Data </a:t>
-            </a:r>
-            <a:r>
-              <a:rPr lang="sv-SE" dirty="0" err="1"/>
-              <a:t>Saturday</a:t>
-            </a:r>
-            <a:r>
-              <a:rPr lang="sv-SE" dirty="0"/>
-              <a:t> 2025</a:t>
-            </a:r>
-          </a:p>
-        </p:txBody>
-      </p:sp>
-      <p:sp>
-        <p:nvSpPr>
-          <p:cNvPr id="4" name="Rubrik 1">
-            <a:extLst>
-              <a:ext uri="{FF2B5EF4-FFF2-40B4-BE49-F238E27FC236}">
-                <a16:creationId xmlns:a16="http://schemas.microsoft.com/office/drawing/2014/main" id="{1EDBABA1-4495-4312-255E-3EC57EC4C19C}"/>
-              </a:ext>
-            </a:extLst>
-          </p:cNvPr>
-          <p:cNvSpPr txBox="1">
-            <a:spLocks/>
-          </p:cNvSpPr>
-          <p:nvPr/>
-        </p:nvSpPr>
-        <p:spPr>
-          <a:xfrm>
-            <a:off x="1404257" y="2264229"/>
-            <a:ext cx="9144000" cy="1141866"/>
-          </a:xfrm>
-          <a:prstGeom prst="rect">
-            <a:avLst/>
-          </a:prstGeom>
-        </p:spPr>
-        <p:txBody>
-          <a:bodyPr vert="horz" lIns="91440" tIns="45720" rIns="91440" bIns="45720" rtlCol="0" anchor="b">
-            <a:normAutofit/>
-          </a:bodyPr>
-          <a:lstStyle>
-            <a:lvl1pPr algn="ctr" defTabSz="914400" rtl="0" eaLnBrk="1" latinLnBrk="0" hangingPunct="1">
-              <a:lnSpc>
-                <a:spcPct val="90000"/>
-              </a:lnSpc>
-              <a:spcBef>
-                <a:spcPct val="0"/>
-              </a:spcBef>
-              <a:buNone/>
-              <a:defRPr sz="6000" kern="1200">
-                <a:solidFill>
-                  <a:schemeClr val="tx1"/>
-                </a:solidFill>
-                <a:latin typeface="+mj-lt"/>
-                <a:ea typeface="+mj-ea"/>
-                <a:cs typeface="+mj-cs"/>
-              </a:defRPr>
-            </a:lvl1pPr>
-          </a:lstStyle>
-          <a:p>
-            <a:pPr marL="0" marR="0" lvl="0" indent="0" algn="ctr" defTabSz="914400" rtl="0" eaLnBrk="1" fontAlgn="auto" latinLnBrk="0" hangingPunct="1">
-              <a:lnSpc>
-                <a:spcPct val="90000"/>
-              </a:lnSpc>
-              <a:spcBef>
-                <a:spcPct val="0"/>
-              </a:spcBef>
-              <a:spcAft>
-                <a:spcPts val="0"/>
-              </a:spcAft>
-              <a:buClrTx/>
-              <a:buSzTx/>
-              <a:buFontTx/>
-              <a:buNone/>
-              <a:tabLst/>
-              <a:defRPr/>
-            </a:pPr>
-            <a:r>
-              <a:rPr kumimoji="0" lang="sv-SE" sz="6000" b="0" i="0" u="none" strike="noStrike" kern="1200" cap="none" spc="0" normalizeH="0" baseline="0" noProof="0" dirty="0">
-                <a:ln>
-                  <a:noFill/>
-                </a:ln>
-                <a:solidFill>
-                  <a:prstClr val="black"/>
-                </a:solidFill>
-                <a:effectLst/>
-                <a:uLnTx/>
-                <a:uFillTx/>
-                <a:latin typeface="Calibri Light" panose="020F0302020204030204"/>
-                <a:ea typeface="+mj-ea"/>
-                <a:cs typeface="+mj-cs"/>
-              </a:rPr>
-              <a:t>September 6.</a:t>
-            </a:r>
-          </a:p>
-        </p:txBody>
-      </p:sp>
-    </p:spTree>
-    <p:extLst>
-      <p:ext uri="{BB962C8B-B14F-4D97-AF65-F5344CB8AC3E}">
-        <p14:creationId xmlns:p14="http://schemas.microsoft.com/office/powerpoint/2010/main" val="1437444705"/>
-      </p:ext>
-    </p:extLst>
-  </p:cSld>
-  <p:clrMapOvr>
-    <a:masterClrMapping/>
-  </p:clrMapOvr>
-</p:sld>
-</file>
-
-<file path=ppt/slides/slide2.xml><?xml version="1.0" encoding="utf-8"?>
+<file path=ppt/slides/slide3.xml><?xml version="1.0" encoding="utf-8"?>
 <p:sld xmlns:a="http://schemas.openxmlformats.org/drawingml/2006/main" xmlns:r="http://schemas.openxmlformats.org/officeDocument/2006/relationships" xmlns:p="http://schemas.openxmlformats.org/presentationml/2006/main">
   <p:cSld>
     <p:bg>
@@ -27681,7 +28825,7 @@
 </p:sld>
 </file>
 
-<file path=ppt/slides/slide3.xml><?xml version="1.0" encoding="utf-8"?>
+<file path=ppt/slides/slide4.xml><?xml version="1.0" encoding="utf-8"?>
 <p:sld xmlns:a="http://schemas.openxmlformats.org/drawingml/2006/main" xmlns:r="http://schemas.openxmlformats.org/officeDocument/2006/relationships" xmlns:p="http://schemas.openxmlformats.org/presentationml/2006/main">
   <p:cSld>
     <p:bg>
@@ -27981,34 +29125,48 @@
           <a:lstStyle/>
           <a:p>
             <a:r>
-              <a:rPr lang="en-GB" sz="2000"/>
+              <a:rPr lang="en-GB" sz="2000" dirty="0"/>
               <a:t>SQL Server specialist consultant</a:t>
             </a:r>
           </a:p>
           <a:p>
             <a:r>
-              <a:rPr lang="en-GB" sz="2000"/>
+              <a:rPr lang="en-GB" sz="2000" dirty="0"/>
               <a:t>DBA and developer</a:t>
             </a:r>
           </a:p>
           <a:p>
             <a:r>
-              <a:rPr lang="en-GB" sz="2000"/>
-              <a:t>Transmokopter SQL AB</a:t>
+              <a:rPr lang="en-GB" sz="2000" dirty="0" err="1"/>
+              <a:t>Transmokopter</a:t>
+            </a:r>
+            <a:r>
+              <a:rPr lang="en-GB" sz="2000" dirty="0"/>
+              <a:t> SQL AB</a:t>
             </a:r>
           </a:p>
           <a:p>
             <a:r>
-              <a:rPr lang="en-GB" sz="2000"/>
+              <a:rPr lang="en-GB" sz="2000" dirty="0"/>
               <a:t>Data Platform MVP</a:t>
             </a:r>
           </a:p>
           <a:p>
             <a:r>
-              <a:rPr lang="en-GB" sz="2000"/>
+              <a:rPr lang="en-GB" sz="2000" dirty="0"/>
               <a:t>SQL Friday</a:t>
             </a:r>
-            <a:endParaRPr lang="LID4096" sz="2000"/>
+          </a:p>
+          <a:p>
+            <a:r>
+              <a:rPr lang="en-GB" sz="2000" dirty="0"/>
+              <a:t>github.com/</a:t>
+            </a:r>
+            <a:r>
+              <a:rPr lang="en-GB" sz="2000" dirty="0" err="1"/>
+              <a:t>transmokopter</a:t>
+            </a:r>
+            <a:endParaRPr lang="LID4096" sz="2000" dirty="0"/>
           </a:p>
         </p:txBody>
       </p:sp>
@@ -28016,523 +29174,6 @@
     <p:extLst>
       <p:ext uri="{BB962C8B-B14F-4D97-AF65-F5344CB8AC3E}">
         <p14:creationId xmlns:p14="http://schemas.microsoft.com/office/powerpoint/2010/main" val="3350649146"/>
-      </p:ext>
-    </p:extLst>
-  </p:cSld>
-  <p:clrMapOvr>
-    <a:masterClrMapping/>
-  </p:clrMapOvr>
-</p:sld>
-</file>
-
-<file path=ppt/slides/slide4.xml><?xml version="1.0" encoding="utf-8"?>
-<p:sld xmlns:a="http://schemas.openxmlformats.org/drawingml/2006/main" xmlns:r="http://schemas.openxmlformats.org/officeDocument/2006/relationships" xmlns:p="http://schemas.openxmlformats.org/presentationml/2006/main">
-  <p:cSld>
-    <p:spTree>
-      <p:nvGrpSpPr>
-        <p:cNvPr id="1" name=""/>
-        <p:cNvGrpSpPr/>
-        <p:nvPr/>
-      </p:nvGrpSpPr>
-      <p:grpSpPr>
-        <a:xfrm>
-          <a:off x="0" y="0"/>
-          <a:ext cx="0" cy="0"/>
-          <a:chOff x="0" y="0"/>
-          <a:chExt cx="0" cy="0"/>
-        </a:xfrm>
-      </p:grpSpPr>
-      <p:sp>
-        <p:nvSpPr>
-          <p:cNvPr id="4" name="textruta 3">
-            <a:extLst>
-              <a:ext uri="{FF2B5EF4-FFF2-40B4-BE49-F238E27FC236}">
-                <a16:creationId xmlns:a16="http://schemas.microsoft.com/office/drawing/2014/main" id="{7B6ECFC8-D962-81BC-8CD8-9E0404E25B1B}"/>
-              </a:ext>
-            </a:extLst>
-          </p:cNvPr>
-          <p:cNvSpPr txBox="1"/>
-          <p:nvPr/>
-        </p:nvSpPr>
-        <p:spPr>
-          <a:xfrm>
-            <a:off x="0" y="366420"/>
-            <a:ext cx="12192000" cy="830997"/>
-          </a:xfrm>
-          <a:prstGeom prst="rect">
-            <a:avLst/>
-          </a:prstGeom>
-          <a:noFill/>
-        </p:spPr>
-        <p:txBody>
-          <a:bodyPr wrap="square" rtlCol="0">
-            <a:spAutoFit/>
-          </a:bodyPr>
-          <a:lstStyle/>
-          <a:p>
-            <a:pPr marL="0" marR="0" lvl="0" indent="0" algn="ctr" defTabSz="914400" rtl="0" eaLnBrk="1" fontAlgn="auto" latinLnBrk="0" hangingPunct="1">
-              <a:lnSpc>
-                <a:spcPct val="100000"/>
-              </a:lnSpc>
-              <a:spcBef>
-                <a:spcPts val="0"/>
-              </a:spcBef>
-              <a:spcAft>
-                <a:spcPts val="0"/>
-              </a:spcAft>
-              <a:buClrTx/>
-              <a:buSzTx/>
-              <a:buFontTx/>
-              <a:buNone/>
-              <a:tabLst/>
-              <a:defRPr/>
-            </a:pPr>
-            <a:r>
-              <a:rPr kumimoji="0" lang="sv-SE" sz="4800" b="0" i="0" u="none" strike="noStrike" kern="1200" cap="none" spc="0" normalizeH="0" baseline="0" noProof="0" dirty="0">
-                <a:ln>
-                  <a:noFill/>
-                </a:ln>
-                <a:solidFill>
-                  <a:srgbClr val="4472C4">
-                    <a:lumMod val="75000"/>
-                  </a:srgbClr>
-                </a:solidFill>
-                <a:effectLst/>
-                <a:uLnTx/>
-                <a:uFillTx/>
-                <a:latin typeface="Calibri" panose="020F0502020204030204"/>
-                <a:ea typeface="+mn-ea"/>
-                <a:cs typeface="+mn-cs"/>
-              </a:rPr>
-              <a:t>Data </a:t>
-            </a:r>
-            <a:r>
-              <a:rPr kumimoji="0" lang="sv-SE" sz="4800" b="0" i="0" u="none" strike="noStrike" kern="1200" cap="none" spc="0" normalizeH="0" baseline="0" noProof="0" dirty="0" err="1">
-                <a:ln>
-                  <a:noFill/>
-                </a:ln>
-                <a:solidFill>
-                  <a:srgbClr val="4472C4">
-                    <a:lumMod val="75000"/>
-                  </a:srgbClr>
-                </a:solidFill>
-                <a:effectLst/>
-                <a:uLnTx/>
-                <a:uFillTx/>
-                <a:latin typeface="Calibri" panose="020F0502020204030204"/>
-                <a:ea typeface="+mn-ea"/>
-                <a:cs typeface="+mn-cs"/>
-              </a:rPr>
-              <a:t>Saturday</a:t>
-            </a:r>
-            <a:r>
-              <a:rPr kumimoji="0" lang="sv-SE" sz="4800" b="0" i="0" u="none" strike="noStrike" kern="1200" cap="none" spc="0" normalizeH="0" baseline="0" noProof="0" dirty="0">
-                <a:ln>
-                  <a:noFill/>
-                </a:ln>
-                <a:solidFill>
-                  <a:srgbClr val="4472C4">
-                    <a:lumMod val="75000"/>
-                  </a:srgbClr>
-                </a:solidFill>
-                <a:effectLst/>
-                <a:uLnTx/>
-                <a:uFillTx/>
-                <a:latin typeface="Calibri" panose="020F0502020204030204"/>
-                <a:ea typeface="+mn-ea"/>
-                <a:cs typeface="+mn-cs"/>
-              </a:rPr>
-              <a:t> Gothenburg 2024</a:t>
-            </a:r>
-          </a:p>
-        </p:txBody>
-      </p:sp>
-      <p:sp>
-        <p:nvSpPr>
-          <p:cNvPr id="5" name="textruta 4">
-            <a:extLst>
-              <a:ext uri="{FF2B5EF4-FFF2-40B4-BE49-F238E27FC236}">
-                <a16:creationId xmlns:a16="http://schemas.microsoft.com/office/drawing/2014/main" id="{4DEFE1A2-D309-13ED-8FEF-45BF7CFE4747}"/>
-              </a:ext>
-            </a:extLst>
-          </p:cNvPr>
-          <p:cNvSpPr txBox="1"/>
-          <p:nvPr/>
-        </p:nvSpPr>
-        <p:spPr>
-          <a:xfrm>
-            <a:off x="0" y="1197417"/>
-            <a:ext cx="12192000" cy="646331"/>
-          </a:xfrm>
-          <a:prstGeom prst="rect">
-            <a:avLst/>
-          </a:prstGeom>
-          <a:noFill/>
-        </p:spPr>
-        <p:txBody>
-          <a:bodyPr wrap="square" rtlCol="0">
-            <a:spAutoFit/>
-          </a:bodyPr>
-          <a:lstStyle/>
-          <a:p>
-            <a:pPr marL="0" marR="0" lvl="0" indent="0" algn="ctr" defTabSz="914400" rtl="0" eaLnBrk="1" fontAlgn="auto" latinLnBrk="0" hangingPunct="1">
-              <a:lnSpc>
-                <a:spcPct val="100000"/>
-              </a:lnSpc>
-              <a:spcBef>
-                <a:spcPts val="0"/>
-              </a:spcBef>
-              <a:spcAft>
-                <a:spcPts val="0"/>
-              </a:spcAft>
-              <a:buClrTx/>
-              <a:buSzTx/>
-              <a:buFontTx/>
-              <a:buNone/>
-              <a:tabLst/>
-              <a:defRPr/>
-            </a:pPr>
-            <a:r>
-              <a:rPr kumimoji="0" lang="sv-SE" sz="3600" b="0" i="0" u="none" strike="noStrike" kern="1200" cap="none" spc="0" normalizeH="0" baseline="0" noProof="0" dirty="0">
-                <a:ln>
-                  <a:noFill/>
-                </a:ln>
-                <a:solidFill>
-                  <a:srgbClr val="4472C4">
-                    <a:lumMod val="75000"/>
-                  </a:srgbClr>
-                </a:solidFill>
-                <a:effectLst/>
-                <a:uLnTx/>
-                <a:uFillTx/>
-                <a:latin typeface="Calibri" panose="020F0502020204030204"/>
-                <a:ea typeface="+mn-ea"/>
-                <a:cs typeface="+mn-cs"/>
-              </a:rPr>
-              <a:t>Sponsors</a:t>
-            </a:r>
-          </a:p>
-        </p:txBody>
-      </p:sp>
-      <p:pic>
-        <p:nvPicPr>
-          <p:cNvPr id="3" name="Bildobjekt 2">
-            <a:extLst>
-              <a:ext uri="{FF2B5EF4-FFF2-40B4-BE49-F238E27FC236}">
-                <a16:creationId xmlns:a16="http://schemas.microsoft.com/office/drawing/2014/main" id="{25D87688-2C1D-CC29-07BE-0E9F33D77686}"/>
-              </a:ext>
-            </a:extLst>
-          </p:cNvPr>
-          <p:cNvPicPr>
-            <a:picLocks noChangeAspect="1"/>
-          </p:cNvPicPr>
-          <p:nvPr/>
-        </p:nvPicPr>
-        <p:blipFill>
-          <a:blip r:embed="rId2">
-            <a:extLst>
-              <a:ext uri="{28A0092B-C50C-407E-A947-70E740481C1C}">
-                <a14:useLocalDpi xmlns:a14="http://schemas.microsoft.com/office/drawing/2010/main" val="0"/>
-              </a:ext>
-            </a:extLst>
-          </a:blip>
-          <a:stretch>
-            <a:fillRect/>
-          </a:stretch>
-        </p:blipFill>
-        <p:spPr>
-          <a:xfrm>
-            <a:off x="5193271" y="2011777"/>
-            <a:ext cx="2847038" cy="2447453"/>
-          </a:xfrm>
-          <a:prstGeom prst="rect">
-            <a:avLst/>
-          </a:prstGeom>
-        </p:spPr>
-      </p:pic>
-      <p:pic>
-        <p:nvPicPr>
-          <p:cNvPr id="7" name="Bildobjekt 6">
-            <a:extLst>
-              <a:ext uri="{FF2B5EF4-FFF2-40B4-BE49-F238E27FC236}">
-                <a16:creationId xmlns:a16="http://schemas.microsoft.com/office/drawing/2014/main" id="{66C0E78F-5E57-44E8-1A2D-E435DDB36C1E}"/>
-              </a:ext>
-            </a:extLst>
-          </p:cNvPr>
-          <p:cNvPicPr>
-            <a:picLocks noChangeAspect="1"/>
-          </p:cNvPicPr>
-          <p:nvPr/>
-        </p:nvPicPr>
-        <p:blipFill>
-          <a:blip r:embed="rId3">
-            <a:extLst>
-              <a:ext uri="{28A0092B-C50C-407E-A947-70E740481C1C}">
-                <a14:useLocalDpi xmlns:a14="http://schemas.microsoft.com/office/drawing/2010/main" val="0"/>
-              </a:ext>
-            </a:extLst>
-          </a:blip>
-          <a:stretch>
-            <a:fillRect/>
-          </a:stretch>
-        </p:blipFill>
-        <p:spPr>
-          <a:xfrm>
-            <a:off x="9010389" y="3107484"/>
-            <a:ext cx="1464479" cy="1642407"/>
-          </a:xfrm>
-          <a:prstGeom prst="rect">
-            <a:avLst/>
-          </a:prstGeom>
-        </p:spPr>
-      </p:pic>
-      <p:sp>
-        <p:nvSpPr>
-          <p:cNvPr id="14" name="textruta 13">
-            <a:extLst>
-              <a:ext uri="{FF2B5EF4-FFF2-40B4-BE49-F238E27FC236}">
-                <a16:creationId xmlns:a16="http://schemas.microsoft.com/office/drawing/2014/main" id="{43BFEBBE-BC81-EE8B-9C5A-85333ED88EC4}"/>
-              </a:ext>
-            </a:extLst>
-          </p:cNvPr>
-          <p:cNvSpPr txBox="1"/>
-          <p:nvPr/>
-        </p:nvSpPr>
-        <p:spPr>
-          <a:xfrm>
-            <a:off x="5458464" y="3793671"/>
-            <a:ext cx="2400978" cy="369332"/>
-          </a:xfrm>
-          <a:prstGeom prst="rect">
-            <a:avLst/>
-          </a:prstGeom>
-          <a:noFill/>
-        </p:spPr>
-        <p:txBody>
-          <a:bodyPr wrap="none" rtlCol="0">
-            <a:spAutoFit/>
-          </a:bodyPr>
-          <a:lstStyle/>
-          <a:p>
-            <a:pPr marL="0" marR="0" lvl="0" indent="0" algn="l" defTabSz="914400" rtl="0" eaLnBrk="1" fontAlgn="auto" latinLnBrk="0" hangingPunct="1">
-              <a:lnSpc>
-                <a:spcPct val="100000"/>
-              </a:lnSpc>
-              <a:spcBef>
-                <a:spcPts val="0"/>
-              </a:spcBef>
-              <a:spcAft>
-                <a:spcPts val="0"/>
-              </a:spcAft>
-              <a:buClrTx/>
-              <a:buSzTx/>
-              <a:buFontTx/>
-              <a:buNone/>
-              <a:tabLst/>
-              <a:defRPr/>
-            </a:pPr>
-            <a:r>
-              <a:rPr kumimoji="0" lang="sv-SE" sz="1800" b="0" i="0" u="none" strike="noStrike" kern="1200" cap="none" spc="0" normalizeH="0" baseline="0" noProof="0" dirty="0">
-                <a:ln>
-                  <a:noFill/>
-                </a:ln>
-                <a:solidFill>
-                  <a:prstClr val="black"/>
-                </a:solidFill>
-                <a:effectLst/>
-                <a:uLnTx/>
-                <a:uFillTx/>
-                <a:latin typeface="Calibri" panose="020F0502020204030204"/>
-                <a:ea typeface="+mn-ea"/>
-                <a:cs typeface="+mn-cs"/>
-              </a:rPr>
-              <a:t>The </a:t>
-            </a:r>
-            <a:r>
-              <a:rPr kumimoji="0" lang="sv-SE" sz="1800" b="0" i="0" u="none" strike="noStrike" kern="1200" cap="none" spc="0" normalizeH="0" baseline="0" noProof="0" dirty="0" err="1">
-                <a:ln>
-                  <a:noFill/>
-                </a:ln>
-                <a:solidFill>
-                  <a:prstClr val="black"/>
-                </a:solidFill>
-                <a:effectLst/>
-                <a:uLnTx/>
-                <a:uFillTx/>
-                <a:latin typeface="Calibri" panose="020F0502020204030204"/>
-                <a:ea typeface="+mn-ea"/>
-                <a:cs typeface="+mn-cs"/>
-              </a:rPr>
-              <a:t>after</a:t>
-            </a:r>
-            <a:r>
-              <a:rPr kumimoji="0" lang="sv-SE" sz="1800" b="0" i="0" u="none" strike="noStrike" kern="1200" cap="none" spc="0" normalizeH="0" baseline="0" noProof="0" dirty="0">
-                <a:ln>
-                  <a:noFill/>
-                </a:ln>
-                <a:solidFill>
-                  <a:prstClr val="black"/>
-                </a:solidFill>
-                <a:effectLst/>
-                <a:uLnTx/>
-                <a:uFillTx/>
-                <a:latin typeface="Calibri" panose="020F0502020204030204"/>
-                <a:ea typeface="+mn-ea"/>
-                <a:cs typeface="+mn-cs"/>
-              </a:rPr>
-              <a:t>-party sponsor</a:t>
-            </a:r>
-          </a:p>
-        </p:txBody>
-      </p:sp>
-      <p:pic>
-        <p:nvPicPr>
-          <p:cNvPr id="11" name="Bildobjekt 10">
-            <a:extLst>
-              <a:ext uri="{FF2B5EF4-FFF2-40B4-BE49-F238E27FC236}">
-                <a16:creationId xmlns:a16="http://schemas.microsoft.com/office/drawing/2014/main" id="{63CC983B-87A9-E1A1-DCB8-D2EC93CAAC27}"/>
-              </a:ext>
-            </a:extLst>
-          </p:cNvPr>
-          <p:cNvPicPr>
-            <a:picLocks noChangeAspect="1"/>
-          </p:cNvPicPr>
-          <p:nvPr/>
-        </p:nvPicPr>
-        <p:blipFill>
-          <a:blip r:embed="rId4">
-            <a:extLst>
-              <a:ext uri="{28A0092B-C50C-407E-A947-70E740481C1C}">
-                <a14:useLocalDpi xmlns:a14="http://schemas.microsoft.com/office/drawing/2010/main" val="0"/>
-              </a:ext>
-            </a:extLst>
-          </a:blip>
-          <a:stretch>
-            <a:fillRect/>
-          </a:stretch>
-        </p:blipFill>
-        <p:spPr>
-          <a:xfrm>
-            <a:off x="10286336" y="6214734"/>
-            <a:ext cx="1664079" cy="457304"/>
-          </a:xfrm>
-          <a:prstGeom prst="rect">
-            <a:avLst/>
-          </a:prstGeom>
-        </p:spPr>
-      </p:pic>
-      <p:pic>
-        <p:nvPicPr>
-          <p:cNvPr id="8" name="Bildobjekt 7" descr="En bild som visar röd, Grafik, Karmin, design&#10;&#10;Automatiskt genererad beskrivning">
-            <a:extLst>
-              <a:ext uri="{FF2B5EF4-FFF2-40B4-BE49-F238E27FC236}">
-                <a16:creationId xmlns:a16="http://schemas.microsoft.com/office/drawing/2014/main" id="{3B4639CF-F594-D639-81A7-3B0A25C56BBB}"/>
-              </a:ext>
-            </a:extLst>
-          </p:cNvPr>
-          <p:cNvPicPr>
-            <a:picLocks noChangeAspect="1"/>
-          </p:cNvPicPr>
-          <p:nvPr/>
-        </p:nvPicPr>
-        <p:blipFill>
-          <a:blip r:embed="rId5">
-            <a:extLst>
-              <a:ext uri="{28A0092B-C50C-407E-A947-70E740481C1C}">
-                <a14:useLocalDpi xmlns:a14="http://schemas.microsoft.com/office/drawing/2010/main" val="0"/>
-              </a:ext>
-            </a:extLst>
-          </a:blip>
-          <a:stretch>
-            <a:fillRect/>
-          </a:stretch>
-        </p:blipFill>
-        <p:spPr>
-          <a:xfrm>
-            <a:off x="747953" y="2805600"/>
-            <a:ext cx="3586752" cy="859809"/>
-          </a:xfrm>
-          <a:prstGeom prst="rect">
-            <a:avLst/>
-          </a:prstGeom>
-        </p:spPr>
-      </p:pic>
-      <p:pic>
-        <p:nvPicPr>
-          <p:cNvPr id="12" name="Bildobjekt 11" descr="En bild som visar svart, mörker&#10;&#10;Automatiskt genererad beskrivning">
-            <a:extLst>
-              <a:ext uri="{FF2B5EF4-FFF2-40B4-BE49-F238E27FC236}">
-                <a16:creationId xmlns:a16="http://schemas.microsoft.com/office/drawing/2014/main" id="{095F5C9C-4F9C-985A-DA14-6DD6AC5F858F}"/>
-              </a:ext>
-            </a:extLst>
-          </p:cNvPr>
-          <p:cNvPicPr>
-            <a:picLocks noChangeAspect="1"/>
-          </p:cNvPicPr>
-          <p:nvPr/>
-        </p:nvPicPr>
-        <p:blipFill>
-          <a:blip r:embed="rId6">
-            <a:extLst>
-              <a:ext uri="{28A0092B-C50C-407E-A947-70E740481C1C}">
-                <a14:useLocalDpi xmlns:a14="http://schemas.microsoft.com/office/drawing/2010/main" val="0"/>
-              </a:ext>
-            </a:extLst>
-          </a:blip>
-          <a:stretch>
-            <a:fillRect/>
-          </a:stretch>
-        </p:blipFill>
-        <p:spPr>
-          <a:xfrm>
-            <a:off x="347174" y="4459230"/>
-            <a:ext cx="4045212" cy="1330137"/>
-          </a:xfrm>
-          <a:prstGeom prst="rect">
-            <a:avLst/>
-          </a:prstGeom>
-        </p:spPr>
-      </p:pic>
-      <p:pic>
-        <p:nvPicPr>
-          <p:cNvPr id="16" name="Bild 15">
-            <a:extLst>
-              <a:ext uri="{FF2B5EF4-FFF2-40B4-BE49-F238E27FC236}">
-                <a16:creationId xmlns:a16="http://schemas.microsoft.com/office/drawing/2014/main" id="{F7720950-5BCF-4931-E663-312FBD0AF678}"/>
-              </a:ext>
-            </a:extLst>
-          </p:cNvPr>
-          <p:cNvPicPr>
-            <a:picLocks noChangeAspect="1"/>
-          </p:cNvPicPr>
-          <p:nvPr/>
-        </p:nvPicPr>
-        <p:blipFill>
-          <a:blip r:embed="rId7">
-            <a:extLst>
-              <a:ext uri="{96DAC541-7B7A-43D3-8B79-37D633B846F1}">
-                <asvg:svgBlip xmlns:asvg="http://schemas.microsoft.com/office/drawing/2016/SVG/main" r:embed="rId8"/>
-              </a:ext>
-            </a:extLst>
-          </a:blip>
-          <a:stretch>
-            <a:fillRect/>
-          </a:stretch>
-        </p:blipFill>
-        <p:spPr>
-          <a:xfrm>
-            <a:off x="5252357" y="4967968"/>
-            <a:ext cx="3200400" cy="1200150"/>
-          </a:xfrm>
-          <a:prstGeom prst="rect">
-            <a:avLst/>
-          </a:prstGeom>
-        </p:spPr>
-      </p:pic>
-    </p:spTree>
-    <p:extLst>
-      <p:ext uri="{BB962C8B-B14F-4D97-AF65-F5344CB8AC3E}">
-        <p14:creationId xmlns:p14="http://schemas.microsoft.com/office/powerpoint/2010/main" val="1017115347"/>
       </p:ext>
     </p:extLst>
   </p:cSld>
@@ -28559,135 +29200,46 @@
           <a:chExt cx="0" cy="0"/>
         </a:xfrm>
       </p:grpSpPr>
-      <p:sp>
-        <p:nvSpPr>
-          <p:cNvPr id="2" name="Rubrik 1">
+      <p:pic>
+        <p:nvPicPr>
+          <p:cNvPr id="5" name="Picture 4" descr="A qr code with dots and lines&#10;&#10;Description automatically generated">
             <a:extLst>
               <a:ext uri="{FF2B5EF4-FFF2-40B4-BE49-F238E27FC236}">
-                <a16:creationId xmlns:a16="http://schemas.microsoft.com/office/drawing/2014/main" id="{88648668-72EC-B84A-CF41-78CB99E439F6}"/>
+                <a16:creationId xmlns:a16="http://schemas.microsoft.com/office/drawing/2014/main" id="{804E4A2B-280E-A078-68A9-76FDEDF10947}"/>
               </a:ext>
             </a:extLst>
           </p:cNvPr>
-          <p:cNvSpPr>
-            <a:spLocks noGrp="1"/>
-          </p:cNvSpPr>
-          <p:nvPr>
-            <p:ph type="ctrTitle"/>
-          </p:nvPr>
-        </p:nvSpPr>
+          <p:cNvPicPr>
+            <a:picLocks noChangeAspect="1"/>
+          </p:cNvPicPr>
+          <p:nvPr/>
+        </p:nvPicPr>
+        <p:blipFill>
+          <a:blip r:embed="rId2">
+            <a:extLst>
+              <a:ext uri="{28A0092B-C50C-407E-A947-70E740481C1C}">
+                <a14:useLocalDpi xmlns:a14="http://schemas.microsoft.com/office/drawing/2010/main" val="0"/>
+              </a:ext>
+            </a:extLst>
+          </a:blip>
+          <a:stretch>
+            <a:fillRect/>
+          </a:stretch>
+        </p:blipFill>
         <p:spPr>
           <a:xfrm>
-            <a:off x="1524000" y="1122363"/>
-            <a:ext cx="9144000" cy="1141866"/>
-          </a:xfrm>
-        </p:spPr>
-        <p:txBody>
-          <a:bodyPr/>
-          <a:lstStyle/>
-          <a:p>
-            <a:r>
-              <a:rPr lang="sv-SE" dirty="0"/>
-              <a:t>Data </a:t>
-            </a:r>
-            <a:r>
-              <a:rPr lang="sv-SE" dirty="0" err="1"/>
-              <a:t>Saturday</a:t>
-            </a:r>
-            <a:r>
-              <a:rPr lang="sv-SE" dirty="0"/>
-              <a:t> 2025</a:t>
-            </a:r>
-          </a:p>
-        </p:txBody>
-      </p:sp>
-      <p:sp>
-        <p:nvSpPr>
-          <p:cNvPr id="4" name="Rubrik 1">
-            <a:extLst>
-              <a:ext uri="{FF2B5EF4-FFF2-40B4-BE49-F238E27FC236}">
-                <a16:creationId xmlns:a16="http://schemas.microsoft.com/office/drawing/2014/main" id="{1EDBABA1-4495-4312-255E-3EC57EC4C19C}"/>
-              </a:ext>
-            </a:extLst>
-          </p:cNvPr>
-          <p:cNvSpPr txBox="1">
-            <a:spLocks/>
-          </p:cNvSpPr>
-          <p:nvPr/>
-        </p:nvSpPr>
-        <p:spPr>
-          <a:xfrm>
-            <a:off x="1404257" y="2264229"/>
-            <a:ext cx="9144000" cy="1141866"/>
+            <a:off x="4234542" y="1567542"/>
+            <a:ext cx="3722915" cy="3722915"/>
           </a:xfrm>
           <a:prstGeom prst="rect">
             <a:avLst/>
           </a:prstGeom>
         </p:spPr>
-        <p:txBody>
-          <a:bodyPr vert="horz" lIns="91440" tIns="45720" rIns="91440" bIns="45720" rtlCol="0" anchor="b">
-            <a:normAutofit/>
-          </a:bodyPr>
-          <a:lstStyle>
-            <a:lvl1pPr algn="ctr" defTabSz="914400" rtl="0" eaLnBrk="1" latinLnBrk="0" hangingPunct="1">
-              <a:lnSpc>
-                <a:spcPct val="90000"/>
-              </a:lnSpc>
-              <a:spcBef>
-                <a:spcPct val="0"/>
-              </a:spcBef>
-              <a:buNone/>
-              <a:defRPr sz="6000" kern="1200">
-                <a:solidFill>
-                  <a:schemeClr val="tx1"/>
-                </a:solidFill>
-                <a:latin typeface="+mj-lt"/>
-                <a:ea typeface="+mj-ea"/>
-                <a:cs typeface="+mj-cs"/>
-              </a:defRPr>
-            </a:lvl1pPr>
-          </a:lstStyle>
-          <a:p>
-            <a:pPr marL="0" marR="0" lvl="0" indent="0" algn="ctr" defTabSz="914400" rtl="0" eaLnBrk="1" fontAlgn="auto" latinLnBrk="0" hangingPunct="1">
-              <a:lnSpc>
-                <a:spcPct val="90000"/>
-              </a:lnSpc>
-              <a:spcBef>
-                <a:spcPct val="0"/>
-              </a:spcBef>
-              <a:spcAft>
-                <a:spcPts val="0"/>
-              </a:spcAft>
-              <a:buClrTx/>
-              <a:buSzTx/>
-              <a:buFontTx/>
-              <a:buNone/>
-              <a:tabLst/>
-              <a:defRPr/>
-            </a:pPr>
-            <a:r>
-              <a:rPr kumimoji="0" lang="sv-SE" sz="6000" b="0" i="0" u="none" strike="noStrike" kern="1200" cap="none" spc="0" normalizeH="0" baseline="0" noProof="0" dirty="0">
-                <a:ln>
-                  <a:noFill/>
-                </a:ln>
-                <a:solidFill>
-                  <a:prstClr val="black"/>
-                </a:solidFill>
-                <a:effectLst/>
-                <a:uLnTx/>
-                <a:uFillTx/>
-                <a:latin typeface="Calibri Light" panose="020F0302020204030204"/>
-                <a:ea typeface="+mj-ea"/>
-                <a:cs typeface="+mj-cs"/>
-              </a:rPr>
-              <a:t>September 6.</a:t>
-            </a:r>
-          </a:p>
-        </p:txBody>
-      </p:sp>
+      </p:pic>
     </p:spTree>
     <p:extLst>
       <p:ext uri="{BB962C8B-B14F-4D97-AF65-F5344CB8AC3E}">
-        <p14:creationId xmlns:p14="http://schemas.microsoft.com/office/powerpoint/2010/main" val="872838195"/>
+        <p14:creationId xmlns:p14="http://schemas.microsoft.com/office/powerpoint/2010/main" val="1720038049"/>
       </p:ext>
     </p:extLst>
   </p:cSld>
@@ -30856,7 +31408,7 @@
 </file>
 
 <file path=ppt/theme/theme2.xml><?xml version="1.0" encoding="utf-8"?>
-<a:theme xmlns:a="http://schemas.openxmlformats.org/drawingml/2006/main" name="Office-tema">
+<a:theme xmlns:a="http://schemas.openxmlformats.org/drawingml/2006/main" name="1_Office Theme">
   <a:themeElements>
     <a:clrScheme name="Office">
       <a:dk1>
@@ -31148,4 +31700,319 @@
     </a:ext>
   </a:extLst>
 </a:theme>
+</file>
+
+<file path=ppt/theme/theme3.xml><?xml version="1.0" encoding="utf-8"?>
+<a:theme xmlns:a="http://schemas.openxmlformats.org/drawingml/2006/main" name="Office Theme">
+  <a:themeElements>
+    <a:clrScheme name="Office">
+      <a:dk1>
+        <a:sysClr val="windowText" lastClr="000000"/>
+      </a:dk1>
+      <a:lt1>
+        <a:sysClr val="window" lastClr="FFFFFF"/>
+      </a:lt1>
+      <a:dk2>
+        <a:srgbClr val="0E2841"/>
+      </a:dk2>
+      <a:lt2>
+        <a:srgbClr val="E8E8E8"/>
+      </a:lt2>
+      <a:accent1>
+        <a:srgbClr val="156082"/>
+      </a:accent1>
+      <a:accent2>
+        <a:srgbClr val="E97132"/>
+      </a:accent2>
+      <a:accent3>
+        <a:srgbClr val="196B24"/>
+      </a:accent3>
+      <a:accent4>
+        <a:srgbClr val="0F9ED5"/>
+      </a:accent4>
+      <a:accent5>
+        <a:srgbClr val="A02B93"/>
+      </a:accent5>
+      <a:accent6>
+        <a:srgbClr val="4EA72E"/>
+      </a:accent6>
+      <a:hlink>
+        <a:srgbClr val="467886"/>
+      </a:hlink>
+      <a:folHlink>
+        <a:srgbClr val="96607D"/>
+      </a:folHlink>
+    </a:clrScheme>
+    <a:fontScheme name="Office">
+      <a:majorFont>
+        <a:latin typeface="Aptos Display" panose="02110004020202020204"/>
+        <a:ea typeface=""/>
+        <a:cs typeface=""/>
+        <a:font script="Jpan" typeface="游ゴシック Light"/>
+        <a:font script="Hang" typeface="맑은 고딕"/>
+        <a:font script="Hans" typeface="等线 Light"/>
+        <a:font script="Hant" typeface="新細明體"/>
+        <a:font script="Arab" typeface="Times New Roman"/>
+        <a:font script="Hebr" typeface="Times New Roman"/>
+        <a:font script="Thai" typeface="Angsana New"/>
+        <a:font script="Ethi" typeface="Nyala"/>
+        <a:font script="Beng" typeface="Vrinda"/>
+        <a:font script="Gujr" typeface="Shruti"/>
+        <a:font script="Khmr" typeface="MoolBoran"/>
+        <a:font script="Knda" typeface="Tunga"/>
+        <a:font script="Guru" typeface="Raavi"/>
+        <a:font script="Cans" typeface="Euphemia"/>
+        <a:font script="Cher" typeface="Plantagenet Cherokee"/>
+        <a:font script="Yiii" typeface="Microsoft Yi Baiti"/>
+        <a:font script="Tibt" typeface="Microsoft Himalaya"/>
+        <a:font script="Thaa" typeface="MV Boli"/>
+        <a:font script="Deva" typeface="Mangal"/>
+        <a:font script="Telu" typeface="Gautami"/>
+        <a:font script="Taml" typeface="Latha"/>
+        <a:font script="Syrc" typeface="Estrangelo Edessa"/>
+        <a:font script="Orya" typeface="Kalinga"/>
+        <a:font script="Mlym" typeface="Kartika"/>
+        <a:font script="Laoo" typeface="DokChampa"/>
+        <a:font script="Sinh" typeface="Iskoola Pota"/>
+        <a:font script="Mong" typeface="Mongolian Baiti"/>
+        <a:font script="Viet" typeface="Times New Roman"/>
+        <a:font script="Uigh" typeface="Microsoft Uighur"/>
+        <a:font script="Geor" typeface="Sylfaen"/>
+        <a:font script="Armn" typeface="Arial"/>
+        <a:font script="Bugi" typeface="Leelawadee UI"/>
+        <a:font script="Bopo" typeface="Microsoft JhengHei"/>
+        <a:font script="Java" typeface="Javanese Text"/>
+        <a:font script="Lisu" typeface="Segoe UI"/>
+        <a:font script="Mymr" typeface="Myanmar Text"/>
+        <a:font script="Nkoo" typeface="Ebrima"/>
+        <a:font script="Olck" typeface="Nirmala UI"/>
+        <a:font script="Osma" typeface="Ebrima"/>
+        <a:font script="Phag" typeface="Phagspa"/>
+        <a:font script="Syrn" typeface="Estrangelo Edessa"/>
+        <a:font script="Syrj" typeface="Estrangelo Edessa"/>
+        <a:font script="Syre" typeface="Estrangelo Edessa"/>
+        <a:font script="Sora" typeface="Nirmala UI"/>
+        <a:font script="Tale" typeface="Microsoft Tai Le"/>
+        <a:font script="Talu" typeface="Microsoft New Tai Lue"/>
+        <a:font script="Tfng" typeface="Ebrima"/>
+      </a:majorFont>
+      <a:minorFont>
+        <a:latin typeface="Aptos" panose="02110004020202020204"/>
+        <a:ea typeface=""/>
+        <a:cs typeface=""/>
+        <a:font script="Jpan" typeface="游ゴシック"/>
+        <a:font script="Hang" typeface="맑은 고딕"/>
+        <a:font script="Hans" typeface="等线"/>
+        <a:font script="Hant" typeface="新細明體"/>
+        <a:font script="Arab" typeface="Arial"/>
+        <a:font script="Hebr" typeface="Arial"/>
+        <a:font script="Thai" typeface="Cordia New"/>
+        <a:font script="Ethi" typeface="Nyala"/>
+        <a:font script="Beng" typeface="Vrinda"/>
+        <a:font script="Gujr" typeface="Shruti"/>
+        <a:font script="Khmr" typeface="DaunPenh"/>
+        <a:font script="Knda" typeface="Tunga"/>
+        <a:font script="Guru" typeface="Raavi"/>
+        <a:font script="Cans" typeface="Euphemia"/>
+        <a:font script="Cher" typeface="Plantagenet Cherokee"/>
+        <a:font script="Yiii" typeface="Microsoft Yi Baiti"/>
+        <a:font script="Tibt" typeface="Microsoft Himalaya"/>
+        <a:font script="Thaa" typeface="MV Boli"/>
+        <a:font script="Deva" typeface="Mangal"/>
+        <a:font script="Telu" typeface="Gautami"/>
+        <a:font script="Taml" typeface="Latha"/>
+        <a:font script="Syrc" typeface="Estrangelo Edessa"/>
+        <a:font script="Orya" typeface="Kalinga"/>
+        <a:font script="Mlym" typeface="Kartika"/>
+        <a:font script="Laoo" typeface="DokChampa"/>
+        <a:font script="Sinh" typeface="Iskoola Pota"/>
+        <a:font script="Mong" typeface="Mongolian Baiti"/>
+        <a:font script="Viet" typeface="Arial"/>
+        <a:font script="Uigh" typeface="Microsoft Uighur"/>
+        <a:font script="Geor" typeface="Sylfaen"/>
+        <a:font script="Armn" typeface="Arial"/>
+        <a:font script="Bugi" typeface="Leelawadee UI"/>
+        <a:font script="Bopo" typeface="Microsoft JhengHei"/>
+        <a:font script="Java" typeface="Javanese Text"/>
+        <a:font script="Lisu" typeface="Segoe UI"/>
+        <a:font script="Mymr" typeface="Myanmar Text"/>
+        <a:font script="Nkoo" typeface="Ebrima"/>
+        <a:font script="Olck" typeface="Nirmala UI"/>
+        <a:font script="Osma" typeface="Ebrima"/>
+        <a:font script="Phag" typeface="Phagspa"/>
+        <a:font script="Syrn" typeface="Estrangelo Edessa"/>
+        <a:font script="Syrj" typeface="Estrangelo Edessa"/>
+        <a:font script="Syre" typeface="Estrangelo Edessa"/>
+        <a:font script="Sora" typeface="Nirmala UI"/>
+        <a:font script="Tale" typeface="Microsoft Tai Le"/>
+        <a:font script="Talu" typeface="Microsoft New Tai Lue"/>
+        <a:font script="Tfng" typeface="Ebrima"/>
+      </a:minorFont>
+    </a:fontScheme>
+    <a:fmtScheme name="Office">
+      <a:fillStyleLst>
+        <a:solidFill>
+          <a:schemeClr val="phClr"/>
+        </a:solidFill>
+        <a:gradFill rotWithShape="1">
+          <a:gsLst>
+            <a:gs pos="0">
+              <a:schemeClr val="phClr">
+                <a:lumMod val="110000"/>
+                <a:satMod val="105000"/>
+                <a:tint val="67000"/>
+              </a:schemeClr>
+            </a:gs>
+            <a:gs pos="50000">
+              <a:schemeClr val="phClr">
+                <a:lumMod val="105000"/>
+                <a:satMod val="103000"/>
+                <a:tint val="73000"/>
+              </a:schemeClr>
+            </a:gs>
+            <a:gs pos="100000">
+              <a:schemeClr val="phClr">
+                <a:lumMod val="105000"/>
+                <a:satMod val="109000"/>
+                <a:tint val="81000"/>
+              </a:schemeClr>
+            </a:gs>
+          </a:gsLst>
+          <a:lin ang="5400000" scaled="0"/>
+        </a:gradFill>
+        <a:gradFill rotWithShape="1">
+          <a:gsLst>
+            <a:gs pos="0">
+              <a:schemeClr val="phClr">
+                <a:satMod val="103000"/>
+                <a:lumMod val="102000"/>
+                <a:tint val="94000"/>
+              </a:schemeClr>
+            </a:gs>
+            <a:gs pos="50000">
+              <a:schemeClr val="phClr">
+                <a:satMod val="110000"/>
+                <a:lumMod val="100000"/>
+                <a:shade val="100000"/>
+              </a:schemeClr>
+            </a:gs>
+            <a:gs pos="100000">
+              <a:schemeClr val="phClr">
+                <a:lumMod val="99000"/>
+                <a:satMod val="120000"/>
+                <a:shade val="78000"/>
+              </a:schemeClr>
+            </a:gs>
+          </a:gsLst>
+          <a:lin ang="5400000" scaled="0"/>
+        </a:gradFill>
+      </a:fillStyleLst>
+      <a:lnStyleLst>
+        <a:ln w="12700" cap="flat" cmpd="sng" algn="ctr">
+          <a:solidFill>
+            <a:schemeClr val="phClr"/>
+          </a:solidFill>
+          <a:prstDash val="solid"/>
+          <a:miter lim="800000"/>
+        </a:ln>
+        <a:ln w="19050" cap="flat" cmpd="sng" algn="ctr">
+          <a:solidFill>
+            <a:schemeClr val="phClr"/>
+          </a:solidFill>
+          <a:prstDash val="solid"/>
+          <a:miter lim="800000"/>
+        </a:ln>
+        <a:ln w="25400" cap="flat" cmpd="sng" algn="ctr">
+          <a:solidFill>
+            <a:schemeClr val="phClr"/>
+          </a:solidFill>
+          <a:prstDash val="solid"/>
+          <a:miter lim="800000"/>
+        </a:ln>
+      </a:lnStyleLst>
+      <a:effectStyleLst>
+        <a:effectStyle>
+          <a:effectLst/>
+        </a:effectStyle>
+        <a:effectStyle>
+          <a:effectLst/>
+        </a:effectStyle>
+        <a:effectStyle>
+          <a:effectLst>
+            <a:outerShdw blurRad="57150" dist="19050" dir="5400000" algn="ctr" rotWithShape="0">
+              <a:srgbClr val="000000">
+                <a:alpha val="63000"/>
+              </a:srgbClr>
+            </a:outerShdw>
+          </a:effectLst>
+        </a:effectStyle>
+      </a:effectStyleLst>
+      <a:bgFillStyleLst>
+        <a:solidFill>
+          <a:schemeClr val="phClr"/>
+        </a:solidFill>
+        <a:solidFill>
+          <a:schemeClr val="phClr">
+            <a:tint val="95000"/>
+            <a:satMod val="170000"/>
+          </a:schemeClr>
+        </a:solidFill>
+        <a:gradFill rotWithShape="1">
+          <a:gsLst>
+            <a:gs pos="0">
+              <a:schemeClr val="phClr">
+                <a:tint val="93000"/>
+                <a:satMod val="150000"/>
+                <a:shade val="98000"/>
+                <a:lumMod val="102000"/>
+              </a:schemeClr>
+            </a:gs>
+            <a:gs pos="50000">
+              <a:schemeClr val="phClr">
+                <a:tint val="98000"/>
+                <a:satMod val="130000"/>
+                <a:shade val="90000"/>
+                <a:lumMod val="103000"/>
+              </a:schemeClr>
+            </a:gs>
+            <a:gs pos="100000">
+              <a:schemeClr val="phClr">
+                <a:shade val="63000"/>
+                <a:satMod val="120000"/>
+              </a:schemeClr>
+            </a:gs>
+          </a:gsLst>
+          <a:lin ang="5400000" scaled="0"/>
+        </a:gradFill>
+      </a:bgFillStyleLst>
+    </a:fmtScheme>
+  </a:themeElements>
+  <a:objectDefaults>
+    <a:lnDef>
+      <a:spPr/>
+      <a:bodyPr/>
+      <a:lstStyle/>
+      <a:style>
+        <a:lnRef idx="2">
+          <a:schemeClr val="accent1"/>
+        </a:lnRef>
+        <a:fillRef idx="0">
+          <a:schemeClr val="accent1"/>
+        </a:fillRef>
+        <a:effectRef idx="1">
+          <a:schemeClr val="accent1"/>
+        </a:effectRef>
+        <a:fontRef idx="minor">
+          <a:schemeClr val="tx1"/>
+        </a:fontRef>
+      </a:style>
+    </a:lnDef>
+  </a:objectDefaults>
+  <a:extraClrSchemeLst/>
+  <a:extLst>
+    <a:ext uri="{05A4C25C-085E-4340-85A3-A5531E510DB2}">
+      <thm15:themeFamily xmlns:thm15="http://schemas.microsoft.com/office/thememl/2012/main" name="Office Theme" id="{2E142A2C-CD16-42D6-873A-C26D2A0506FA}" vid="{1BDDFF52-6CD6-40A5-AB3C-68EB2F1E4D0A}"/>
+    </a:ext>
+  </a:extLst>
+</a:theme>
 </file>